--- a/docs/UBNDAI-pitch-deck.pptx
+++ b/docs/UBNDAI-pitch-deck.pptx
@@ -19,6 +19,7 @@
     <p:sldId id="267" r:id="rId19"/>
     <p:sldId id="268" r:id="rId20"/>
     <p:sldId id="269" r:id="rId21"/>
+    <p:sldId id="270" r:id="rId22"/>
   </p:sldIdLst>
   <p:sldSz cx="12191695" cy="6858000" type="screen4x3"/>
   <p:notesSz cx="6858000" cy="9144000"/>
@@ -585,7 +586,7 @@
           <a:lstStyle/>
           <a:p>
             <a:r>
-              <a:t>Trả lời lỗi #4: 'Không rõ ai trả tiền'.</a:t>
+              <a:t>Đây là điểm yếu lớn nhất hiện tại của đội (tiêu chí Business Viability = 20 điểm).</a:t>
             </a:r>
           </a:p>
         </p:txBody>
@@ -655,7 +656,7 @@
           <a:lstStyle/>
           <a:p>
             <a:r>
-              <a:t>Thành thật về chỗ còn thiếu tạo niềm tin hơn là tỏ ra đủ mọi thứ.</a:t>
+              <a:t>Trả lời lỗi #4: 'Không rõ ai trả tiền'.</a:t>
             </a:r>
           </a:p>
         </p:txBody>
@@ -725,7 +726,7 @@
           <a:lstStyle/>
           <a:p>
             <a:r>
-              <a:t>4:00–5:00 | VISION &amp; ASK (20%).</a:t>
+              <a:t>Thành thật về chỗ còn thiếu tạo niềm tin hơn là tỏ ra đủ mọi thứ.</a:t>
             </a:r>
           </a:p>
         </p:txBody>
@@ -795,7 +796,7 @@
           <a:lstStyle/>
           <a:p>
             <a:r>
-              <a:t>Lỗi #5 trong tài liệu là 'thiếu Ask rõ ràng'. Câu Ask phải cụ thể, có số, có thời hạn.</a:t>
+              <a:t>4:00–5:00 | VISION &amp; ASK (20%).</a:t>
             </a:r>
           </a:p>
         </p:txBody>
@@ -865,6 +866,76 @@
           <a:lstStyle/>
           <a:p>
             <a:r>
+              <a:t>Lỗi #5 trong tài liệu là 'thiếu Ask rõ ràng'. Câu Ask phải cụ thể, có số, có thời hạn.</a:t>
+            </a:r>
+          </a:p>
+        </p:txBody>
+      </p:sp>
+      <p:sp>
+        <p:nvSpPr>
+          <p:cNvPr id="4" name="Slide Number Placeholder 3"/>
+          <p:cNvSpPr>
+            <a:spLocks noGrp="1"/>
+          </p:cNvSpPr>
+          <p:nvPr>
+            <p:ph type="sldNum" idx="5" sz="quarter"/>
+          </p:nvPr>
+        </p:nvSpPr>
+        <p:spPr/>
+      </p:sp>
+    </p:spTree>
+  </p:cSld>
+  <p:clrMapOvr>
+    <a:masterClrMapping/>
+  </p:clrMapOvr>
+</p:notes>
+</file>
+
+<file path=ppt/notesSlides/notesSlide15.xml><?xml version="1.0" encoding="utf-8"?>
+<p:notes xmlns:a="http://schemas.openxmlformats.org/drawingml/2006/main" xmlns:p="http://schemas.openxmlformats.org/presentationml/2006/main" xmlns:r="http://schemas.openxmlformats.org/officeDocument/2006/relationships">
+  <p:cSld>
+    <p:spTree>
+      <p:nvGrpSpPr>
+        <p:cNvPr id="1" name=""/>
+        <p:cNvGrpSpPr/>
+        <p:nvPr/>
+      </p:nvGrpSpPr>
+      <p:grpSpPr>
+        <a:xfrm>
+          <a:off x="0" y="0"/>
+          <a:ext cx="0" cy="0"/>
+          <a:chOff x="0" y="0"/>
+          <a:chExt cx="0" cy="0"/>
+        </a:xfrm>
+      </p:grpSpPr>
+      <p:sp>
+        <p:nvSpPr>
+          <p:cNvPr id="2" name="Slide Image Placeholder 1"/>
+          <p:cNvSpPr>
+            <a:spLocks noGrp="1"/>
+          </p:cNvSpPr>
+          <p:nvPr>
+            <p:ph type="sldImg" idx="2"/>
+          </p:nvPr>
+        </p:nvSpPr>
+        <p:spPr/>
+      </p:sp>
+      <p:sp>
+        <p:nvSpPr>
+          <p:cNvPr id="3" name="Notes Placeholder 2"/>
+          <p:cNvSpPr>
+            <a:spLocks noGrp="1"/>
+          </p:cNvSpPr>
+          <p:nvPr>
+            <p:ph type="body" idx="3" sz="quarter"/>
+          </p:nvPr>
+        </p:nvSpPr>
+        <p:spPr/>
+        <p:txBody>
+          <a:bodyPr/>
+          <a:lstStyle/>
+          <a:p>
+            <a:r>
               <a:t>Kết bằng lợi ích người dùng, không kết bằng công nghệ.</a:t>
             </a:r>
           </a:p>
@@ -1355,7 +1426,7 @@
           <a:lstStyle/>
           <a:p>
             <a:r>
-              <a:t>Trả lời câu 'MOAT' trong 7 lớp lọc của nhà đầu tư.</a:t>
+              <a:t>Slide dành cho tiêu chí AI Safety &amp; Trust. Nếu bị hỏi 'độ chính xác bao nhiêu', trả lời bằng chốt nhầm 0/60 trước, rồi mới nói độ phủ 60% trên bộ giữ riêng — tự nêu điểm yếu trước khi giám khảo nêu.</a:t>
             </a:r>
           </a:p>
         </p:txBody>
@@ -1425,7 +1496,7 @@
           <a:lstStyle/>
           <a:p>
             <a:r>
-              <a:t>Đây là điểm yếu lớn nhất hiện tại của đội (tiêu chí Business Viability = 20 điểm).</a:t>
+              <a:t>Trả lời câu 'MOAT' trong 7 lớp lọc của nhà đầu tư.</a:t>
             </a:r>
           </a:p>
         </p:txBody>
@@ -4653,7 +4724,7 @@
                 </a:solidFill>
                 <a:latin typeface="Segoe UI"/>
               </a:rPr>
-              <a:t>MÔ HÌNH KINH DOANH</a:t>
+              <a:t>THỊ TRƯỜNG</a:t>
             </a:r>
           </a:p>
           <a:p>
@@ -4669,7 +4740,7 @@
                 </a:solidFill>
                 <a:latin typeface="Segoe UI"/>
               </a:rPr>
-              <a:t>Ai trả tiền, trả cho cái gì</a:t>
+              <a:t>Quy mô cơ hội</a:t>
             </a:r>
           </a:p>
         </p:txBody>
@@ -4682,437 +4753,8 @@
         </p:nvSpPr>
         <p:spPr>
           <a:xfrm>
-            <a:off x="685800" y="2286000"/>
-            <a:ext cx="10789920" cy="1078992"/>
-          </a:xfrm>
-          <a:prstGeom prst="rect">
-            <a:avLst/>
-          </a:prstGeom>
-          <a:solidFill>
-            <a:srgbClr val="FFFFFF"/>
-          </a:solidFill>
-          <a:ln>
-            <a:noFill/>
-          </a:ln>
-          <a:effectLst/>
-        </p:spPr>
-        <p:style>
-          <a:lnRef idx="1">
-            <a:schemeClr val="accent1"/>
-          </a:lnRef>
-          <a:fillRef idx="3">
-            <a:schemeClr val="accent1"/>
-          </a:fillRef>
-          <a:effectRef idx="2">
-            <a:schemeClr val="accent1"/>
-          </a:effectRef>
-          <a:fontRef idx="minor">
-            <a:schemeClr val="lt1"/>
-          </a:fontRef>
-        </p:style>
-        <p:txBody>
-          <a:bodyPr rtlCol="0" anchor="ctr"/>
-          <a:lstStyle/>
-          <a:p>
-            <a:pPr algn="ctr"/>
-          </a:p>
-        </p:txBody>
-      </p:sp>
-      <p:sp>
-        <p:nvSpPr>
-          <p:cNvPr id="4" name="Rectangle 3"/>
-          <p:cNvSpPr/>
-          <p:nvPr/>
-        </p:nvSpPr>
-        <p:spPr>
-          <a:xfrm>
-            <a:off x="685800" y="2286000"/>
-            <a:ext cx="50292" cy="1078992"/>
-          </a:xfrm>
-          <a:prstGeom prst="rect">
-            <a:avLst/>
-          </a:prstGeom>
-          <a:solidFill>
-            <a:srgbClr val="176FA6"/>
-          </a:solidFill>
-          <a:ln>
-            <a:noFill/>
-          </a:ln>
-          <a:effectLst/>
-        </p:spPr>
-        <p:style>
-          <a:lnRef idx="1">
-            <a:schemeClr val="accent1"/>
-          </a:lnRef>
-          <a:fillRef idx="3">
-            <a:schemeClr val="accent1"/>
-          </a:fillRef>
-          <a:effectRef idx="2">
-            <a:schemeClr val="accent1"/>
-          </a:effectRef>
-          <a:fontRef idx="minor">
-            <a:schemeClr val="lt1"/>
-          </a:fontRef>
-        </p:style>
-        <p:txBody>
-          <a:bodyPr rtlCol="0" anchor="ctr"/>
-          <a:lstStyle/>
-          <a:p>
-            <a:pPr algn="ctr"/>
-          </a:p>
-        </p:txBody>
-      </p:sp>
-      <p:sp>
-        <p:nvSpPr>
-          <p:cNvPr id="5" name="TextBox 4"/>
-          <p:cNvSpPr txBox="1"/>
-          <p:nvPr/>
-        </p:nvSpPr>
-        <p:spPr>
-          <a:xfrm>
-            <a:off x="914400" y="2432304"/>
-            <a:ext cx="10378440" cy="804671"/>
-          </a:xfrm>
-          <a:prstGeom prst="rect">
-            <a:avLst/>
-          </a:prstGeom>
-          <a:noFill/>
-        </p:spPr>
-        <p:txBody>
-          <a:bodyPr wrap="square">
-            <a:spAutoFit/>
-          </a:bodyPr>
-          <a:lstStyle/>
-          <a:p>
-            <a:pPr algn="l">
-              <a:spcAft>
-                <a:spcPts val="400"/>
-              </a:spcAft>
-            </a:pPr>
-            <a:r>
-              <a:rPr sz="1500" b="1">
-                <a:solidFill>
-                  <a:srgbClr val="0D3158"/>
-                </a:solidFill>
-                <a:latin typeface="Segoe UI"/>
-              </a:rPr>
-              <a:t>Người dùng cuối</a:t>
-            </a:r>
-          </a:p>
-          <a:p>
-            <a:pPr algn="l">
-              <a:spcAft>
-                <a:spcPts val="400"/>
-              </a:spcAft>
-            </a:pPr>
-            <a:r>
-              <a:rPr sz="1200" b="0">
-                <a:solidFill>
-                  <a:srgbClr val="5B7085"/>
-                </a:solidFill>
-                <a:latin typeface="Segoe UI"/>
-              </a:rPr>
-              <a:t>Người dân — miễn phí. Đây là dịch vụ công, thu phí người dân là phản tác dụng.</a:t>
-            </a:r>
-          </a:p>
-        </p:txBody>
-      </p:sp>
-      <p:sp>
-        <p:nvSpPr>
-          <p:cNvPr id="6" name="Rectangle 5"/>
-          <p:cNvSpPr/>
-          <p:nvPr/>
-        </p:nvSpPr>
-        <p:spPr>
-          <a:xfrm>
-            <a:off x="685800" y="3520440"/>
-            <a:ext cx="10789920" cy="1078992"/>
-          </a:xfrm>
-          <a:prstGeom prst="rect">
-            <a:avLst/>
-          </a:prstGeom>
-          <a:solidFill>
-            <a:srgbClr val="FFFFFF"/>
-          </a:solidFill>
-          <a:ln>
-            <a:noFill/>
-          </a:ln>
-          <a:effectLst/>
-        </p:spPr>
-        <p:style>
-          <a:lnRef idx="1">
-            <a:schemeClr val="accent1"/>
-          </a:lnRef>
-          <a:fillRef idx="3">
-            <a:schemeClr val="accent1"/>
-          </a:fillRef>
-          <a:effectRef idx="2">
-            <a:schemeClr val="accent1"/>
-          </a:effectRef>
-          <a:fontRef idx="minor">
-            <a:schemeClr val="lt1"/>
-          </a:fontRef>
-        </p:style>
-        <p:txBody>
-          <a:bodyPr rtlCol="0" anchor="ctr"/>
-          <a:lstStyle/>
-          <a:p>
-            <a:pPr algn="ctr"/>
-          </a:p>
-        </p:txBody>
-      </p:sp>
-      <p:sp>
-        <p:nvSpPr>
-          <p:cNvPr id="7" name="Rectangle 6"/>
-          <p:cNvSpPr/>
-          <p:nvPr/>
-        </p:nvSpPr>
-        <p:spPr>
-          <a:xfrm>
-            <a:off x="685800" y="3520440"/>
-            <a:ext cx="50292" cy="1078992"/>
-          </a:xfrm>
-          <a:prstGeom prst="rect">
-            <a:avLst/>
-          </a:prstGeom>
-          <a:solidFill>
-            <a:srgbClr val="176FA6"/>
-          </a:solidFill>
-          <a:ln>
-            <a:noFill/>
-          </a:ln>
-          <a:effectLst/>
-        </p:spPr>
-        <p:style>
-          <a:lnRef idx="1">
-            <a:schemeClr val="accent1"/>
-          </a:lnRef>
-          <a:fillRef idx="3">
-            <a:schemeClr val="accent1"/>
-          </a:fillRef>
-          <a:effectRef idx="2">
-            <a:schemeClr val="accent1"/>
-          </a:effectRef>
-          <a:fontRef idx="minor">
-            <a:schemeClr val="lt1"/>
-          </a:fontRef>
-        </p:style>
-        <p:txBody>
-          <a:bodyPr rtlCol="0" anchor="ctr"/>
-          <a:lstStyle/>
-          <a:p>
-            <a:pPr algn="ctr"/>
-          </a:p>
-        </p:txBody>
-      </p:sp>
-      <p:sp>
-        <p:nvSpPr>
-          <p:cNvPr id="8" name="TextBox 7"/>
-          <p:cNvSpPr txBox="1"/>
-          <p:nvPr/>
-        </p:nvSpPr>
-        <p:spPr>
-          <a:xfrm>
-            <a:off x="914400" y="3666744"/>
-            <a:ext cx="10378440" cy="804671"/>
-          </a:xfrm>
-          <a:prstGeom prst="rect">
-            <a:avLst/>
-          </a:prstGeom>
-          <a:noFill/>
-        </p:spPr>
-        <p:txBody>
-          <a:bodyPr wrap="square">
-            <a:spAutoFit/>
-          </a:bodyPr>
-          <a:lstStyle/>
-          <a:p>
-            <a:pPr algn="l">
-              <a:spcAft>
-                <a:spcPts val="400"/>
-              </a:spcAft>
-            </a:pPr>
-            <a:r>
-              <a:rPr sz="1500" b="1">
-                <a:solidFill>
-                  <a:srgbClr val="0D3158"/>
-                </a:solidFill>
-                <a:latin typeface="Segoe UI"/>
-              </a:rPr>
-              <a:t>Người trả tiền</a:t>
-            </a:r>
-          </a:p>
-          <a:p>
-            <a:pPr algn="l">
-              <a:spcAft>
-                <a:spcPts val="400"/>
-              </a:spcAft>
-            </a:pPr>
-            <a:r>
-              <a:rPr sz="1200" b="0">
-                <a:solidFill>
-                  <a:srgbClr val="5B7085"/>
-                </a:solidFill>
-                <a:latin typeface="Segoe UI"/>
-              </a:rPr>
-              <a:t>Cơ quan nhà nước (UBND cấp xã/huyện/tỉnh) — trả cho việc giảm tải quầy tiếp nhận và có số liệu điều hành.</a:t>
-            </a:r>
-          </a:p>
-        </p:txBody>
-      </p:sp>
-      <p:sp>
-        <p:nvSpPr>
-          <p:cNvPr id="9" name="Rectangle 8"/>
-          <p:cNvSpPr/>
-          <p:nvPr/>
-        </p:nvSpPr>
-        <p:spPr>
-          <a:xfrm>
-            <a:off x="685800" y="4754880"/>
-            <a:ext cx="10789920" cy="1078992"/>
-          </a:xfrm>
-          <a:prstGeom prst="rect">
-            <a:avLst/>
-          </a:prstGeom>
-          <a:solidFill>
-            <a:srgbClr val="FFFFFF"/>
-          </a:solidFill>
-          <a:ln>
-            <a:noFill/>
-          </a:ln>
-          <a:effectLst/>
-        </p:spPr>
-        <p:style>
-          <a:lnRef idx="1">
-            <a:schemeClr val="accent1"/>
-          </a:lnRef>
-          <a:fillRef idx="3">
-            <a:schemeClr val="accent1"/>
-          </a:fillRef>
-          <a:effectRef idx="2">
-            <a:schemeClr val="accent1"/>
-          </a:effectRef>
-          <a:fontRef idx="minor">
-            <a:schemeClr val="lt1"/>
-          </a:fontRef>
-        </p:style>
-        <p:txBody>
-          <a:bodyPr rtlCol="0" anchor="ctr"/>
-          <a:lstStyle/>
-          <a:p>
-            <a:pPr algn="ctr"/>
-          </a:p>
-        </p:txBody>
-      </p:sp>
-      <p:sp>
-        <p:nvSpPr>
-          <p:cNvPr id="10" name="Rectangle 9"/>
-          <p:cNvSpPr/>
-          <p:nvPr/>
-        </p:nvSpPr>
-        <p:spPr>
-          <a:xfrm>
-            <a:off x="685800" y="4754880"/>
-            <a:ext cx="50292" cy="1078992"/>
-          </a:xfrm>
-          <a:prstGeom prst="rect">
-            <a:avLst/>
-          </a:prstGeom>
-          <a:solidFill>
-            <a:srgbClr val="176FA6"/>
-          </a:solidFill>
-          <a:ln>
-            <a:noFill/>
-          </a:ln>
-          <a:effectLst/>
-        </p:spPr>
-        <p:style>
-          <a:lnRef idx="1">
-            <a:schemeClr val="accent1"/>
-          </a:lnRef>
-          <a:fillRef idx="3">
-            <a:schemeClr val="accent1"/>
-          </a:fillRef>
-          <a:effectRef idx="2">
-            <a:schemeClr val="accent1"/>
-          </a:effectRef>
-          <a:fontRef idx="minor">
-            <a:schemeClr val="lt1"/>
-          </a:fontRef>
-        </p:style>
-        <p:txBody>
-          <a:bodyPr rtlCol="0" anchor="ctr"/>
-          <a:lstStyle/>
-          <a:p>
-            <a:pPr algn="ctr"/>
-          </a:p>
-        </p:txBody>
-      </p:sp>
-      <p:sp>
-        <p:nvSpPr>
-          <p:cNvPr id="11" name="TextBox 10"/>
-          <p:cNvSpPr txBox="1"/>
-          <p:nvPr/>
-        </p:nvSpPr>
-        <p:spPr>
-          <a:xfrm>
-            <a:off x="914400" y="4901184"/>
-            <a:ext cx="10378440" cy="804671"/>
-          </a:xfrm>
-          <a:prstGeom prst="rect">
-            <a:avLst/>
-          </a:prstGeom>
-          <a:noFill/>
-        </p:spPr>
-        <p:txBody>
-          <a:bodyPr wrap="square">
-            <a:spAutoFit/>
-          </a:bodyPr>
-          <a:lstStyle/>
-          <a:p>
-            <a:pPr algn="l">
-              <a:spcAft>
-                <a:spcPts val="400"/>
-              </a:spcAft>
-            </a:pPr>
-            <a:r>
-              <a:rPr sz="1500" b="1">
-                <a:solidFill>
-                  <a:srgbClr val="0D3158"/>
-                </a:solidFill>
-                <a:latin typeface="Segoe UI"/>
-              </a:rPr>
-              <a:t>Hình thức</a:t>
-            </a:r>
-          </a:p>
-          <a:p>
-            <a:pPr algn="l">
-              <a:spcAft>
-                <a:spcPts val="400"/>
-              </a:spcAft>
-            </a:pPr>
-            <a:r>
-              <a:rPr sz="1200" b="0">
-                <a:solidFill>
-                  <a:srgbClr val="5B7085"/>
-                </a:solidFill>
-                <a:latin typeface="Segoe UI"/>
-              </a:rPr>
-              <a:t>Thuê bao theo đơn vị hành chính + phí triển khai ban đầu (chuẩn hoá danh mục thủ tục địa phương).</a:t>
-            </a:r>
-          </a:p>
-        </p:txBody>
-      </p:sp>
-      <p:sp>
-        <p:nvSpPr>
-          <p:cNvPr id="12" name="Rectangle 11"/>
-          <p:cNvSpPr/>
-          <p:nvPr/>
-        </p:nvSpPr>
-        <p:spPr>
-          <a:xfrm>
-            <a:off x="685800" y="6080760"/>
-            <a:ext cx="10789920" cy="502920"/>
+            <a:off x="685800" y="2194560"/>
+            <a:ext cx="10789920" cy="1371600"/>
           </a:xfrm>
           <a:prstGeom prst="rect">
             <a:avLst/>
@@ -5149,14 +4791,14 @@
       </p:sp>
       <p:sp>
         <p:nvSpPr>
-          <p:cNvPr id="13" name="Rectangle 12"/>
+          <p:cNvPr id="4" name="Rectangle 3"/>
           <p:cNvSpPr/>
           <p:nvPr/>
         </p:nvSpPr>
         <p:spPr>
           <a:xfrm>
-            <a:off x="685800" y="6080760"/>
-            <a:ext cx="50292" cy="502920"/>
+            <a:off x="685800" y="2194560"/>
+            <a:ext cx="50292" cy="1371600"/>
           </a:xfrm>
           <a:prstGeom prst="rect">
             <a:avLst/>
@@ -5193,14 +4835,14 @@
       </p:sp>
       <p:sp>
         <p:nvSpPr>
-          <p:cNvPr id="14" name="TextBox 13"/>
+          <p:cNvPr id="5" name="TextBox 4"/>
           <p:cNvSpPr txBox="1"/>
           <p:nvPr/>
         </p:nvSpPr>
         <p:spPr>
           <a:xfrm>
-            <a:off x="914400" y="6208776"/>
-            <a:ext cx="10378440" cy="246888"/>
+            <a:off x="914400" y="2322576"/>
+            <a:ext cx="10378440" cy="1115568"/>
           </a:xfrm>
           <a:prstGeom prst="rect">
             <a:avLst/>
@@ -5241,21 +4883,109 @@
                 </a:solidFill>
                 <a:latin typeface="Segoe UI"/>
               </a:rPr>
-              <a:t>Đơn giá dự kiến, chi phí vận hành/hồ sơ, điểm hoà vốn.</a:t>
-            </a:r>
-          </a:p>
-        </p:txBody>
-      </p:sp>
-      <p:sp>
-        <p:nvSpPr>
-          <p:cNvPr id="15" name="TextBox 14"/>
+              <a:t>TAM / SAM / SOM. Gợi ý nguồn công khai để lấy số: số đơn vị hành chính cấp xã sau sáp nhập; tổng số hồ sơ TTHC tiếp nhận/năm trên Cổng Dịch vụ công Quốc gia; ngân sách chuyển đổi số cấp tỉnh.</a:t>
+            </a:r>
+          </a:p>
+        </p:txBody>
+      </p:sp>
+      <p:sp>
+        <p:nvSpPr>
+          <p:cNvPr id="6" name="Rectangle 5"/>
+          <p:cNvSpPr/>
+          <p:nvPr/>
+        </p:nvSpPr>
+        <p:spPr>
+          <a:xfrm>
+            <a:off x="685800" y="3703320"/>
+            <a:ext cx="5303520" cy="1371600"/>
+          </a:xfrm>
+          <a:prstGeom prst="rect">
+            <a:avLst/>
+          </a:prstGeom>
+          <a:solidFill>
+            <a:srgbClr val="FDF1E7"/>
+          </a:solidFill>
+          <a:ln>
+            <a:noFill/>
+          </a:ln>
+          <a:effectLst/>
+        </p:spPr>
+        <p:style>
+          <a:lnRef idx="1">
+            <a:schemeClr val="accent1"/>
+          </a:lnRef>
+          <a:fillRef idx="3">
+            <a:schemeClr val="accent1"/>
+          </a:fillRef>
+          <a:effectRef idx="2">
+            <a:schemeClr val="accent1"/>
+          </a:effectRef>
+          <a:fontRef idx="minor">
+            <a:schemeClr val="lt1"/>
+          </a:fontRef>
+        </p:style>
+        <p:txBody>
+          <a:bodyPr rtlCol="0" anchor="ctr"/>
+          <a:lstStyle/>
+          <a:p>
+            <a:pPr algn="ctr"/>
+          </a:p>
+        </p:txBody>
+      </p:sp>
+      <p:sp>
+        <p:nvSpPr>
+          <p:cNvPr id="7" name="Rectangle 6"/>
+          <p:cNvSpPr/>
+          <p:nvPr/>
+        </p:nvSpPr>
+        <p:spPr>
+          <a:xfrm>
+            <a:off x="685800" y="3703320"/>
+            <a:ext cx="50292" cy="1371600"/>
+          </a:xfrm>
+          <a:prstGeom prst="rect">
+            <a:avLst/>
+          </a:prstGeom>
+          <a:solidFill>
+            <a:srgbClr val="C25A1E"/>
+          </a:solidFill>
+          <a:ln>
+            <a:noFill/>
+          </a:ln>
+          <a:effectLst/>
+        </p:spPr>
+        <p:style>
+          <a:lnRef idx="1">
+            <a:schemeClr val="accent1"/>
+          </a:lnRef>
+          <a:fillRef idx="3">
+            <a:schemeClr val="accent1"/>
+          </a:fillRef>
+          <a:effectRef idx="2">
+            <a:schemeClr val="accent1"/>
+          </a:effectRef>
+          <a:fontRef idx="minor">
+            <a:schemeClr val="lt1"/>
+          </a:fontRef>
+        </p:style>
+        <p:txBody>
+          <a:bodyPr rtlCol="0" anchor="ctr"/>
+          <a:lstStyle/>
+          <a:p>
+            <a:pPr algn="ctr"/>
+          </a:p>
+        </p:txBody>
+      </p:sp>
+      <p:sp>
+        <p:nvSpPr>
+          <p:cNvPr id="8" name="TextBox 7"/>
           <p:cNvSpPr txBox="1"/>
           <p:nvPr/>
         </p:nvSpPr>
         <p:spPr>
           <a:xfrm>
-            <a:off x="685800" y="5486400"/>
-            <a:ext cx="10789920" cy="548640"/>
+            <a:off x="914400" y="3831335"/>
+            <a:ext cx="4892040" cy="1115568"/>
           </a:xfrm>
           <a:prstGeom prst="rect">
             <a:avLst/>
@@ -5270,17 +5000,215 @@
           <a:p>
             <a:pPr algn="l">
               <a:spcAft>
+                <a:spcPts val="400"/>
+              </a:spcAft>
+            </a:pPr>
+            <a:r>
+              <a:rPr sz="1000" b="1">
+                <a:solidFill>
+                  <a:srgbClr val="C25A1E"/>
+                </a:solidFill>
+                <a:latin typeface="Segoe UI"/>
+              </a:rPr>
+              <a:t>⚠ CẦN SỐ LIỆU THẬT</a:t>
+            </a:r>
+          </a:p>
+          <a:p>
+            <a:pPr algn="l">
+              <a:spcAft>
+                <a:spcPts val="400"/>
+              </a:spcAft>
+            </a:pPr>
+            <a:r>
+              <a:rPr sz="1200" b="0">
+                <a:solidFill>
+                  <a:srgbClr val="1B2A3D"/>
+                </a:solidFill>
+                <a:latin typeface="Segoe UI"/>
+              </a:rPr>
+              <a:t>Vì sao là LÚC NÀY: chính sách chuyển đổi số, phân cấp về cấp xã, dữ liệu dân cư đã liên thông.</a:t>
+            </a:r>
+          </a:p>
+        </p:txBody>
+      </p:sp>
+      <p:sp>
+        <p:nvSpPr>
+          <p:cNvPr id="9" name="Rectangle 8"/>
+          <p:cNvSpPr/>
+          <p:nvPr/>
+        </p:nvSpPr>
+        <p:spPr>
+          <a:xfrm>
+            <a:off x="6172200" y="3703320"/>
+            <a:ext cx="5303520" cy="1371600"/>
+          </a:xfrm>
+          <a:prstGeom prst="rect">
+            <a:avLst/>
+          </a:prstGeom>
+          <a:solidFill>
+            <a:srgbClr val="FDF1E7"/>
+          </a:solidFill>
+          <a:ln>
+            <a:noFill/>
+          </a:ln>
+          <a:effectLst/>
+        </p:spPr>
+        <p:style>
+          <a:lnRef idx="1">
+            <a:schemeClr val="accent1"/>
+          </a:lnRef>
+          <a:fillRef idx="3">
+            <a:schemeClr val="accent1"/>
+          </a:fillRef>
+          <a:effectRef idx="2">
+            <a:schemeClr val="accent1"/>
+          </a:effectRef>
+          <a:fontRef idx="minor">
+            <a:schemeClr val="lt1"/>
+          </a:fontRef>
+        </p:style>
+        <p:txBody>
+          <a:bodyPr rtlCol="0" anchor="ctr"/>
+          <a:lstStyle/>
+          <a:p>
+            <a:pPr algn="ctr"/>
+          </a:p>
+        </p:txBody>
+      </p:sp>
+      <p:sp>
+        <p:nvSpPr>
+          <p:cNvPr id="10" name="Rectangle 9"/>
+          <p:cNvSpPr/>
+          <p:nvPr/>
+        </p:nvSpPr>
+        <p:spPr>
+          <a:xfrm>
+            <a:off x="6172200" y="3703320"/>
+            <a:ext cx="50292" cy="1371600"/>
+          </a:xfrm>
+          <a:prstGeom prst="rect">
+            <a:avLst/>
+          </a:prstGeom>
+          <a:solidFill>
+            <a:srgbClr val="C25A1E"/>
+          </a:solidFill>
+          <a:ln>
+            <a:noFill/>
+          </a:ln>
+          <a:effectLst/>
+        </p:spPr>
+        <p:style>
+          <a:lnRef idx="1">
+            <a:schemeClr val="accent1"/>
+          </a:lnRef>
+          <a:fillRef idx="3">
+            <a:schemeClr val="accent1"/>
+          </a:fillRef>
+          <a:effectRef idx="2">
+            <a:schemeClr val="accent1"/>
+          </a:effectRef>
+          <a:fontRef idx="minor">
+            <a:schemeClr val="lt1"/>
+          </a:fontRef>
+        </p:style>
+        <p:txBody>
+          <a:bodyPr rtlCol="0" anchor="ctr"/>
+          <a:lstStyle/>
+          <a:p>
+            <a:pPr algn="ctr"/>
+          </a:p>
+        </p:txBody>
+      </p:sp>
+      <p:sp>
+        <p:nvSpPr>
+          <p:cNvPr id="11" name="TextBox 10"/>
+          <p:cNvSpPr txBox="1"/>
+          <p:nvPr/>
+        </p:nvSpPr>
+        <p:spPr>
+          <a:xfrm>
+            <a:off x="6400800" y="3831335"/>
+            <a:ext cx="4892040" cy="1115568"/>
+          </a:xfrm>
+          <a:prstGeom prst="rect">
+            <a:avLst/>
+          </a:prstGeom>
+          <a:noFill/>
+        </p:spPr>
+        <p:txBody>
+          <a:bodyPr wrap="square">
+            <a:spAutoFit/>
+          </a:bodyPr>
+          <a:lstStyle/>
+          <a:p>
+            <a:pPr algn="l">
+              <a:spcAft>
+                <a:spcPts val="400"/>
+              </a:spcAft>
+            </a:pPr>
+            <a:r>
+              <a:rPr sz="1000" b="1">
+                <a:solidFill>
+                  <a:srgbClr val="C25A1E"/>
+                </a:solidFill>
+                <a:latin typeface="Segoe UI"/>
+              </a:rPr>
+              <a:t>⚠ CẦN SỐ LIỆU THẬT</a:t>
+            </a:r>
+          </a:p>
+          <a:p>
+            <a:pPr algn="l">
+              <a:spcAft>
+                <a:spcPts val="400"/>
+              </a:spcAft>
+            </a:pPr>
+            <a:r>
+              <a:rPr sz="1200" b="0">
+                <a:solidFill>
+                  <a:srgbClr val="1B2A3D"/>
+                </a:solidFill>
+                <a:latin typeface="Segoe UI"/>
+              </a:rPr>
+              <a:t>Đã có xã/phường nào đồng ý thử? Tên đơn vị + người liên hệ có sức nặng hơn mọi con số ước lượng.</a:t>
+            </a:r>
+          </a:p>
+        </p:txBody>
+      </p:sp>
+      <p:sp>
+        <p:nvSpPr>
+          <p:cNvPr id="12" name="TextBox 11"/>
+          <p:cNvSpPr txBox="1"/>
+          <p:nvPr/>
+        </p:nvSpPr>
+        <p:spPr>
+          <a:xfrm>
+            <a:off x="685800" y="5303520"/>
+            <a:ext cx="10789920" cy="822960"/>
+          </a:xfrm>
+          <a:prstGeom prst="rect">
+            <a:avLst/>
+          </a:prstGeom>
+          <a:noFill/>
+        </p:spPr>
+        <p:txBody>
+          <a:bodyPr wrap="square">
+            <a:spAutoFit/>
+          </a:bodyPr>
+          <a:lstStyle/>
+          <a:p>
+            <a:pPr algn="l">
+              <a:spcAft>
                 <a:spcPts val="600"/>
               </a:spcAft>
             </a:pPr>
             <a:r>
-              <a:rPr sz="1250" b="0">
-                <a:solidFill>
-                  <a:srgbClr val="5B7085"/>
-                </a:solidFill>
-                <a:latin typeface="Segoe UI"/>
-              </a:rPr>
-              <a:t>Lưu ý: mô hình mua sắm công có quy trình riêng — cần nêu rõ đường vào (thí điểm → nghiệm thu → mở rộng).</a:t>
+              <a:rPr sz="1300" b="1">
+                <a:solidFill>
+                  <a:srgbClr val="C25A1E"/>
+                </a:solidFill>
+                <a:latin typeface="Segoe UI"/>
+              </a:rPr>
+              <a:t>Tài liệu pitching nhấn: “Nếu dùng số liệu cụ thể, phải luôn có nguồn xác thực.” Ba ô trên để trống có chủ đích — điền bằng số thật, đừng điền bằng số đoán.</a:t>
             </a:r>
           </a:p>
         </p:txBody>
@@ -5345,7 +5273,7 @@
                 </a:solidFill>
                 <a:latin typeface="Segoe UI"/>
               </a:rPr>
-              <a:t>ĐỘI NGŨ</a:t>
+              <a:t>MÔ HÌNH KINH DOANH</a:t>
             </a:r>
           </a:p>
           <a:p>
@@ -5361,7 +5289,7 @@
                 </a:solidFill>
                 <a:latin typeface="Segoe UI"/>
               </a:rPr>
-              <a:t>Ai thực thi</a:t>
+              <a:t>Ai trả tiền, trả cho cái gì</a:t>
             </a:r>
           </a:p>
         </p:txBody>
@@ -5375,7 +5303,475 @@
         <p:spPr>
           <a:xfrm>
             <a:off x="685800" y="2286000"/>
-            <a:ext cx="10789920" cy="1828800"/>
+            <a:ext cx="10789920" cy="1078992"/>
+          </a:xfrm>
+          <a:prstGeom prst="rect">
+            <a:avLst/>
+          </a:prstGeom>
+          <a:solidFill>
+            <a:srgbClr val="FFFFFF"/>
+          </a:solidFill>
+          <a:ln>
+            <a:noFill/>
+          </a:ln>
+          <a:effectLst/>
+        </p:spPr>
+        <p:style>
+          <a:lnRef idx="1">
+            <a:schemeClr val="accent1"/>
+          </a:lnRef>
+          <a:fillRef idx="3">
+            <a:schemeClr val="accent1"/>
+          </a:fillRef>
+          <a:effectRef idx="2">
+            <a:schemeClr val="accent1"/>
+          </a:effectRef>
+          <a:fontRef idx="minor">
+            <a:schemeClr val="lt1"/>
+          </a:fontRef>
+        </p:style>
+        <p:txBody>
+          <a:bodyPr rtlCol="0" anchor="ctr"/>
+          <a:lstStyle/>
+          <a:p>
+            <a:pPr algn="ctr"/>
+          </a:p>
+        </p:txBody>
+      </p:sp>
+      <p:sp>
+        <p:nvSpPr>
+          <p:cNvPr id="4" name="Rectangle 3"/>
+          <p:cNvSpPr/>
+          <p:nvPr/>
+        </p:nvSpPr>
+        <p:spPr>
+          <a:xfrm>
+            <a:off x="685800" y="2286000"/>
+            <a:ext cx="50292" cy="1078992"/>
+          </a:xfrm>
+          <a:prstGeom prst="rect">
+            <a:avLst/>
+          </a:prstGeom>
+          <a:solidFill>
+            <a:srgbClr val="176FA6"/>
+          </a:solidFill>
+          <a:ln>
+            <a:noFill/>
+          </a:ln>
+          <a:effectLst/>
+        </p:spPr>
+        <p:style>
+          <a:lnRef idx="1">
+            <a:schemeClr val="accent1"/>
+          </a:lnRef>
+          <a:fillRef idx="3">
+            <a:schemeClr val="accent1"/>
+          </a:fillRef>
+          <a:effectRef idx="2">
+            <a:schemeClr val="accent1"/>
+          </a:effectRef>
+          <a:fontRef idx="minor">
+            <a:schemeClr val="lt1"/>
+          </a:fontRef>
+        </p:style>
+        <p:txBody>
+          <a:bodyPr rtlCol="0" anchor="ctr"/>
+          <a:lstStyle/>
+          <a:p>
+            <a:pPr algn="ctr"/>
+          </a:p>
+        </p:txBody>
+      </p:sp>
+      <p:sp>
+        <p:nvSpPr>
+          <p:cNvPr id="5" name="TextBox 4"/>
+          <p:cNvSpPr txBox="1"/>
+          <p:nvPr/>
+        </p:nvSpPr>
+        <p:spPr>
+          <a:xfrm>
+            <a:off x="914400" y="2432304"/>
+            <a:ext cx="10378440" cy="804671"/>
+          </a:xfrm>
+          <a:prstGeom prst="rect">
+            <a:avLst/>
+          </a:prstGeom>
+          <a:noFill/>
+        </p:spPr>
+        <p:txBody>
+          <a:bodyPr wrap="square">
+            <a:spAutoFit/>
+          </a:bodyPr>
+          <a:lstStyle/>
+          <a:p>
+            <a:pPr algn="l">
+              <a:spcAft>
+                <a:spcPts val="400"/>
+              </a:spcAft>
+            </a:pPr>
+            <a:r>
+              <a:rPr sz="1500" b="1">
+                <a:solidFill>
+                  <a:srgbClr val="0D3158"/>
+                </a:solidFill>
+                <a:latin typeface="Segoe UI"/>
+              </a:rPr>
+              <a:t>Người dùng cuối</a:t>
+            </a:r>
+          </a:p>
+          <a:p>
+            <a:pPr algn="l">
+              <a:spcAft>
+                <a:spcPts val="400"/>
+              </a:spcAft>
+            </a:pPr>
+            <a:r>
+              <a:rPr sz="1200" b="0">
+                <a:solidFill>
+                  <a:srgbClr val="5B7085"/>
+                </a:solidFill>
+                <a:latin typeface="Segoe UI"/>
+              </a:rPr>
+              <a:t>Người dân — miễn phí. Đây là dịch vụ công, thu phí người dân là phản tác dụng.</a:t>
+            </a:r>
+          </a:p>
+        </p:txBody>
+      </p:sp>
+      <p:sp>
+        <p:nvSpPr>
+          <p:cNvPr id="6" name="Rectangle 5"/>
+          <p:cNvSpPr/>
+          <p:nvPr/>
+        </p:nvSpPr>
+        <p:spPr>
+          <a:xfrm>
+            <a:off x="685800" y="3520440"/>
+            <a:ext cx="10789920" cy="1078992"/>
+          </a:xfrm>
+          <a:prstGeom prst="rect">
+            <a:avLst/>
+          </a:prstGeom>
+          <a:solidFill>
+            <a:srgbClr val="FFFFFF"/>
+          </a:solidFill>
+          <a:ln>
+            <a:noFill/>
+          </a:ln>
+          <a:effectLst/>
+        </p:spPr>
+        <p:style>
+          <a:lnRef idx="1">
+            <a:schemeClr val="accent1"/>
+          </a:lnRef>
+          <a:fillRef idx="3">
+            <a:schemeClr val="accent1"/>
+          </a:fillRef>
+          <a:effectRef idx="2">
+            <a:schemeClr val="accent1"/>
+          </a:effectRef>
+          <a:fontRef idx="minor">
+            <a:schemeClr val="lt1"/>
+          </a:fontRef>
+        </p:style>
+        <p:txBody>
+          <a:bodyPr rtlCol="0" anchor="ctr"/>
+          <a:lstStyle/>
+          <a:p>
+            <a:pPr algn="ctr"/>
+          </a:p>
+        </p:txBody>
+      </p:sp>
+      <p:sp>
+        <p:nvSpPr>
+          <p:cNvPr id="7" name="Rectangle 6"/>
+          <p:cNvSpPr/>
+          <p:nvPr/>
+        </p:nvSpPr>
+        <p:spPr>
+          <a:xfrm>
+            <a:off x="685800" y="3520440"/>
+            <a:ext cx="50292" cy="1078992"/>
+          </a:xfrm>
+          <a:prstGeom prst="rect">
+            <a:avLst/>
+          </a:prstGeom>
+          <a:solidFill>
+            <a:srgbClr val="176FA6"/>
+          </a:solidFill>
+          <a:ln>
+            <a:noFill/>
+          </a:ln>
+          <a:effectLst/>
+        </p:spPr>
+        <p:style>
+          <a:lnRef idx="1">
+            <a:schemeClr val="accent1"/>
+          </a:lnRef>
+          <a:fillRef idx="3">
+            <a:schemeClr val="accent1"/>
+          </a:fillRef>
+          <a:effectRef idx="2">
+            <a:schemeClr val="accent1"/>
+          </a:effectRef>
+          <a:fontRef idx="minor">
+            <a:schemeClr val="lt1"/>
+          </a:fontRef>
+        </p:style>
+        <p:txBody>
+          <a:bodyPr rtlCol="0" anchor="ctr"/>
+          <a:lstStyle/>
+          <a:p>
+            <a:pPr algn="ctr"/>
+          </a:p>
+        </p:txBody>
+      </p:sp>
+      <p:sp>
+        <p:nvSpPr>
+          <p:cNvPr id="8" name="TextBox 7"/>
+          <p:cNvSpPr txBox="1"/>
+          <p:nvPr/>
+        </p:nvSpPr>
+        <p:spPr>
+          <a:xfrm>
+            <a:off x="914400" y="3666744"/>
+            <a:ext cx="10378440" cy="804671"/>
+          </a:xfrm>
+          <a:prstGeom prst="rect">
+            <a:avLst/>
+          </a:prstGeom>
+          <a:noFill/>
+        </p:spPr>
+        <p:txBody>
+          <a:bodyPr wrap="square">
+            <a:spAutoFit/>
+          </a:bodyPr>
+          <a:lstStyle/>
+          <a:p>
+            <a:pPr algn="l">
+              <a:spcAft>
+                <a:spcPts val="400"/>
+              </a:spcAft>
+            </a:pPr>
+            <a:r>
+              <a:rPr sz="1500" b="1">
+                <a:solidFill>
+                  <a:srgbClr val="0D3158"/>
+                </a:solidFill>
+                <a:latin typeface="Segoe UI"/>
+              </a:rPr>
+              <a:t>Người trả tiền</a:t>
+            </a:r>
+          </a:p>
+          <a:p>
+            <a:pPr algn="l">
+              <a:spcAft>
+                <a:spcPts val="400"/>
+              </a:spcAft>
+            </a:pPr>
+            <a:r>
+              <a:rPr sz="1200" b="0">
+                <a:solidFill>
+                  <a:srgbClr val="5B7085"/>
+                </a:solidFill>
+                <a:latin typeface="Segoe UI"/>
+              </a:rPr>
+              <a:t>Cơ quan nhà nước (UBND cấp xã/huyện/tỉnh) — trả cho việc giảm tải quầy tiếp nhận và có số liệu điều hành.</a:t>
+            </a:r>
+          </a:p>
+        </p:txBody>
+      </p:sp>
+      <p:sp>
+        <p:nvSpPr>
+          <p:cNvPr id="9" name="Rectangle 8"/>
+          <p:cNvSpPr/>
+          <p:nvPr/>
+        </p:nvSpPr>
+        <p:spPr>
+          <a:xfrm>
+            <a:off x="685800" y="4754880"/>
+            <a:ext cx="10789920" cy="1078992"/>
+          </a:xfrm>
+          <a:prstGeom prst="rect">
+            <a:avLst/>
+          </a:prstGeom>
+          <a:solidFill>
+            <a:srgbClr val="FFFFFF"/>
+          </a:solidFill>
+          <a:ln>
+            <a:noFill/>
+          </a:ln>
+          <a:effectLst/>
+        </p:spPr>
+        <p:style>
+          <a:lnRef idx="1">
+            <a:schemeClr val="accent1"/>
+          </a:lnRef>
+          <a:fillRef idx="3">
+            <a:schemeClr val="accent1"/>
+          </a:fillRef>
+          <a:effectRef idx="2">
+            <a:schemeClr val="accent1"/>
+          </a:effectRef>
+          <a:fontRef idx="minor">
+            <a:schemeClr val="lt1"/>
+          </a:fontRef>
+        </p:style>
+        <p:txBody>
+          <a:bodyPr rtlCol="0" anchor="ctr"/>
+          <a:lstStyle/>
+          <a:p>
+            <a:pPr algn="ctr"/>
+          </a:p>
+        </p:txBody>
+      </p:sp>
+      <p:sp>
+        <p:nvSpPr>
+          <p:cNvPr id="10" name="Rectangle 9"/>
+          <p:cNvSpPr/>
+          <p:nvPr/>
+        </p:nvSpPr>
+        <p:spPr>
+          <a:xfrm>
+            <a:off x="685800" y="4754880"/>
+            <a:ext cx="50292" cy="1078992"/>
+          </a:xfrm>
+          <a:prstGeom prst="rect">
+            <a:avLst/>
+          </a:prstGeom>
+          <a:solidFill>
+            <a:srgbClr val="176FA6"/>
+          </a:solidFill>
+          <a:ln>
+            <a:noFill/>
+          </a:ln>
+          <a:effectLst/>
+        </p:spPr>
+        <p:style>
+          <a:lnRef idx="1">
+            <a:schemeClr val="accent1"/>
+          </a:lnRef>
+          <a:fillRef idx="3">
+            <a:schemeClr val="accent1"/>
+          </a:fillRef>
+          <a:effectRef idx="2">
+            <a:schemeClr val="accent1"/>
+          </a:effectRef>
+          <a:fontRef idx="minor">
+            <a:schemeClr val="lt1"/>
+          </a:fontRef>
+        </p:style>
+        <p:txBody>
+          <a:bodyPr rtlCol="0" anchor="ctr"/>
+          <a:lstStyle/>
+          <a:p>
+            <a:pPr algn="ctr"/>
+          </a:p>
+        </p:txBody>
+      </p:sp>
+      <p:sp>
+        <p:nvSpPr>
+          <p:cNvPr id="11" name="TextBox 10"/>
+          <p:cNvSpPr txBox="1"/>
+          <p:nvPr/>
+        </p:nvSpPr>
+        <p:spPr>
+          <a:xfrm>
+            <a:off x="914400" y="4901184"/>
+            <a:ext cx="10378440" cy="804671"/>
+          </a:xfrm>
+          <a:prstGeom prst="rect">
+            <a:avLst/>
+          </a:prstGeom>
+          <a:noFill/>
+        </p:spPr>
+        <p:txBody>
+          <a:bodyPr wrap="square">
+            <a:spAutoFit/>
+          </a:bodyPr>
+          <a:lstStyle/>
+          <a:p>
+            <a:pPr algn="l">
+              <a:spcAft>
+                <a:spcPts val="400"/>
+              </a:spcAft>
+            </a:pPr>
+            <a:r>
+              <a:rPr sz="1500" b="1">
+                <a:solidFill>
+                  <a:srgbClr val="0D3158"/>
+                </a:solidFill>
+                <a:latin typeface="Segoe UI"/>
+              </a:rPr>
+              <a:t>Hình thức</a:t>
+            </a:r>
+          </a:p>
+          <a:p>
+            <a:pPr algn="l">
+              <a:spcAft>
+                <a:spcPts val="400"/>
+              </a:spcAft>
+            </a:pPr>
+            <a:r>
+              <a:rPr sz="1200" b="0">
+                <a:solidFill>
+                  <a:srgbClr val="5B7085"/>
+                </a:solidFill>
+                <a:latin typeface="Segoe UI"/>
+              </a:rPr>
+              <a:t>Thuê bao theo đơn vị hành chính + phí triển khai ban đầu (chuẩn hoá danh mục thủ tục địa phương).</a:t>
+            </a:r>
+          </a:p>
+        </p:txBody>
+      </p:sp>
+      <p:sp>
+        <p:nvSpPr>
+          <p:cNvPr id="12" name="TextBox 11"/>
+          <p:cNvSpPr txBox="1"/>
+          <p:nvPr/>
+        </p:nvSpPr>
+        <p:spPr>
+          <a:xfrm>
+            <a:off x="685800" y="6053328"/>
+            <a:ext cx="10789920" cy="530352"/>
+          </a:xfrm>
+          <a:prstGeom prst="rect">
+            <a:avLst/>
+          </a:prstGeom>
+          <a:noFill/>
+        </p:spPr>
+        <p:txBody>
+          <a:bodyPr wrap="square">
+            <a:spAutoFit/>
+          </a:bodyPr>
+          <a:lstStyle/>
+          <a:p>
+            <a:pPr algn="l">
+              <a:spcAft>
+                <a:spcPts val="600"/>
+              </a:spcAft>
+            </a:pPr>
+            <a:r>
+              <a:rPr sz="1200" b="1">
+                <a:solidFill>
+                  <a:srgbClr val="167C78"/>
+                </a:solidFill>
+                <a:latin typeface="Segoe UI"/>
+              </a:rPr>
+              <a:t>Chi phí AI mỗi hồ sơ: ~410 đ (0,016 USD) — tính từ giá token thật và tỉ lệ 2,17 ký tự/token đo trên chính prompt của hệ thống. Ở mức đó, miễn phí cho người dân là bền vững.</a:t>
+            </a:r>
+          </a:p>
+        </p:txBody>
+      </p:sp>
+      <p:sp>
+        <p:nvSpPr>
+          <p:cNvPr id="13" name="Rectangle 12"/>
+          <p:cNvSpPr/>
+          <p:nvPr/>
+        </p:nvSpPr>
+        <p:spPr>
+          <a:xfrm>
+            <a:off x="685800" y="6601968"/>
+            <a:ext cx="10789920" cy="384048"/>
           </a:xfrm>
           <a:prstGeom prst="rect">
             <a:avLst/>
@@ -5412,14 +5808,14 @@
       </p:sp>
       <p:sp>
         <p:nvSpPr>
-          <p:cNvPr id="4" name="Rectangle 3"/>
+          <p:cNvPr id="14" name="Rectangle 13"/>
           <p:cNvSpPr/>
           <p:nvPr/>
         </p:nvSpPr>
         <p:spPr>
           <a:xfrm>
-            <a:off x="685800" y="2286000"/>
-            <a:ext cx="50292" cy="1828800"/>
+            <a:off x="685800" y="6601968"/>
+            <a:ext cx="50292" cy="384048"/>
           </a:xfrm>
           <a:prstGeom prst="rect">
             <a:avLst/>
@@ -5456,14 +5852,14 @@
       </p:sp>
       <p:sp>
         <p:nvSpPr>
-          <p:cNvPr id="5" name="TextBox 4"/>
+          <p:cNvPr id="15" name="TextBox 14"/>
           <p:cNvSpPr txBox="1"/>
           <p:nvPr/>
         </p:nvSpPr>
         <p:spPr>
           <a:xfrm>
-            <a:off x="914400" y="2414016"/>
-            <a:ext cx="10378440" cy="1572768"/>
+            <a:off x="914400" y="6729983"/>
+            <a:ext cx="10378440" cy="128015"/>
           </a:xfrm>
           <a:prstGeom prst="rect">
             <a:avLst/>
@@ -5504,109 +5900,21 @@
                 </a:solidFill>
                 <a:latin typeface="Segoe UI"/>
               </a:rPr>
-              <a:t>Tên, vai trò, và VÌ SAO chính người này làm được việc này (kinh nghiệm liên quan: AI/RAG, backend, khu vực công, thiết kế). Nhà đầu tư đọc slide Team để đánh giá năng lực thực thi.</a:t>
-            </a:r>
-          </a:p>
-        </p:txBody>
-      </p:sp>
-      <p:sp>
-        <p:nvSpPr>
-          <p:cNvPr id="6" name="Rectangle 5"/>
-          <p:cNvSpPr/>
-          <p:nvPr/>
-        </p:nvSpPr>
-        <p:spPr>
-          <a:xfrm>
-            <a:off x="685800" y="4297680"/>
-            <a:ext cx="5303520" cy="1371600"/>
-          </a:xfrm>
-          <a:prstGeom prst="rect">
-            <a:avLst/>
-          </a:prstGeom>
-          <a:solidFill>
-            <a:srgbClr val="FFFFFF"/>
-          </a:solidFill>
-          <a:ln>
-            <a:noFill/>
-          </a:ln>
-          <a:effectLst/>
-        </p:spPr>
-        <p:style>
-          <a:lnRef idx="1">
-            <a:schemeClr val="accent1"/>
-          </a:lnRef>
-          <a:fillRef idx="3">
-            <a:schemeClr val="accent1"/>
-          </a:fillRef>
-          <a:effectRef idx="2">
-            <a:schemeClr val="accent1"/>
-          </a:effectRef>
-          <a:fontRef idx="minor">
-            <a:schemeClr val="lt1"/>
-          </a:fontRef>
-        </p:style>
-        <p:txBody>
-          <a:bodyPr rtlCol="0" anchor="ctr"/>
-          <a:lstStyle/>
-          <a:p>
-            <a:pPr algn="ctr"/>
-          </a:p>
-        </p:txBody>
-      </p:sp>
-      <p:sp>
-        <p:nvSpPr>
-          <p:cNvPr id="7" name="Rectangle 6"/>
-          <p:cNvSpPr/>
-          <p:nvPr/>
-        </p:nvSpPr>
-        <p:spPr>
-          <a:xfrm>
-            <a:off x="685800" y="4297680"/>
-            <a:ext cx="50292" cy="1371600"/>
-          </a:xfrm>
-          <a:prstGeom prst="rect">
-            <a:avLst/>
-          </a:prstGeom>
-          <a:solidFill>
-            <a:srgbClr val="167C78"/>
-          </a:solidFill>
-          <a:ln>
-            <a:noFill/>
-          </a:ln>
-          <a:effectLst/>
-        </p:spPr>
-        <p:style>
-          <a:lnRef idx="1">
-            <a:schemeClr val="accent1"/>
-          </a:lnRef>
-          <a:fillRef idx="3">
-            <a:schemeClr val="accent1"/>
-          </a:fillRef>
-          <a:effectRef idx="2">
-            <a:schemeClr val="accent1"/>
-          </a:effectRef>
-          <a:fontRef idx="minor">
-            <a:schemeClr val="lt1"/>
-          </a:fontRef>
-        </p:style>
-        <p:txBody>
-          <a:bodyPr rtlCol="0" anchor="ctr"/>
-          <a:lstStyle/>
-          <a:p>
-            <a:pPr algn="ctr"/>
-          </a:p>
-        </p:txBody>
-      </p:sp>
-      <p:sp>
-        <p:nvSpPr>
-          <p:cNvPr id="8" name="TextBox 7"/>
+              <a:t>Còn thiếu: đơn giá thuê bao và điểm hoà vốn.</a:t>
+            </a:r>
+          </a:p>
+        </p:txBody>
+      </p:sp>
+      <p:sp>
+        <p:nvSpPr>
+          <p:cNvPr id="16" name="TextBox 15"/>
           <p:cNvSpPr txBox="1"/>
           <p:nvPr/>
         </p:nvSpPr>
         <p:spPr>
           <a:xfrm>
-            <a:off x="914400" y="4443984"/>
-            <a:ext cx="4892040" cy="1097280"/>
+            <a:off x="685800" y="5486400"/>
+            <a:ext cx="10789920" cy="548640"/>
           </a:xfrm>
           <a:prstGeom prst="rect">
             <a:avLst/>
@@ -5621,176 +5929,17 @@
           <a:p>
             <a:pPr algn="l">
               <a:spcAft>
-                <a:spcPts val="400"/>
-              </a:spcAft>
-            </a:pPr>
-            <a:r>
-              <a:rPr sz="1500" b="1">
-                <a:solidFill>
-                  <a:srgbClr val="0D3158"/>
-                </a:solidFill>
-                <a:latin typeface="Segoe UI"/>
-              </a:rPr>
-              <a:t>Đã chứng minh được</a:t>
-            </a:r>
-          </a:p>
-          <a:p>
-            <a:pPr algn="l">
-              <a:spcAft>
-                <a:spcPts val="400"/>
-              </a:spcAft>
-            </a:pPr>
-            <a:r>
-              <a:rPr sz="1200" b="0">
+                <a:spcPts val="600"/>
+              </a:spcAft>
+            </a:pPr>
+            <a:r>
+              <a:rPr sz="1250" b="0">
                 <a:solidFill>
                   <a:srgbClr val="5B7085"/>
                 </a:solidFill>
                 <a:latin typeface="Segoe UI"/>
               </a:rPr>
-              <a:t>Dựng xong luồng đầy đủ hai phía trong thời gian hackathon, có kiểm thử tự động và kỷ luật nguồn dữ liệu.</a:t>
-            </a:r>
-          </a:p>
-        </p:txBody>
-      </p:sp>
-      <p:sp>
-        <p:nvSpPr>
-          <p:cNvPr id="9" name="Rectangle 8"/>
-          <p:cNvSpPr/>
-          <p:nvPr/>
-        </p:nvSpPr>
-        <p:spPr>
-          <a:xfrm>
-            <a:off x="6217920" y="4297680"/>
-            <a:ext cx="5303520" cy="1371600"/>
-          </a:xfrm>
-          <a:prstGeom prst="rect">
-            <a:avLst/>
-          </a:prstGeom>
-          <a:solidFill>
-            <a:srgbClr val="FFFFFF"/>
-          </a:solidFill>
-          <a:ln>
-            <a:noFill/>
-          </a:ln>
-          <a:effectLst/>
-        </p:spPr>
-        <p:style>
-          <a:lnRef idx="1">
-            <a:schemeClr val="accent1"/>
-          </a:lnRef>
-          <a:fillRef idx="3">
-            <a:schemeClr val="accent1"/>
-          </a:fillRef>
-          <a:effectRef idx="2">
-            <a:schemeClr val="accent1"/>
-          </a:effectRef>
-          <a:fontRef idx="minor">
-            <a:schemeClr val="lt1"/>
-          </a:fontRef>
-        </p:style>
-        <p:txBody>
-          <a:bodyPr rtlCol="0" anchor="ctr"/>
-          <a:lstStyle/>
-          <a:p>
-            <a:pPr algn="ctr"/>
-          </a:p>
-        </p:txBody>
-      </p:sp>
-      <p:sp>
-        <p:nvSpPr>
-          <p:cNvPr id="10" name="Rectangle 9"/>
-          <p:cNvSpPr/>
-          <p:nvPr/>
-        </p:nvSpPr>
-        <p:spPr>
-          <a:xfrm>
-            <a:off x="6217920" y="4297680"/>
-            <a:ext cx="50292" cy="1371600"/>
-          </a:xfrm>
-          <a:prstGeom prst="rect">
-            <a:avLst/>
-          </a:prstGeom>
-          <a:solidFill>
-            <a:srgbClr val="C25A1E"/>
-          </a:solidFill>
-          <a:ln>
-            <a:noFill/>
-          </a:ln>
-          <a:effectLst/>
-        </p:spPr>
-        <p:style>
-          <a:lnRef idx="1">
-            <a:schemeClr val="accent1"/>
-          </a:lnRef>
-          <a:fillRef idx="3">
-            <a:schemeClr val="accent1"/>
-          </a:fillRef>
-          <a:effectRef idx="2">
-            <a:schemeClr val="accent1"/>
-          </a:effectRef>
-          <a:fontRef idx="minor">
-            <a:schemeClr val="lt1"/>
-          </a:fontRef>
-        </p:style>
-        <p:txBody>
-          <a:bodyPr rtlCol="0" anchor="ctr"/>
-          <a:lstStyle/>
-          <a:p>
-            <a:pPr algn="ctr"/>
-          </a:p>
-        </p:txBody>
-      </p:sp>
-      <p:sp>
-        <p:nvSpPr>
-          <p:cNvPr id="11" name="TextBox 10"/>
-          <p:cNvSpPr txBox="1"/>
-          <p:nvPr/>
-        </p:nvSpPr>
-        <p:spPr>
-          <a:xfrm>
-            <a:off x="6446520" y="4443984"/>
-            <a:ext cx="4892040" cy="1097280"/>
-          </a:xfrm>
-          <a:prstGeom prst="rect">
-            <a:avLst/>
-          </a:prstGeom>
-          <a:noFill/>
-        </p:spPr>
-        <p:txBody>
-          <a:bodyPr wrap="square">
-            <a:spAutoFit/>
-          </a:bodyPr>
-          <a:lstStyle/>
-          <a:p>
-            <a:pPr algn="l">
-              <a:spcAft>
-                <a:spcPts val="400"/>
-              </a:spcAft>
-            </a:pPr>
-            <a:r>
-              <a:rPr sz="1500" b="1">
-                <a:solidFill>
-                  <a:srgbClr val="0D3158"/>
-                </a:solidFill>
-                <a:latin typeface="Segoe UI"/>
-              </a:rPr>
-              <a:t>Đang cần bổ sung</a:t>
-            </a:r>
-          </a:p>
-          <a:p>
-            <a:pPr algn="l">
-              <a:spcAft>
-                <a:spcPts val="400"/>
-              </a:spcAft>
-            </a:pPr>
-            <a:r>
-              <a:rPr sz="1200" b="0">
-                <a:solidFill>
-                  <a:srgbClr val="5B7085"/>
-                </a:solidFill>
-                <a:latin typeface="Segoe UI"/>
-              </a:rPr>
-              <a:t>Người có quan hệ triển khai khu vực công và kinh nghiệm mua sắm công.</a:t>
+              <a:t>Lưu ý: mô hình mua sắm công có quy trình riêng — cần nêu rõ đường vào (thí điểm → nghiệm thu → mở rộng).</a:t>
             </a:r>
           </a:p>
         </p:txBody>
@@ -5855,7 +6004,7 @@
                 </a:solidFill>
                 <a:latin typeface="Segoe UI"/>
               </a:rPr>
-              <a:t>LỘ TRÌNH</a:t>
+              <a:t>ĐỘI NGŨ</a:t>
             </a:r>
           </a:p>
           <a:p>
@@ -5871,7 +6020,7 @@
                 </a:solidFill>
                 <a:latin typeface="Segoe UI"/>
               </a:rPr>
-              <a:t>Từ demo đến triển khai thật</a:t>
+              <a:t>Ai thực thi</a:t>
             </a:r>
           </a:p>
         </p:txBody>
@@ -5884,8 +6033,151 @@
         </p:nvSpPr>
         <p:spPr>
           <a:xfrm>
-            <a:off x="685800" y="2377440"/>
-            <a:ext cx="3474720" cy="1920240"/>
+            <a:off x="685800" y="2286000"/>
+            <a:ext cx="10789920" cy="1828800"/>
+          </a:xfrm>
+          <a:prstGeom prst="rect">
+            <a:avLst/>
+          </a:prstGeom>
+          <a:solidFill>
+            <a:srgbClr val="FDF1E7"/>
+          </a:solidFill>
+          <a:ln>
+            <a:noFill/>
+          </a:ln>
+          <a:effectLst/>
+        </p:spPr>
+        <p:style>
+          <a:lnRef idx="1">
+            <a:schemeClr val="accent1"/>
+          </a:lnRef>
+          <a:fillRef idx="3">
+            <a:schemeClr val="accent1"/>
+          </a:fillRef>
+          <a:effectRef idx="2">
+            <a:schemeClr val="accent1"/>
+          </a:effectRef>
+          <a:fontRef idx="minor">
+            <a:schemeClr val="lt1"/>
+          </a:fontRef>
+        </p:style>
+        <p:txBody>
+          <a:bodyPr rtlCol="0" anchor="ctr"/>
+          <a:lstStyle/>
+          <a:p>
+            <a:pPr algn="ctr"/>
+          </a:p>
+        </p:txBody>
+      </p:sp>
+      <p:sp>
+        <p:nvSpPr>
+          <p:cNvPr id="4" name="Rectangle 3"/>
+          <p:cNvSpPr/>
+          <p:nvPr/>
+        </p:nvSpPr>
+        <p:spPr>
+          <a:xfrm>
+            <a:off x="685800" y="2286000"/>
+            <a:ext cx="50292" cy="1828800"/>
+          </a:xfrm>
+          <a:prstGeom prst="rect">
+            <a:avLst/>
+          </a:prstGeom>
+          <a:solidFill>
+            <a:srgbClr val="C25A1E"/>
+          </a:solidFill>
+          <a:ln>
+            <a:noFill/>
+          </a:ln>
+          <a:effectLst/>
+        </p:spPr>
+        <p:style>
+          <a:lnRef idx="1">
+            <a:schemeClr val="accent1"/>
+          </a:lnRef>
+          <a:fillRef idx="3">
+            <a:schemeClr val="accent1"/>
+          </a:fillRef>
+          <a:effectRef idx="2">
+            <a:schemeClr val="accent1"/>
+          </a:effectRef>
+          <a:fontRef idx="minor">
+            <a:schemeClr val="lt1"/>
+          </a:fontRef>
+        </p:style>
+        <p:txBody>
+          <a:bodyPr rtlCol="0" anchor="ctr"/>
+          <a:lstStyle/>
+          <a:p>
+            <a:pPr algn="ctr"/>
+          </a:p>
+        </p:txBody>
+      </p:sp>
+      <p:sp>
+        <p:nvSpPr>
+          <p:cNvPr id="5" name="TextBox 4"/>
+          <p:cNvSpPr txBox="1"/>
+          <p:nvPr/>
+        </p:nvSpPr>
+        <p:spPr>
+          <a:xfrm>
+            <a:off x="914400" y="2414016"/>
+            <a:ext cx="10378440" cy="1572768"/>
+          </a:xfrm>
+          <a:prstGeom prst="rect">
+            <a:avLst/>
+          </a:prstGeom>
+          <a:noFill/>
+        </p:spPr>
+        <p:txBody>
+          <a:bodyPr wrap="square">
+            <a:spAutoFit/>
+          </a:bodyPr>
+          <a:lstStyle/>
+          <a:p>
+            <a:pPr algn="l">
+              <a:spcAft>
+                <a:spcPts val="400"/>
+              </a:spcAft>
+            </a:pPr>
+            <a:r>
+              <a:rPr sz="1000" b="1">
+                <a:solidFill>
+                  <a:srgbClr val="C25A1E"/>
+                </a:solidFill>
+                <a:latin typeface="Segoe UI"/>
+              </a:rPr>
+              <a:t>⚠ CẦN SỐ LIỆU THẬT</a:t>
+            </a:r>
+          </a:p>
+          <a:p>
+            <a:pPr algn="l">
+              <a:spcAft>
+                <a:spcPts val="400"/>
+              </a:spcAft>
+            </a:pPr>
+            <a:r>
+              <a:rPr sz="1200" b="0">
+                <a:solidFill>
+                  <a:srgbClr val="1B2A3D"/>
+                </a:solidFill>
+                <a:latin typeface="Segoe UI"/>
+              </a:rPr>
+              <a:t>Tên, vai trò, và VÌ SAO chính người này làm được việc này (kinh nghiệm liên quan: AI/RAG, backend, khu vực công, thiết kế). Nhà đầu tư đọc slide Team để đánh giá năng lực thực thi.</a:t>
+            </a:r>
+          </a:p>
+        </p:txBody>
+      </p:sp>
+      <p:sp>
+        <p:nvSpPr>
+          <p:cNvPr id="6" name="Rectangle 5"/>
+          <p:cNvSpPr/>
+          <p:nvPr/>
+        </p:nvSpPr>
+        <p:spPr>
+          <a:xfrm>
+            <a:off x="685800" y="4297680"/>
+            <a:ext cx="5303520" cy="1371600"/>
           </a:xfrm>
           <a:prstGeom prst="rect">
             <a:avLst/>
@@ -5922,20 +6214,20 @@
       </p:sp>
       <p:sp>
         <p:nvSpPr>
-          <p:cNvPr id="4" name="Rectangle 3"/>
+          <p:cNvPr id="7" name="Rectangle 6"/>
           <p:cNvSpPr/>
           <p:nvPr/>
         </p:nvSpPr>
         <p:spPr>
           <a:xfrm>
-            <a:off x="685800" y="2377440"/>
-            <a:ext cx="50292" cy="1920240"/>
+            <a:off x="685800" y="4297680"/>
+            <a:ext cx="50292" cy="1371600"/>
           </a:xfrm>
           <a:prstGeom prst="rect">
             <a:avLst/>
           </a:prstGeom>
           <a:solidFill>
-            <a:srgbClr val="176FA6"/>
+            <a:srgbClr val="167C78"/>
           </a:solidFill>
           <a:ln>
             <a:noFill/>
@@ -5966,14 +6258,14 @@
       </p:sp>
       <p:sp>
         <p:nvSpPr>
-          <p:cNvPr id="5" name="TextBox 4"/>
+          <p:cNvPr id="8" name="TextBox 7"/>
           <p:cNvSpPr txBox="1"/>
           <p:nvPr/>
         </p:nvSpPr>
         <p:spPr>
           <a:xfrm>
-            <a:off x="914400" y="2523744"/>
-            <a:ext cx="3063239" cy="1645920"/>
+            <a:off x="914400" y="4443984"/>
+            <a:ext cx="4892040" cy="1097280"/>
           </a:xfrm>
           <a:prstGeom prst="rect">
             <a:avLst/>
@@ -5998,8 +6290,7 @@
                 </a:solidFill>
                 <a:latin typeface="Segoe UI"/>
               </a:rPr>
-              <a:t>Giai đoạn 1
-Thí điểm</a:t>
+              <a:t>Đã chứng minh được</a:t>
             </a:r>
           </a:p>
           <a:p>
@@ -6009,28 +6300,27 @@
               </a:spcAft>
             </a:pPr>
             <a:r>
-              <a:rPr sz="1150" b="0">
+              <a:rPr sz="1200" b="0">
                 <a:solidFill>
                   <a:srgbClr val="5B7085"/>
                 </a:solidFill>
                 <a:latin typeface="Segoe UI"/>
               </a:rPr>
-              <a:t>1 xã/phường · 5 thủ tục hiện có
-Đo: tỷ lệ hồ sơ đạt ngay lần đầu</a:t>
-            </a:r>
-          </a:p>
-        </p:txBody>
-      </p:sp>
-      <p:sp>
-        <p:nvSpPr>
-          <p:cNvPr id="6" name="Rectangle 5"/>
+              <a:t>Dựng xong luồng đầy đủ hai phía trong thời gian hackathon, có kiểm thử tự động và kỷ luật nguồn dữ liệu.</a:t>
+            </a:r>
+          </a:p>
+        </p:txBody>
+      </p:sp>
+      <p:sp>
+        <p:nvSpPr>
+          <p:cNvPr id="9" name="Rectangle 8"/>
           <p:cNvSpPr/>
           <p:nvPr/>
         </p:nvSpPr>
         <p:spPr>
           <a:xfrm>
-            <a:off x="4389120" y="2377440"/>
-            <a:ext cx="3474720" cy="1920240"/>
+            <a:off x="6217920" y="4297680"/>
+            <a:ext cx="5303520" cy="1371600"/>
           </a:xfrm>
           <a:prstGeom prst="rect">
             <a:avLst/>
@@ -6067,304 +6357,14 @@
       </p:sp>
       <p:sp>
         <p:nvSpPr>
-          <p:cNvPr id="7" name="Rectangle 6"/>
-          <p:cNvSpPr/>
-          <p:nvPr/>
-        </p:nvSpPr>
-        <p:spPr>
-          <a:xfrm>
-            <a:off x="4389120" y="2377440"/>
-            <a:ext cx="50292" cy="1920240"/>
-          </a:xfrm>
-          <a:prstGeom prst="rect">
-            <a:avLst/>
-          </a:prstGeom>
-          <a:solidFill>
-            <a:srgbClr val="167C78"/>
-          </a:solidFill>
-          <a:ln>
-            <a:noFill/>
-          </a:ln>
-          <a:effectLst/>
-        </p:spPr>
-        <p:style>
-          <a:lnRef idx="1">
-            <a:schemeClr val="accent1"/>
-          </a:lnRef>
-          <a:fillRef idx="3">
-            <a:schemeClr val="accent1"/>
-          </a:fillRef>
-          <a:effectRef idx="2">
-            <a:schemeClr val="accent1"/>
-          </a:effectRef>
-          <a:fontRef idx="minor">
-            <a:schemeClr val="lt1"/>
-          </a:fontRef>
-        </p:style>
-        <p:txBody>
-          <a:bodyPr rtlCol="0" anchor="ctr"/>
-          <a:lstStyle/>
-          <a:p>
-            <a:pPr algn="ctr"/>
-          </a:p>
-        </p:txBody>
-      </p:sp>
-      <p:sp>
-        <p:nvSpPr>
-          <p:cNvPr id="8" name="TextBox 7"/>
-          <p:cNvSpPr txBox="1"/>
-          <p:nvPr/>
-        </p:nvSpPr>
-        <p:spPr>
-          <a:xfrm>
-            <a:off x="4617720" y="2523744"/>
-            <a:ext cx="3063239" cy="1645920"/>
-          </a:xfrm>
-          <a:prstGeom prst="rect">
-            <a:avLst/>
-          </a:prstGeom>
-          <a:noFill/>
-        </p:spPr>
-        <p:txBody>
-          <a:bodyPr wrap="square">
-            <a:spAutoFit/>
-          </a:bodyPr>
-          <a:lstStyle/>
-          <a:p>
-            <a:pPr algn="l">
-              <a:spcAft>
-                <a:spcPts val="400"/>
-              </a:spcAft>
-            </a:pPr>
-            <a:r>
-              <a:rPr sz="1500" b="1">
-                <a:solidFill>
-                  <a:srgbClr val="0D3158"/>
-                </a:solidFill>
-                <a:latin typeface="Segoe UI"/>
-              </a:rPr>
-              <a:t>Giai đoạn 2
-Mở rộng thủ tục</a:t>
-            </a:r>
-          </a:p>
-          <a:p>
-            <a:pPr algn="l">
-              <a:spcAft>
-                <a:spcPts val="400"/>
-              </a:spcAft>
-            </a:pPr>
-            <a:r>
-              <a:rPr sz="1150" b="0">
-                <a:solidFill>
-                  <a:srgbClr val="5B7085"/>
-                </a:solidFill>
-                <a:latin typeface="Segoe UI"/>
-              </a:rPr>
-              <a:t>Bổ sung nhóm thủ tục hộ tịch – cư trú – đất đai
-Chuẩn hoá quy trình đồng bộ nguồn</a:t>
-            </a:r>
-          </a:p>
-        </p:txBody>
-      </p:sp>
-      <p:sp>
-        <p:nvSpPr>
-          <p:cNvPr id="9" name="Rectangle 8"/>
-          <p:cNvSpPr/>
-          <p:nvPr/>
-        </p:nvSpPr>
-        <p:spPr>
-          <a:xfrm>
-            <a:off x="8092440" y="2377440"/>
-            <a:ext cx="3474720" cy="1920240"/>
-          </a:xfrm>
-          <a:prstGeom prst="rect">
-            <a:avLst/>
-          </a:prstGeom>
-          <a:solidFill>
-            <a:srgbClr val="FFFFFF"/>
-          </a:solidFill>
-          <a:ln>
-            <a:noFill/>
-          </a:ln>
-          <a:effectLst/>
-        </p:spPr>
-        <p:style>
-          <a:lnRef idx="1">
-            <a:schemeClr val="accent1"/>
-          </a:lnRef>
-          <a:fillRef idx="3">
-            <a:schemeClr val="accent1"/>
-          </a:fillRef>
-          <a:effectRef idx="2">
-            <a:schemeClr val="accent1"/>
-          </a:effectRef>
-          <a:fontRef idx="minor">
-            <a:schemeClr val="lt1"/>
-          </a:fontRef>
-        </p:style>
-        <p:txBody>
-          <a:bodyPr rtlCol="0" anchor="ctr"/>
-          <a:lstStyle/>
-          <a:p>
-            <a:pPr algn="ctr"/>
-          </a:p>
-        </p:txBody>
-      </p:sp>
-      <p:sp>
-        <p:nvSpPr>
           <p:cNvPr id="10" name="Rectangle 9"/>
           <p:cNvSpPr/>
           <p:nvPr/>
         </p:nvSpPr>
         <p:spPr>
           <a:xfrm>
-            <a:off x="8092440" y="2377440"/>
-            <a:ext cx="50292" cy="1920240"/>
-          </a:xfrm>
-          <a:prstGeom prst="rect">
-            <a:avLst/>
-          </a:prstGeom>
-          <a:solidFill>
-            <a:srgbClr val="0D3158"/>
-          </a:solidFill>
-          <a:ln>
-            <a:noFill/>
-          </a:ln>
-          <a:effectLst/>
-        </p:spPr>
-        <p:style>
-          <a:lnRef idx="1">
-            <a:schemeClr val="accent1"/>
-          </a:lnRef>
-          <a:fillRef idx="3">
-            <a:schemeClr val="accent1"/>
-          </a:fillRef>
-          <a:effectRef idx="2">
-            <a:schemeClr val="accent1"/>
-          </a:effectRef>
-          <a:fontRef idx="minor">
-            <a:schemeClr val="lt1"/>
-          </a:fontRef>
-        </p:style>
-        <p:txBody>
-          <a:bodyPr rtlCol="0" anchor="ctr"/>
-          <a:lstStyle/>
-          <a:p>
-            <a:pPr algn="ctr"/>
-          </a:p>
-        </p:txBody>
-      </p:sp>
-      <p:sp>
-        <p:nvSpPr>
-          <p:cNvPr id="11" name="TextBox 10"/>
-          <p:cNvSpPr txBox="1"/>
-          <p:nvPr/>
-        </p:nvSpPr>
-        <p:spPr>
-          <a:xfrm>
-            <a:off x="8321040" y="2523744"/>
-            <a:ext cx="3063239" cy="1645920"/>
-          </a:xfrm>
-          <a:prstGeom prst="rect">
-            <a:avLst/>
-          </a:prstGeom>
-          <a:noFill/>
-        </p:spPr>
-        <p:txBody>
-          <a:bodyPr wrap="square">
-            <a:spAutoFit/>
-          </a:bodyPr>
-          <a:lstStyle/>
-          <a:p>
-            <a:pPr algn="l">
-              <a:spcAft>
-                <a:spcPts val="400"/>
-              </a:spcAft>
-            </a:pPr>
-            <a:r>
-              <a:rPr sz="1500" b="1">
-                <a:solidFill>
-                  <a:srgbClr val="0D3158"/>
-                </a:solidFill>
-                <a:latin typeface="Segoe UI"/>
-              </a:rPr>
-              <a:t>Giai đoạn 3
-Nhân rộng</a:t>
-            </a:r>
-          </a:p>
-          <a:p>
-            <a:pPr algn="l">
-              <a:spcAft>
-                <a:spcPts val="400"/>
-              </a:spcAft>
-            </a:pPr>
-            <a:r>
-              <a:rPr sz="1150" b="0">
-                <a:solidFill>
-                  <a:srgbClr val="5B7085"/>
-                </a:solidFill>
-                <a:latin typeface="Segoe UI"/>
-              </a:rPr>
-              <a:t>Nhiều đơn vị trong cùng tỉnh
-Bảng điều hành cho cơ quan quản lý</a:t>
-            </a:r>
-          </a:p>
-        </p:txBody>
-      </p:sp>
-      <p:sp>
-        <p:nvSpPr>
-          <p:cNvPr id="12" name="Rectangle 11"/>
-          <p:cNvSpPr/>
-          <p:nvPr/>
-        </p:nvSpPr>
-        <p:spPr>
-          <a:xfrm>
-            <a:off x="685800" y="4572000"/>
-            <a:ext cx="10789920" cy="914400"/>
-          </a:xfrm>
-          <a:prstGeom prst="rect">
-            <a:avLst/>
-          </a:prstGeom>
-          <a:solidFill>
-            <a:srgbClr val="FDF1E7"/>
-          </a:solidFill>
-          <a:ln>
-            <a:noFill/>
-          </a:ln>
-          <a:effectLst/>
-        </p:spPr>
-        <p:style>
-          <a:lnRef idx="1">
-            <a:schemeClr val="accent1"/>
-          </a:lnRef>
-          <a:fillRef idx="3">
-            <a:schemeClr val="accent1"/>
-          </a:fillRef>
-          <a:effectRef idx="2">
-            <a:schemeClr val="accent1"/>
-          </a:effectRef>
-          <a:fontRef idx="minor">
-            <a:schemeClr val="lt1"/>
-          </a:fontRef>
-        </p:style>
-        <p:txBody>
-          <a:bodyPr rtlCol="0" anchor="ctr"/>
-          <a:lstStyle/>
-          <a:p>
-            <a:pPr algn="ctr"/>
-          </a:p>
-        </p:txBody>
-      </p:sp>
-      <p:sp>
-        <p:nvSpPr>
-          <p:cNvPr id="13" name="Rectangle 12"/>
-          <p:cNvSpPr/>
-          <p:nvPr/>
-        </p:nvSpPr>
-        <p:spPr>
-          <a:xfrm>
-            <a:off x="685800" y="4572000"/>
-            <a:ext cx="50292" cy="914400"/>
+            <a:off x="6217920" y="4297680"/>
+            <a:ext cx="50292" cy="1371600"/>
           </a:xfrm>
           <a:prstGeom prst="rect">
             <a:avLst/>
@@ -6401,14 +6401,14 @@
       </p:sp>
       <p:sp>
         <p:nvSpPr>
-          <p:cNvPr id="14" name="TextBox 13"/>
+          <p:cNvPr id="11" name="TextBox 10"/>
           <p:cNvSpPr txBox="1"/>
           <p:nvPr/>
         </p:nvSpPr>
         <p:spPr>
           <a:xfrm>
-            <a:off x="914400" y="4700016"/>
-            <a:ext cx="10378440" cy="658368"/>
+            <a:off x="6446520" y="4443984"/>
+            <a:ext cx="4892040" cy="1097280"/>
           </a:xfrm>
           <a:prstGeom prst="rect">
             <a:avLst/>
@@ -6427,13 +6427,13 @@
               </a:spcAft>
             </a:pPr>
             <a:r>
-              <a:rPr sz="1000" b="1">
-                <a:solidFill>
-                  <a:srgbClr val="C25A1E"/>
-                </a:solidFill>
-                <a:latin typeface="Segoe UI"/>
-              </a:rPr>
-              <a:t>⚠ CẦN SỐ LIỆU THẬT</a:t>
+              <a:rPr sz="1500" b="1">
+                <a:solidFill>
+                  <a:srgbClr val="0D3158"/>
+                </a:solidFill>
+                <a:latin typeface="Segoe UI"/>
+              </a:rPr>
+              <a:t>Đang cần bổ sung</a:t>
             </a:r>
           </a:p>
           <a:p>
@@ -6445,50 +6445,11 @@
             <a:r>
               <a:rPr sz="1200" b="0">
                 <a:solidFill>
-                  <a:srgbClr val="1B2A3D"/>
-                </a:solidFill>
-                <a:latin typeface="Segoe UI"/>
-              </a:rPr>
-              <a:t>Mốc thời gian cụ thể cho từng giai đoạn + chỉ số nghiệm thu đã thống nhất với đơn vị thí điểm.</a:t>
-            </a:r>
-          </a:p>
-        </p:txBody>
-      </p:sp>
-      <p:sp>
-        <p:nvSpPr>
-          <p:cNvPr id="15" name="TextBox 14"/>
-          <p:cNvSpPr txBox="1"/>
-          <p:nvPr/>
-        </p:nvSpPr>
-        <p:spPr>
-          <a:xfrm>
-            <a:off x="685800" y="5669280"/>
-            <a:ext cx="10789920" cy="640080"/>
-          </a:xfrm>
-          <a:prstGeom prst="rect">
-            <a:avLst/>
-          </a:prstGeom>
-          <a:noFill/>
-        </p:spPr>
-        <p:txBody>
-          <a:bodyPr wrap="square">
-            <a:spAutoFit/>
-          </a:bodyPr>
-          <a:lstStyle/>
-          <a:p>
-            <a:pPr algn="l">
-              <a:spcAft>
-                <a:spcPts val="600"/>
-              </a:spcAft>
-            </a:pPr>
-            <a:r>
-              <a:rPr sz="1500" b="1">
-                <a:solidFill>
-                  <a:srgbClr val="0D3158"/>
-                </a:solidFill>
-                <a:latin typeface="Segoe UI"/>
-              </a:rPr>
-              <a:t>Chỉ số Bắc Đẩu: tỷ lệ hồ sơ được tiếp nhận ngay lần nộp đầu tiên.</a:t>
+                  <a:srgbClr val="5B7085"/>
+                </a:solidFill>
+                <a:latin typeface="Segoe UI"/>
+              </a:rPr>
+              <a:t>Người có quan hệ triển khai khu vực công và kinh nghiệm mua sắm công.</a:t>
             </a:r>
           </a:p>
         </p:txBody>
@@ -6502,6 +6463,704 @@
 </file>
 
 <file path=ppt/slides/slide13.xml><?xml version="1.0" encoding="utf-8"?>
+<p:sld xmlns:a="http://schemas.openxmlformats.org/drawingml/2006/main" xmlns:p="http://schemas.openxmlformats.org/presentationml/2006/main" xmlns:r="http://schemas.openxmlformats.org/officeDocument/2006/relationships">
+  <p:cSld>
+    <p:bg>
+      <p:bgPr>
+        <a:solidFill>
+          <a:srgbClr val="F3F1EA"/>
+        </a:solidFill>
+        <a:effectLst/>
+      </p:bgPr>
+    </p:bg>
+    <p:spTree>
+      <p:nvGrpSpPr>
+        <p:cNvPr id="1" name=""/>
+        <p:cNvGrpSpPr/>
+        <p:nvPr/>
+      </p:nvGrpSpPr>
+      <p:grpSpPr/>
+      <p:sp>
+        <p:nvSpPr>
+          <p:cNvPr id="2" name="TextBox 1"/>
+          <p:cNvSpPr txBox="1"/>
+          <p:nvPr/>
+        </p:nvSpPr>
+        <p:spPr>
+          <a:xfrm>
+            <a:off x="685800" y="411480"/>
+            <a:ext cx="10881360" cy="1371600"/>
+          </a:xfrm>
+          <a:prstGeom prst="rect">
+            <a:avLst/>
+          </a:prstGeom>
+          <a:noFill/>
+        </p:spPr>
+        <p:txBody>
+          <a:bodyPr wrap="square">
+            <a:spAutoFit/>
+          </a:bodyPr>
+          <a:lstStyle/>
+          <a:p>
+            <a:pPr algn="l">
+              <a:spcAft>
+                <a:spcPts val="300"/>
+              </a:spcAft>
+            </a:pPr>
+            <a:r>
+              <a:rPr sz="1100" b="1">
+                <a:solidFill>
+                  <a:srgbClr val="176FA6"/>
+                </a:solidFill>
+                <a:latin typeface="Segoe UI"/>
+              </a:rPr>
+              <a:t>LỘ TRÌNH</a:t>
+            </a:r>
+          </a:p>
+          <a:p>
+            <a:pPr algn="l">
+              <a:spcAft>
+                <a:spcPts val="300"/>
+              </a:spcAft>
+            </a:pPr>
+            <a:r>
+              <a:rPr sz="3300" b="1">
+                <a:solidFill>
+                  <a:srgbClr val="0D3158"/>
+                </a:solidFill>
+                <a:latin typeface="Segoe UI"/>
+              </a:rPr>
+              <a:t>Từ demo đến triển khai thật</a:t>
+            </a:r>
+          </a:p>
+        </p:txBody>
+      </p:sp>
+      <p:sp>
+        <p:nvSpPr>
+          <p:cNvPr id="3" name="Rectangle 2"/>
+          <p:cNvSpPr/>
+          <p:nvPr/>
+        </p:nvSpPr>
+        <p:spPr>
+          <a:xfrm>
+            <a:off x="685800" y="2377440"/>
+            <a:ext cx="3474720" cy="1920240"/>
+          </a:xfrm>
+          <a:prstGeom prst="rect">
+            <a:avLst/>
+          </a:prstGeom>
+          <a:solidFill>
+            <a:srgbClr val="FFFFFF"/>
+          </a:solidFill>
+          <a:ln>
+            <a:noFill/>
+          </a:ln>
+          <a:effectLst/>
+        </p:spPr>
+        <p:style>
+          <a:lnRef idx="1">
+            <a:schemeClr val="accent1"/>
+          </a:lnRef>
+          <a:fillRef idx="3">
+            <a:schemeClr val="accent1"/>
+          </a:fillRef>
+          <a:effectRef idx="2">
+            <a:schemeClr val="accent1"/>
+          </a:effectRef>
+          <a:fontRef idx="minor">
+            <a:schemeClr val="lt1"/>
+          </a:fontRef>
+        </p:style>
+        <p:txBody>
+          <a:bodyPr rtlCol="0" anchor="ctr"/>
+          <a:lstStyle/>
+          <a:p>
+            <a:pPr algn="ctr"/>
+          </a:p>
+        </p:txBody>
+      </p:sp>
+      <p:sp>
+        <p:nvSpPr>
+          <p:cNvPr id="4" name="Rectangle 3"/>
+          <p:cNvSpPr/>
+          <p:nvPr/>
+        </p:nvSpPr>
+        <p:spPr>
+          <a:xfrm>
+            <a:off x="685800" y="2377440"/>
+            <a:ext cx="50292" cy="1920240"/>
+          </a:xfrm>
+          <a:prstGeom prst="rect">
+            <a:avLst/>
+          </a:prstGeom>
+          <a:solidFill>
+            <a:srgbClr val="176FA6"/>
+          </a:solidFill>
+          <a:ln>
+            <a:noFill/>
+          </a:ln>
+          <a:effectLst/>
+        </p:spPr>
+        <p:style>
+          <a:lnRef idx="1">
+            <a:schemeClr val="accent1"/>
+          </a:lnRef>
+          <a:fillRef idx="3">
+            <a:schemeClr val="accent1"/>
+          </a:fillRef>
+          <a:effectRef idx="2">
+            <a:schemeClr val="accent1"/>
+          </a:effectRef>
+          <a:fontRef idx="minor">
+            <a:schemeClr val="lt1"/>
+          </a:fontRef>
+        </p:style>
+        <p:txBody>
+          <a:bodyPr rtlCol="0" anchor="ctr"/>
+          <a:lstStyle/>
+          <a:p>
+            <a:pPr algn="ctr"/>
+          </a:p>
+        </p:txBody>
+      </p:sp>
+      <p:sp>
+        <p:nvSpPr>
+          <p:cNvPr id="5" name="TextBox 4"/>
+          <p:cNvSpPr txBox="1"/>
+          <p:nvPr/>
+        </p:nvSpPr>
+        <p:spPr>
+          <a:xfrm>
+            <a:off x="914400" y="2523744"/>
+            <a:ext cx="3063239" cy="1645920"/>
+          </a:xfrm>
+          <a:prstGeom prst="rect">
+            <a:avLst/>
+          </a:prstGeom>
+          <a:noFill/>
+        </p:spPr>
+        <p:txBody>
+          <a:bodyPr wrap="square">
+            <a:spAutoFit/>
+          </a:bodyPr>
+          <a:lstStyle/>
+          <a:p>
+            <a:pPr algn="l">
+              <a:spcAft>
+                <a:spcPts val="400"/>
+              </a:spcAft>
+            </a:pPr>
+            <a:r>
+              <a:rPr sz="1500" b="1">
+                <a:solidFill>
+                  <a:srgbClr val="0D3158"/>
+                </a:solidFill>
+                <a:latin typeface="Segoe UI"/>
+              </a:rPr>
+              <a:t>Giai đoạn 1
+Thí điểm</a:t>
+            </a:r>
+          </a:p>
+          <a:p>
+            <a:pPr algn="l">
+              <a:spcAft>
+                <a:spcPts val="400"/>
+              </a:spcAft>
+            </a:pPr>
+            <a:r>
+              <a:rPr sz="1150" b="0">
+                <a:solidFill>
+                  <a:srgbClr val="5B7085"/>
+                </a:solidFill>
+                <a:latin typeface="Segoe UI"/>
+              </a:rPr>
+              <a:t>1 xã/phường · 5 thủ tục hiện có
+Đo: tỷ lệ hồ sơ đạt ngay lần đầu</a:t>
+            </a:r>
+          </a:p>
+        </p:txBody>
+      </p:sp>
+      <p:sp>
+        <p:nvSpPr>
+          <p:cNvPr id="6" name="Rectangle 5"/>
+          <p:cNvSpPr/>
+          <p:nvPr/>
+        </p:nvSpPr>
+        <p:spPr>
+          <a:xfrm>
+            <a:off x="4389120" y="2377440"/>
+            <a:ext cx="3474720" cy="1920240"/>
+          </a:xfrm>
+          <a:prstGeom prst="rect">
+            <a:avLst/>
+          </a:prstGeom>
+          <a:solidFill>
+            <a:srgbClr val="FFFFFF"/>
+          </a:solidFill>
+          <a:ln>
+            <a:noFill/>
+          </a:ln>
+          <a:effectLst/>
+        </p:spPr>
+        <p:style>
+          <a:lnRef idx="1">
+            <a:schemeClr val="accent1"/>
+          </a:lnRef>
+          <a:fillRef idx="3">
+            <a:schemeClr val="accent1"/>
+          </a:fillRef>
+          <a:effectRef idx="2">
+            <a:schemeClr val="accent1"/>
+          </a:effectRef>
+          <a:fontRef idx="minor">
+            <a:schemeClr val="lt1"/>
+          </a:fontRef>
+        </p:style>
+        <p:txBody>
+          <a:bodyPr rtlCol="0" anchor="ctr"/>
+          <a:lstStyle/>
+          <a:p>
+            <a:pPr algn="ctr"/>
+          </a:p>
+        </p:txBody>
+      </p:sp>
+      <p:sp>
+        <p:nvSpPr>
+          <p:cNvPr id="7" name="Rectangle 6"/>
+          <p:cNvSpPr/>
+          <p:nvPr/>
+        </p:nvSpPr>
+        <p:spPr>
+          <a:xfrm>
+            <a:off x="4389120" y="2377440"/>
+            <a:ext cx="50292" cy="1920240"/>
+          </a:xfrm>
+          <a:prstGeom prst="rect">
+            <a:avLst/>
+          </a:prstGeom>
+          <a:solidFill>
+            <a:srgbClr val="167C78"/>
+          </a:solidFill>
+          <a:ln>
+            <a:noFill/>
+          </a:ln>
+          <a:effectLst/>
+        </p:spPr>
+        <p:style>
+          <a:lnRef idx="1">
+            <a:schemeClr val="accent1"/>
+          </a:lnRef>
+          <a:fillRef idx="3">
+            <a:schemeClr val="accent1"/>
+          </a:fillRef>
+          <a:effectRef idx="2">
+            <a:schemeClr val="accent1"/>
+          </a:effectRef>
+          <a:fontRef idx="minor">
+            <a:schemeClr val="lt1"/>
+          </a:fontRef>
+        </p:style>
+        <p:txBody>
+          <a:bodyPr rtlCol="0" anchor="ctr"/>
+          <a:lstStyle/>
+          <a:p>
+            <a:pPr algn="ctr"/>
+          </a:p>
+        </p:txBody>
+      </p:sp>
+      <p:sp>
+        <p:nvSpPr>
+          <p:cNvPr id="8" name="TextBox 7"/>
+          <p:cNvSpPr txBox="1"/>
+          <p:nvPr/>
+        </p:nvSpPr>
+        <p:spPr>
+          <a:xfrm>
+            <a:off x="4617720" y="2523744"/>
+            <a:ext cx="3063239" cy="1645920"/>
+          </a:xfrm>
+          <a:prstGeom prst="rect">
+            <a:avLst/>
+          </a:prstGeom>
+          <a:noFill/>
+        </p:spPr>
+        <p:txBody>
+          <a:bodyPr wrap="square">
+            <a:spAutoFit/>
+          </a:bodyPr>
+          <a:lstStyle/>
+          <a:p>
+            <a:pPr algn="l">
+              <a:spcAft>
+                <a:spcPts val="400"/>
+              </a:spcAft>
+            </a:pPr>
+            <a:r>
+              <a:rPr sz="1500" b="1">
+                <a:solidFill>
+                  <a:srgbClr val="0D3158"/>
+                </a:solidFill>
+                <a:latin typeface="Segoe UI"/>
+              </a:rPr>
+              <a:t>Giai đoạn 2
+Mở rộng thủ tục</a:t>
+            </a:r>
+          </a:p>
+          <a:p>
+            <a:pPr algn="l">
+              <a:spcAft>
+                <a:spcPts val="400"/>
+              </a:spcAft>
+            </a:pPr>
+            <a:r>
+              <a:rPr sz="1150" b="0">
+                <a:solidFill>
+                  <a:srgbClr val="5B7085"/>
+                </a:solidFill>
+                <a:latin typeface="Segoe UI"/>
+              </a:rPr>
+              <a:t>Bổ sung nhóm thủ tục hộ tịch – cư trú – đất đai
+Chuẩn hoá quy trình đồng bộ nguồn</a:t>
+            </a:r>
+          </a:p>
+        </p:txBody>
+      </p:sp>
+      <p:sp>
+        <p:nvSpPr>
+          <p:cNvPr id="9" name="Rectangle 8"/>
+          <p:cNvSpPr/>
+          <p:nvPr/>
+        </p:nvSpPr>
+        <p:spPr>
+          <a:xfrm>
+            <a:off x="8092440" y="2377440"/>
+            <a:ext cx="3474720" cy="1920240"/>
+          </a:xfrm>
+          <a:prstGeom prst="rect">
+            <a:avLst/>
+          </a:prstGeom>
+          <a:solidFill>
+            <a:srgbClr val="FFFFFF"/>
+          </a:solidFill>
+          <a:ln>
+            <a:noFill/>
+          </a:ln>
+          <a:effectLst/>
+        </p:spPr>
+        <p:style>
+          <a:lnRef idx="1">
+            <a:schemeClr val="accent1"/>
+          </a:lnRef>
+          <a:fillRef idx="3">
+            <a:schemeClr val="accent1"/>
+          </a:fillRef>
+          <a:effectRef idx="2">
+            <a:schemeClr val="accent1"/>
+          </a:effectRef>
+          <a:fontRef idx="minor">
+            <a:schemeClr val="lt1"/>
+          </a:fontRef>
+        </p:style>
+        <p:txBody>
+          <a:bodyPr rtlCol="0" anchor="ctr"/>
+          <a:lstStyle/>
+          <a:p>
+            <a:pPr algn="ctr"/>
+          </a:p>
+        </p:txBody>
+      </p:sp>
+      <p:sp>
+        <p:nvSpPr>
+          <p:cNvPr id="10" name="Rectangle 9"/>
+          <p:cNvSpPr/>
+          <p:nvPr/>
+        </p:nvSpPr>
+        <p:spPr>
+          <a:xfrm>
+            <a:off x="8092440" y="2377440"/>
+            <a:ext cx="50292" cy="1920240"/>
+          </a:xfrm>
+          <a:prstGeom prst="rect">
+            <a:avLst/>
+          </a:prstGeom>
+          <a:solidFill>
+            <a:srgbClr val="0D3158"/>
+          </a:solidFill>
+          <a:ln>
+            <a:noFill/>
+          </a:ln>
+          <a:effectLst/>
+        </p:spPr>
+        <p:style>
+          <a:lnRef idx="1">
+            <a:schemeClr val="accent1"/>
+          </a:lnRef>
+          <a:fillRef idx="3">
+            <a:schemeClr val="accent1"/>
+          </a:fillRef>
+          <a:effectRef idx="2">
+            <a:schemeClr val="accent1"/>
+          </a:effectRef>
+          <a:fontRef idx="minor">
+            <a:schemeClr val="lt1"/>
+          </a:fontRef>
+        </p:style>
+        <p:txBody>
+          <a:bodyPr rtlCol="0" anchor="ctr"/>
+          <a:lstStyle/>
+          <a:p>
+            <a:pPr algn="ctr"/>
+          </a:p>
+        </p:txBody>
+      </p:sp>
+      <p:sp>
+        <p:nvSpPr>
+          <p:cNvPr id="11" name="TextBox 10"/>
+          <p:cNvSpPr txBox="1"/>
+          <p:nvPr/>
+        </p:nvSpPr>
+        <p:spPr>
+          <a:xfrm>
+            <a:off x="8321040" y="2523744"/>
+            <a:ext cx="3063239" cy="1645920"/>
+          </a:xfrm>
+          <a:prstGeom prst="rect">
+            <a:avLst/>
+          </a:prstGeom>
+          <a:noFill/>
+        </p:spPr>
+        <p:txBody>
+          <a:bodyPr wrap="square">
+            <a:spAutoFit/>
+          </a:bodyPr>
+          <a:lstStyle/>
+          <a:p>
+            <a:pPr algn="l">
+              <a:spcAft>
+                <a:spcPts val="400"/>
+              </a:spcAft>
+            </a:pPr>
+            <a:r>
+              <a:rPr sz="1500" b="1">
+                <a:solidFill>
+                  <a:srgbClr val="0D3158"/>
+                </a:solidFill>
+                <a:latin typeface="Segoe UI"/>
+              </a:rPr>
+              <a:t>Giai đoạn 3
+Nhân rộng</a:t>
+            </a:r>
+          </a:p>
+          <a:p>
+            <a:pPr algn="l">
+              <a:spcAft>
+                <a:spcPts val="400"/>
+              </a:spcAft>
+            </a:pPr>
+            <a:r>
+              <a:rPr sz="1150" b="0">
+                <a:solidFill>
+                  <a:srgbClr val="5B7085"/>
+                </a:solidFill>
+                <a:latin typeface="Segoe UI"/>
+              </a:rPr>
+              <a:t>Nhiều đơn vị trong cùng tỉnh
+Bảng điều hành cho cơ quan quản lý</a:t>
+            </a:r>
+          </a:p>
+        </p:txBody>
+      </p:sp>
+      <p:sp>
+        <p:nvSpPr>
+          <p:cNvPr id="12" name="Rectangle 11"/>
+          <p:cNvSpPr/>
+          <p:nvPr/>
+        </p:nvSpPr>
+        <p:spPr>
+          <a:xfrm>
+            <a:off x="685800" y="4572000"/>
+            <a:ext cx="10789920" cy="914400"/>
+          </a:xfrm>
+          <a:prstGeom prst="rect">
+            <a:avLst/>
+          </a:prstGeom>
+          <a:solidFill>
+            <a:srgbClr val="FDF1E7"/>
+          </a:solidFill>
+          <a:ln>
+            <a:noFill/>
+          </a:ln>
+          <a:effectLst/>
+        </p:spPr>
+        <p:style>
+          <a:lnRef idx="1">
+            <a:schemeClr val="accent1"/>
+          </a:lnRef>
+          <a:fillRef idx="3">
+            <a:schemeClr val="accent1"/>
+          </a:fillRef>
+          <a:effectRef idx="2">
+            <a:schemeClr val="accent1"/>
+          </a:effectRef>
+          <a:fontRef idx="minor">
+            <a:schemeClr val="lt1"/>
+          </a:fontRef>
+        </p:style>
+        <p:txBody>
+          <a:bodyPr rtlCol="0" anchor="ctr"/>
+          <a:lstStyle/>
+          <a:p>
+            <a:pPr algn="ctr"/>
+          </a:p>
+        </p:txBody>
+      </p:sp>
+      <p:sp>
+        <p:nvSpPr>
+          <p:cNvPr id="13" name="Rectangle 12"/>
+          <p:cNvSpPr/>
+          <p:nvPr/>
+        </p:nvSpPr>
+        <p:spPr>
+          <a:xfrm>
+            <a:off x="685800" y="4572000"/>
+            <a:ext cx="50292" cy="914400"/>
+          </a:xfrm>
+          <a:prstGeom prst="rect">
+            <a:avLst/>
+          </a:prstGeom>
+          <a:solidFill>
+            <a:srgbClr val="C25A1E"/>
+          </a:solidFill>
+          <a:ln>
+            <a:noFill/>
+          </a:ln>
+          <a:effectLst/>
+        </p:spPr>
+        <p:style>
+          <a:lnRef idx="1">
+            <a:schemeClr val="accent1"/>
+          </a:lnRef>
+          <a:fillRef idx="3">
+            <a:schemeClr val="accent1"/>
+          </a:fillRef>
+          <a:effectRef idx="2">
+            <a:schemeClr val="accent1"/>
+          </a:effectRef>
+          <a:fontRef idx="minor">
+            <a:schemeClr val="lt1"/>
+          </a:fontRef>
+        </p:style>
+        <p:txBody>
+          <a:bodyPr rtlCol="0" anchor="ctr"/>
+          <a:lstStyle/>
+          <a:p>
+            <a:pPr algn="ctr"/>
+          </a:p>
+        </p:txBody>
+      </p:sp>
+      <p:sp>
+        <p:nvSpPr>
+          <p:cNvPr id="14" name="TextBox 13"/>
+          <p:cNvSpPr txBox="1"/>
+          <p:nvPr/>
+        </p:nvSpPr>
+        <p:spPr>
+          <a:xfrm>
+            <a:off x="914400" y="4700016"/>
+            <a:ext cx="10378440" cy="658368"/>
+          </a:xfrm>
+          <a:prstGeom prst="rect">
+            <a:avLst/>
+          </a:prstGeom>
+          <a:noFill/>
+        </p:spPr>
+        <p:txBody>
+          <a:bodyPr wrap="square">
+            <a:spAutoFit/>
+          </a:bodyPr>
+          <a:lstStyle/>
+          <a:p>
+            <a:pPr algn="l">
+              <a:spcAft>
+                <a:spcPts val="400"/>
+              </a:spcAft>
+            </a:pPr>
+            <a:r>
+              <a:rPr sz="1000" b="1">
+                <a:solidFill>
+                  <a:srgbClr val="C25A1E"/>
+                </a:solidFill>
+                <a:latin typeface="Segoe UI"/>
+              </a:rPr>
+              <a:t>⚠ CẦN SỐ LIỆU THẬT</a:t>
+            </a:r>
+          </a:p>
+          <a:p>
+            <a:pPr algn="l">
+              <a:spcAft>
+                <a:spcPts val="400"/>
+              </a:spcAft>
+            </a:pPr>
+            <a:r>
+              <a:rPr sz="1200" b="0">
+                <a:solidFill>
+                  <a:srgbClr val="1B2A3D"/>
+                </a:solidFill>
+                <a:latin typeface="Segoe UI"/>
+              </a:rPr>
+              <a:t>Mốc thời gian cụ thể cho từng giai đoạn + chỉ số nghiệm thu đã thống nhất với đơn vị thí điểm.</a:t>
+            </a:r>
+          </a:p>
+        </p:txBody>
+      </p:sp>
+      <p:sp>
+        <p:nvSpPr>
+          <p:cNvPr id="15" name="TextBox 14"/>
+          <p:cNvSpPr txBox="1"/>
+          <p:nvPr/>
+        </p:nvSpPr>
+        <p:spPr>
+          <a:xfrm>
+            <a:off x="685800" y="5669280"/>
+            <a:ext cx="10789920" cy="640080"/>
+          </a:xfrm>
+          <a:prstGeom prst="rect">
+            <a:avLst/>
+          </a:prstGeom>
+          <a:noFill/>
+        </p:spPr>
+        <p:txBody>
+          <a:bodyPr wrap="square">
+            <a:spAutoFit/>
+          </a:bodyPr>
+          <a:lstStyle/>
+          <a:p>
+            <a:pPr algn="l">
+              <a:spcAft>
+                <a:spcPts val="600"/>
+              </a:spcAft>
+            </a:pPr>
+            <a:r>
+              <a:rPr sz="1500" b="1">
+                <a:solidFill>
+                  <a:srgbClr val="0D3158"/>
+                </a:solidFill>
+                <a:latin typeface="Segoe UI"/>
+              </a:rPr>
+              <a:t>Chỉ số Bắc Đẩu: tỷ lệ hồ sơ được tiếp nhận ngay lần nộp đầu tiên.</a:t>
+            </a:r>
+          </a:p>
+        </p:txBody>
+      </p:sp>
+    </p:spTree>
+  </p:cSld>
+  <p:clrMapOvr>
+    <a:masterClrMapping/>
+  </p:clrMapOvr>
+</p:sld>
+</file>
+
+<file path=ppt/slides/slide14.xml><?xml version="1.0" encoding="utf-8"?>
 <p:sld xmlns:a="http://schemas.openxmlformats.org/drawingml/2006/main" xmlns:p="http://schemas.openxmlformats.org/presentationml/2006/main" xmlns:r="http://schemas.openxmlformats.org/officeDocument/2006/relationships">
   <p:cSld>
     <p:bg>
@@ -7193,7 +7852,7 @@
 </p:sld>
 </file>
 
-<file path=ppt/slides/slide14.xml><?xml version="1.0" encoding="utf-8"?>
+<file path=ppt/slides/slide15.xml><?xml version="1.0" encoding="utf-8"?>
 <p:sld xmlns:a="http://schemas.openxmlformats.org/drawingml/2006/main" xmlns:p="http://schemas.openxmlformats.org/presentationml/2006/main" xmlns:r="http://schemas.openxmlformats.org/officeDocument/2006/relationships">
   <p:cSld>
     <p:bg>
@@ -10513,7 +11172,7 @@
                 </a:solidFill>
                 <a:latin typeface="Segoe UI"/>
               </a:rPr>
-              <a:t>Cùng một thủ tục, mỗi hoàn cảnh cần giấy khác nhau. Checklist sinh theo câu trả lời, không phải danh sách cứng.</a:t>
+              <a:t>Cùng thủ tục giấy phép xây dựng: danh mục có 5 thành phần, nhưng tuỳ câu trả lời chỉ còn 3 — 4 — 5 mục thật sự phải chuẩn bị.</a:t>
             </a:r>
           </a:p>
         </p:txBody>
@@ -10963,7 +11622,7 @@
                 </a:solidFill>
                 <a:latin typeface="Segoe UI"/>
               </a:rPr>
-              <a:t>5 thủ tục, mỗi thủ tục trỏ về đúng trang công bố trên Cổng Dịch vụ công. Biểu mẫu tải trực tiếp từ nguồn, không chép tay.</a:t>
+              <a:t>5 thủ tục · 17 luật kiểm tra khai báo · 75 endpoint. Kiểm thử tự động bắt buộc mỗi trích dẫn mở đúng mã thủ tục quốc gia của chính nó.</a:t>
             </a:r>
           </a:p>
         </p:txBody>
@@ -11106,7 +11765,7 @@
                 </a:solidFill>
                 <a:latin typeface="Segoe UI"/>
               </a:rPr>
-              <a:t>330 bài kiểm thử tự động, CI xanh trên nhánh chính. Có kiểm thử riêng chặn việc trích dẫn sai nguồn.</a:t>
+              <a:t>335 bài kiểm thử, CI xanh. Cổng CI chặn merge khi hệ thống chốt nhầm thủ tục — ngưỡng cho phép: 0. Đo được, không phải lời hứa.</a:t>
             </a:r>
           </a:p>
         </p:txBody>
@@ -11189,7 +11848,7 @@
                 </a:solidFill>
                 <a:latin typeface="Segoe UI"/>
               </a:rPr>
-              <a:t>Đã tự phát hiện và loại bỏ căn cứ pháp lý không kiểm chứng được trong dữ liệu của chính mình — thà báo “chưa đủ căn cứ” còn hơn nói sai với người dân.</a:t>
+              <a:t>Chốt nhầm thủ tục: 0/60 trên bộ đánh giá giữ riêng. Khi không chắc, hệ thống hỏi lại chứ không đoán — vì chốt nhầm thủ tục làm sai toàn bộ checklist phía sau.</a:t>
             </a:r>
           </a:p>
         </p:txBody>
@@ -11397,7 +12056,7 @@
                 </a:solidFill>
                 <a:latin typeface="Segoe UI"/>
               </a:rPr>
-              <a:t>LỢI THẾ</a:t>
+              <a:t>AN TOÀN</a:t>
             </a:r>
           </a:p>
           <a:p>
@@ -11413,7 +12072,7 @@
                 </a:solidFill>
                 <a:latin typeface="Segoe UI"/>
               </a:rPr>
-              <a:t>Vì sao khó sao chép</a:t>
+              <a:t>Không hứa an toàn. Đo nó.</a:t>
             </a:r>
           </a:p>
         </p:txBody>
@@ -11427,7 +12086,7 @@
         <p:spPr>
           <a:xfrm>
             <a:off x="685800" y="2286000"/>
-            <a:ext cx="10789920" cy="1207008"/>
+            <a:ext cx="10789920" cy="1143000"/>
           </a:xfrm>
           <a:prstGeom prst="rect">
             <a:avLst/>
@@ -11471,13 +12130,13 @@
         <p:spPr>
           <a:xfrm>
             <a:off x="685800" y="2286000"/>
-            <a:ext cx="50292" cy="1207008"/>
+            <a:ext cx="50292" cy="1143000"/>
           </a:xfrm>
           <a:prstGeom prst="rect">
             <a:avLst/>
           </a:prstGeom>
           <a:solidFill>
-            <a:srgbClr val="176FA6"/>
+            <a:srgbClr val="167C78"/>
           </a:solidFill>
           <a:ln>
             <a:noFill/>
@@ -11515,7 +12174,7 @@
         <p:spPr>
           <a:xfrm>
             <a:off x="914400" y="2432304"/>
-            <a:ext cx="10378440" cy="932688"/>
+            <a:ext cx="10378440" cy="868680"/>
           </a:xfrm>
           <a:prstGeom prst="rect">
             <a:avLst/>
@@ -11540,7 +12199,7 @@
                 </a:solidFill>
                 <a:latin typeface="Segoe UI"/>
               </a:rPr>
-              <a:t>Dữ liệu thủ tục có kỷ luật nguồn</a:t>
+              <a:t>Chốt nhầm thủ tục: 0/60</a:t>
             </a:r>
           </a:p>
           <a:p>
@@ -11550,13 +12209,13 @@
               </a:spcAft>
             </a:pPr>
             <a:r>
-              <a:rPr sz="1200" b="0">
+              <a:rPr sz="1150" b="0">
                 <a:solidFill>
                   <a:srgbClr val="5B7085"/>
                 </a:solidFill>
                 <a:latin typeface="Segoe UI"/>
               </a:rPr>
-              <a:t>Không phải bộ prompt. Là danh mục thủ tục chuẩn hoá, mỗi mục truy vết được về văn bản công bố, có quy trình đồng bộ khi nguồn đổi.</a:t>
+              <a:t>Trên bộ đánh giá giữ riêng — viết TRƯỚC khi tinh chỉnh và không dùng để tinh chỉnh. 10 ca không nhận ra đều lùi về hỏi lại, không ca nào đoán bừa.</a:t>
             </a:r>
           </a:p>
         </p:txBody>
@@ -11569,8 +12228,8 @@
         </p:nvSpPr>
         <p:spPr>
           <a:xfrm>
-            <a:off x="685800" y="3657600"/>
-            <a:ext cx="10789920" cy="1207008"/>
+            <a:off x="685800" y="3584448"/>
+            <a:ext cx="10789920" cy="1143000"/>
           </a:xfrm>
           <a:prstGeom prst="rect">
             <a:avLst/>
@@ -11613,14 +12272,14 @@
         </p:nvSpPr>
         <p:spPr>
           <a:xfrm>
-            <a:off x="685800" y="3657600"/>
-            <a:ext cx="50292" cy="1207008"/>
+            <a:off x="685800" y="3584448"/>
+            <a:ext cx="50292" cy="1143000"/>
           </a:xfrm>
           <a:prstGeom prst="rect">
             <a:avLst/>
           </a:prstGeom>
           <a:solidFill>
-            <a:srgbClr val="176FA6"/>
+            <a:srgbClr val="167C78"/>
           </a:solidFill>
           <a:ln>
             <a:noFill/>
@@ -11657,8 +12316,8 @@
         </p:nvSpPr>
         <p:spPr>
           <a:xfrm>
-            <a:off x="914400" y="3803904"/>
-            <a:ext cx="10378440" cy="932688"/>
+            <a:off x="914400" y="3730752"/>
+            <a:ext cx="10378440" cy="868680"/>
           </a:xfrm>
           <a:prstGeom prst="rect">
             <a:avLst/>
@@ -11683,7 +12342,7 @@
                 </a:solidFill>
                 <a:latin typeface="Segoe UI"/>
               </a:rPr>
-              <a:t>Tách bạch AI và luật</a:t>
+              <a:t>AI không thể kết luận “hồ sơ sai”</a:t>
             </a:r>
           </a:p>
           <a:p>
@@ -11693,13 +12352,13 @@
               </a:spcAft>
             </a:pPr>
             <a:r>
-              <a:rPr sz="1200" b="0">
+              <a:rPr sz="1150" b="0">
                 <a:solidFill>
                   <a:srgbClr val="5B7085"/>
                 </a:solidFill>
                 <a:latin typeface="Segoe UI"/>
               </a:rPr>
-              <a:t>Luật kiểm tra viết dưới dạng khai báo, tách khỏi mô hình. Thêm thủ tục mới không cần huấn luyện lại, và không làm AI 'chế' ra quy định.</a:t>
+              <a:t>Chặn ở tầng kiểu dữ liệu, không phải lời dặn trong prompt. Thử tạo cũng ném lỗi. Chỉ bộ quy tắc khai báo — thứ cán bộ đọc và ký duyệt được — mới có thẩm quyền đó.</a:t>
             </a:r>
           </a:p>
         </p:txBody>
@@ -11712,8 +12371,8 @@
         </p:nvSpPr>
         <p:spPr>
           <a:xfrm>
-            <a:off x="685800" y="5029200"/>
-            <a:ext cx="10789920" cy="1207008"/>
+            <a:off x="685800" y="4882896"/>
+            <a:ext cx="10789920" cy="1143000"/>
           </a:xfrm>
           <a:prstGeom prst="rect">
             <a:avLst/>
@@ -11756,14 +12415,14 @@
         </p:nvSpPr>
         <p:spPr>
           <a:xfrm>
-            <a:off x="685800" y="5029200"/>
-            <a:ext cx="50292" cy="1207008"/>
+            <a:off x="685800" y="4882896"/>
+            <a:ext cx="50292" cy="1143000"/>
           </a:xfrm>
           <a:prstGeom prst="rect">
             <a:avLst/>
           </a:prstGeom>
           <a:solidFill>
-            <a:srgbClr val="176FA6"/>
+            <a:srgbClr val="167C78"/>
           </a:solidFill>
           <a:ln>
             <a:noFill/>
@@ -11800,8 +12459,8 @@
         </p:nvSpPr>
         <p:spPr>
           <a:xfrm>
-            <a:off x="914400" y="5175504"/>
-            <a:ext cx="10378440" cy="932688"/>
+            <a:off x="914400" y="5029200"/>
+            <a:ext cx="10378440" cy="868680"/>
           </a:xfrm>
           <a:prstGeom prst="rect">
             <a:avLst/>
@@ -11826,7 +12485,7 @@
                 </a:solidFill>
                 <a:latin typeface="Segoe UI"/>
               </a:rPr>
-              <a:t>Vòng phản hồi từ cán bộ</a:t>
+              <a:t>Bộ đánh giá giữ riêng đã bắt được lỗi thật</a:t>
             </a:r>
           </a:p>
           <a:p>
@@ -11836,27 +12495,71 @@
               </a:spcAft>
             </a:pPr>
             <a:r>
-              <a:rPr sz="1200" b="0">
+              <a:rPr sz="1150" b="0">
                 <a:solidFill>
                   <a:srgbClr val="5B7085"/>
                 </a:solidFill>
                 <a:latin typeface="Segoe UI"/>
               </a:rPr>
-              <a:t>Mỗi lần cán bộ sửa kết quả AI là một nhãn dữ liệu. Càng dùng, checklist càng khớp thực tế địa phương.</a:t>
-            </a:r>
-          </a:p>
-        </p:txBody>
-      </p:sp>
-      <p:sp>
-        <p:nvSpPr>
-          <p:cNvPr id="12" name="TextBox 11"/>
+              <a:t>Ba lỗi khiến hệ thống chốt nhầm thủ tục, trong đó hai lỗi đặc thù tiếng Việt: bỏ dấu làm “chứng minh” trùng “chung mình”, và “cưới” trùng “cuối”. Đã sửa, có kiểm thử khoá lại.</a:t>
+            </a:r>
+          </a:p>
+        </p:txBody>
+      </p:sp>
+      <p:sp>
+        <p:nvSpPr>
+          <p:cNvPr id="12" name="Rectangle 11"/>
+          <p:cNvSpPr/>
+          <p:nvPr/>
+        </p:nvSpPr>
+        <p:spPr>
+          <a:xfrm>
+            <a:off x="685800" y="5486400"/>
+            <a:ext cx="10789920" cy="868680"/>
+          </a:xfrm>
+          <a:prstGeom prst="rect">
+            <a:avLst/>
+          </a:prstGeom>
+          <a:solidFill>
+            <a:srgbClr val="E9F3F0"/>
+          </a:solidFill>
+          <a:ln>
+            <a:noFill/>
+          </a:ln>
+          <a:effectLst/>
+        </p:spPr>
+        <p:style>
+          <a:lnRef idx="1">
+            <a:schemeClr val="accent1"/>
+          </a:lnRef>
+          <a:fillRef idx="3">
+            <a:schemeClr val="accent1"/>
+          </a:fillRef>
+          <a:effectRef idx="2">
+            <a:schemeClr val="accent1"/>
+          </a:effectRef>
+          <a:fontRef idx="minor">
+            <a:schemeClr val="lt1"/>
+          </a:fontRef>
+        </p:style>
+        <p:txBody>
+          <a:bodyPr rtlCol="0" anchor="ctr"/>
+          <a:lstStyle/>
+          <a:p>
+            <a:pPr algn="ctr"/>
+          </a:p>
+        </p:txBody>
+      </p:sp>
+      <p:sp>
+        <p:nvSpPr>
+          <p:cNvPr id="13" name="TextBox 12"/>
           <p:cNvSpPr txBox="1"/>
           <p:nvPr/>
         </p:nvSpPr>
         <p:spPr>
           <a:xfrm>
-            <a:off x="685800" y="5669280"/>
-            <a:ext cx="10789920" cy="640080"/>
+            <a:off x="914400" y="5623560"/>
+            <a:ext cx="10332720" cy="640080"/>
           </a:xfrm>
           <a:prstGeom prst="rect">
             <a:avLst/>
@@ -11875,13 +12578,13 @@
               </a:spcAft>
             </a:pPr>
             <a:r>
-              <a:rPr sz="1500" b="1">
-                <a:solidFill>
-                  <a:srgbClr val="0D3158"/>
-                </a:solidFill>
-                <a:latin typeface="Segoe UI"/>
-              </a:rPr>
-              <a:t>Đối thủ dựng được con chatbot trong một tuần. Dựng được lớp truy vết nguồn thì không.</a:t>
+              <a:rPr sz="1250" b="1">
+                <a:solidFill>
+                  <a:srgbClr val="167C78"/>
+                </a:solidFill>
+                <a:latin typeface="Segoe UI"/>
+              </a:rPr>
+              <a:t>Chốt nhầm thủ tục làm sai TOÀN BỘ checklist phía sau — người dân chuẩn bị đúng một bộ giấy tờ cho sai một thủ tục. Vì vậy nó là cổng chặn merge, không phải chỉ số cải thiện dần.</a:t>
             </a:r>
           </a:p>
         </p:txBody>
@@ -11946,7 +12649,7 @@
                 </a:solidFill>
                 <a:latin typeface="Segoe UI"/>
               </a:rPr>
-              <a:t>THỊ TRƯỜNG</a:t>
+              <a:t>LỢI THẾ</a:t>
             </a:r>
           </a:p>
           <a:p>
@@ -11962,7 +12665,7 @@
                 </a:solidFill>
                 <a:latin typeface="Segoe UI"/>
               </a:rPr>
-              <a:t>Quy mô cơ hội</a:t>
+              <a:t>Vì sao khó sao chép</a:t>
             </a:r>
           </a:p>
         </p:txBody>
@@ -11975,14 +12678,14 @@
         </p:nvSpPr>
         <p:spPr>
           <a:xfrm>
-            <a:off x="685800" y="2194560"/>
-            <a:ext cx="10789920" cy="1371600"/>
+            <a:off x="685800" y="2286000"/>
+            <a:ext cx="10789920" cy="1207008"/>
           </a:xfrm>
           <a:prstGeom prst="rect">
             <a:avLst/>
           </a:prstGeom>
           <a:solidFill>
-            <a:srgbClr val="FDF1E7"/>
+            <a:srgbClr val="FFFFFF"/>
           </a:solidFill>
           <a:ln>
             <a:noFill/>
@@ -12019,14 +12722,14 @@
         </p:nvSpPr>
         <p:spPr>
           <a:xfrm>
-            <a:off x="685800" y="2194560"/>
-            <a:ext cx="50292" cy="1371600"/>
+            <a:off x="685800" y="2286000"/>
+            <a:ext cx="50292" cy="1207008"/>
           </a:xfrm>
           <a:prstGeom prst="rect">
             <a:avLst/>
           </a:prstGeom>
           <a:solidFill>
-            <a:srgbClr val="C25A1E"/>
+            <a:srgbClr val="176FA6"/>
           </a:solidFill>
           <a:ln>
             <a:noFill/>
@@ -12063,8 +12766,8 @@
         </p:nvSpPr>
         <p:spPr>
           <a:xfrm>
-            <a:off x="914400" y="2322576"/>
-            <a:ext cx="10378440" cy="1115568"/>
+            <a:off x="914400" y="2432304"/>
+            <a:ext cx="10378440" cy="932688"/>
           </a:xfrm>
           <a:prstGeom prst="rect">
             <a:avLst/>
@@ -12083,13 +12786,13 @@
               </a:spcAft>
             </a:pPr>
             <a:r>
-              <a:rPr sz="1000" b="1">
-                <a:solidFill>
-                  <a:srgbClr val="C25A1E"/>
-                </a:solidFill>
-                <a:latin typeface="Segoe UI"/>
-              </a:rPr>
-              <a:t>⚠ CẦN SỐ LIỆU THẬT</a:t>
+              <a:rPr sz="1500" b="1">
+                <a:solidFill>
+                  <a:srgbClr val="0D3158"/>
+                </a:solidFill>
+                <a:latin typeface="Segoe UI"/>
+              </a:rPr>
+              <a:t>Dữ liệu thủ tục có kỷ luật nguồn</a:t>
             </a:r>
           </a:p>
           <a:p>
@@ -12101,11 +12804,11 @@
             <a:r>
               <a:rPr sz="1200" b="0">
                 <a:solidFill>
-                  <a:srgbClr val="1B2A3D"/>
-                </a:solidFill>
-                <a:latin typeface="Segoe UI"/>
-              </a:rPr>
-              <a:t>TAM / SAM / SOM. Gợi ý nguồn công khai để lấy số: số đơn vị hành chính cấp xã sau sáp nhập; tổng số hồ sơ TTHC tiếp nhận/năm trên Cổng Dịch vụ công Quốc gia; ngân sách chuyển đổi số cấp tỉnh.</a:t>
+                  <a:srgbClr val="5B7085"/>
+                </a:solidFill>
+                <a:latin typeface="Segoe UI"/>
+              </a:rPr>
+              <a:t>Không phải bộ prompt. Là danh mục thủ tục chuẩn hoá, mỗi mục truy vết được về văn bản công bố, có quy trình đồng bộ khi nguồn đổi.</a:t>
             </a:r>
           </a:p>
         </p:txBody>
@@ -12118,14 +12821,14 @@
         </p:nvSpPr>
         <p:spPr>
           <a:xfrm>
-            <a:off x="685800" y="3703320"/>
-            <a:ext cx="5303520" cy="1371600"/>
+            <a:off x="685800" y="3657600"/>
+            <a:ext cx="10789920" cy="1207008"/>
           </a:xfrm>
           <a:prstGeom prst="rect">
             <a:avLst/>
           </a:prstGeom>
           <a:solidFill>
-            <a:srgbClr val="FDF1E7"/>
+            <a:srgbClr val="FFFFFF"/>
           </a:solidFill>
           <a:ln>
             <a:noFill/>
@@ -12162,14 +12865,14 @@
         </p:nvSpPr>
         <p:spPr>
           <a:xfrm>
-            <a:off x="685800" y="3703320"/>
-            <a:ext cx="50292" cy="1371600"/>
+            <a:off x="685800" y="3657600"/>
+            <a:ext cx="50292" cy="1207008"/>
           </a:xfrm>
           <a:prstGeom prst="rect">
             <a:avLst/>
           </a:prstGeom>
           <a:solidFill>
-            <a:srgbClr val="C25A1E"/>
+            <a:srgbClr val="176FA6"/>
           </a:solidFill>
           <a:ln>
             <a:noFill/>
@@ -12206,8 +12909,8 @@
         </p:nvSpPr>
         <p:spPr>
           <a:xfrm>
-            <a:off x="914400" y="3831335"/>
-            <a:ext cx="4892040" cy="1115568"/>
+            <a:off x="914400" y="3803904"/>
+            <a:ext cx="10378440" cy="932688"/>
           </a:xfrm>
           <a:prstGeom prst="rect">
             <a:avLst/>
@@ -12226,13 +12929,13 @@
               </a:spcAft>
             </a:pPr>
             <a:r>
-              <a:rPr sz="1000" b="1">
-                <a:solidFill>
-                  <a:srgbClr val="C25A1E"/>
-                </a:solidFill>
-                <a:latin typeface="Segoe UI"/>
-              </a:rPr>
-              <a:t>⚠ CẦN SỐ LIỆU THẬT</a:t>
+              <a:rPr sz="1500" b="1">
+                <a:solidFill>
+                  <a:srgbClr val="0D3158"/>
+                </a:solidFill>
+                <a:latin typeface="Segoe UI"/>
+              </a:rPr>
+              <a:t>Tách bạch AI và luật</a:t>
             </a:r>
           </a:p>
           <a:p>
@@ -12244,11 +12947,11 @@
             <a:r>
               <a:rPr sz="1200" b="0">
                 <a:solidFill>
-                  <a:srgbClr val="1B2A3D"/>
-                </a:solidFill>
-                <a:latin typeface="Segoe UI"/>
-              </a:rPr>
-              <a:t>Vì sao là LÚC NÀY: chính sách chuyển đổi số, phân cấp về cấp xã, dữ liệu dân cư đã liên thông.</a:t>
+                  <a:srgbClr val="5B7085"/>
+                </a:solidFill>
+                <a:latin typeface="Segoe UI"/>
+              </a:rPr>
+              <a:t>Luật kiểm tra viết dưới dạng khai báo, tách khỏi mô hình. Thêm thủ tục mới không cần huấn luyện lại, và không làm AI 'chế' ra quy định.</a:t>
             </a:r>
           </a:p>
         </p:txBody>
@@ -12261,14 +12964,14 @@
         </p:nvSpPr>
         <p:spPr>
           <a:xfrm>
-            <a:off x="6172200" y="3703320"/>
-            <a:ext cx="5303520" cy="1371600"/>
+            <a:off x="685800" y="5029200"/>
+            <a:ext cx="10789920" cy="1207008"/>
           </a:xfrm>
           <a:prstGeom prst="rect">
             <a:avLst/>
           </a:prstGeom>
           <a:solidFill>
-            <a:srgbClr val="FDF1E7"/>
+            <a:srgbClr val="FFFFFF"/>
           </a:solidFill>
           <a:ln>
             <a:noFill/>
@@ -12305,14 +13008,14 @@
         </p:nvSpPr>
         <p:spPr>
           <a:xfrm>
-            <a:off x="6172200" y="3703320"/>
-            <a:ext cx="50292" cy="1371600"/>
+            <a:off x="685800" y="5029200"/>
+            <a:ext cx="50292" cy="1207008"/>
           </a:xfrm>
           <a:prstGeom prst="rect">
             <a:avLst/>
           </a:prstGeom>
           <a:solidFill>
-            <a:srgbClr val="C25A1E"/>
+            <a:srgbClr val="176FA6"/>
           </a:solidFill>
           <a:ln>
             <a:noFill/>
@@ -12349,8 +13052,8 @@
         </p:nvSpPr>
         <p:spPr>
           <a:xfrm>
-            <a:off x="6400800" y="3831335"/>
-            <a:ext cx="4892040" cy="1115568"/>
+            <a:off x="914400" y="5175504"/>
+            <a:ext cx="10378440" cy="932688"/>
           </a:xfrm>
           <a:prstGeom prst="rect">
             <a:avLst/>
@@ -12369,13 +13072,13 @@
               </a:spcAft>
             </a:pPr>
             <a:r>
-              <a:rPr sz="1000" b="1">
-                <a:solidFill>
-                  <a:srgbClr val="C25A1E"/>
-                </a:solidFill>
-                <a:latin typeface="Segoe UI"/>
-              </a:rPr>
-              <a:t>⚠ CẦN SỐ LIỆU THẬT</a:t>
+              <a:rPr sz="1500" b="1">
+                <a:solidFill>
+                  <a:srgbClr val="0D3158"/>
+                </a:solidFill>
+                <a:latin typeface="Segoe UI"/>
+              </a:rPr>
+              <a:t>Vòng phản hồi từ cán bộ</a:t>
             </a:r>
           </a:p>
           <a:p>
@@ -12387,11 +13090,11 @@
             <a:r>
               <a:rPr sz="1200" b="0">
                 <a:solidFill>
-                  <a:srgbClr val="1B2A3D"/>
-                </a:solidFill>
-                <a:latin typeface="Segoe UI"/>
-              </a:rPr>
-              <a:t>Đã có xã/phường nào đồng ý thử? Tên đơn vị + người liên hệ có sức nặng hơn mọi con số ước lượng.</a:t>
+                  <a:srgbClr val="5B7085"/>
+                </a:solidFill>
+                <a:latin typeface="Segoe UI"/>
+              </a:rPr>
+              <a:t>Mỗi lần cán bộ sửa kết quả AI là một nhãn dữ liệu. Càng dùng, checklist càng khớp thực tế địa phương.</a:t>
             </a:r>
           </a:p>
         </p:txBody>
@@ -12404,8 +13107,8 @@
         </p:nvSpPr>
         <p:spPr>
           <a:xfrm>
-            <a:off x="685800" y="5303520"/>
-            <a:ext cx="10789920" cy="822960"/>
+            <a:off x="685800" y="5669280"/>
+            <a:ext cx="10789920" cy="640080"/>
           </a:xfrm>
           <a:prstGeom prst="rect">
             <a:avLst/>
@@ -12424,13 +13127,13 @@
               </a:spcAft>
             </a:pPr>
             <a:r>
-              <a:rPr sz="1300" b="1">
-                <a:solidFill>
-                  <a:srgbClr val="C25A1E"/>
-                </a:solidFill>
-                <a:latin typeface="Segoe UI"/>
-              </a:rPr>
-              <a:t>Tài liệu pitching nhấn: “Nếu dùng số liệu cụ thể, phải luôn có nguồn xác thực.” Ba ô trên để trống có chủ đích — điền bằng số thật, đừng điền bằng số đoán.</a:t>
+              <a:rPr sz="1500" b="1">
+                <a:solidFill>
+                  <a:srgbClr val="0D3158"/>
+                </a:solidFill>
+                <a:latin typeface="Segoe UI"/>
+              </a:rPr>
+              <a:t>Đối thủ dựng được con chatbot trong một tuần. Dựng được lớp truy vết nguồn thì không.</a:t>
             </a:r>
           </a:p>
         </p:txBody>

--- a/docs/UBNDAI-pitch-deck.pptx
+++ b/docs/UBNDAI-pitch-deck.pptx
@@ -4,24 +4,27 @@
   <p:sldMasterIdLst>
     <p:sldMasterId id="2147483648" r:id="rId1"/>
   </p:sldMasterIdLst>
+  <p:notesMasterIdLst>
+    <p:notesMasterId r:id="rId17"/>
+  </p:notesMasterIdLst>
   <p:sldIdLst>
-    <p:sldId id="256" r:id="rId7"/>
-    <p:sldId id="257" r:id="rId9"/>
-    <p:sldId id="258" r:id="rId10"/>
-    <p:sldId id="259" r:id="rId11"/>
-    <p:sldId id="260" r:id="rId12"/>
-    <p:sldId id="261" r:id="rId13"/>
-    <p:sldId id="262" r:id="rId14"/>
-    <p:sldId id="263" r:id="rId15"/>
-    <p:sldId id="264" r:id="rId16"/>
-    <p:sldId id="265" r:id="rId17"/>
-    <p:sldId id="266" r:id="rId18"/>
-    <p:sldId id="267" r:id="rId19"/>
-    <p:sldId id="268" r:id="rId20"/>
-    <p:sldId id="269" r:id="rId21"/>
-    <p:sldId id="270" r:id="rId22"/>
+    <p:sldId id="256" r:id="rId2"/>
+    <p:sldId id="257" r:id="rId3"/>
+    <p:sldId id="258" r:id="rId4"/>
+    <p:sldId id="259" r:id="rId5"/>
+    <p:sldId id="260" r:id="rId6"/>
+    <p:sldId id="261" r:id="rId7"/>
+    <p:sldId id="262" r:id="rId8"/>
+    <p:sldId id="263" r:id="rId9"/>
+    <p:sldId id="264" r:id="rId10"/>
+    <p:sldId id="265" r:id="rId11"/>
+    <p:sldId id="266" r:id="rId12"/>
+    <p:sldId id="267" r:id="rId13"/>
+    <p:sldId id="268" r:id="rId14"/>
+    <p:sldId id="269" r:id="rId15"/>
+    <p:sldId id="270" r:id="rId16"/>
   </p:sldIdLst>
-  <p:sldSz cx="12191695" cy="6858000" type="screen4x3"/>
+  <p:sldSz cx="12192000" cy="6858000"/>
   <p:notesSz cx="6858000" cy="9144000"/>
   <p:defaultTextStyle>
     <a:defPPr>
@@ -118,11 +121,27 @@
       </a:defRPr>
     </a:lvl9pPr>
   </p:defaultTextStyle>
+  <p:extLst>
+    <p:ext uri="{EFAFB233-063F-42B5-8137-9DF3F51BA10A}">
+      <p15:sldGuideLst xmlns:p15="http://schemas.microsoft.com/office/powerpoint/2012/main">
+        <p15:guide id="1" orient="horz" pos="2160">
+          <p15:clr>
+            <a:srgbClr val="A4A3A4"/>
+          </p15:clr>
+        </p15:guide>
+        <p15:guide id="2" pos="2880">
+          <p15:clr>
+            <a:srgbClr val="A4A3A4"/>
+          </p15:clr>
+        </p15:guide>
+      </p15:sldGuideLst>
+    </p:ext>
+  </p:extLst>
 </p:presentation>
 </file>
 
 <file path=ppt/notesMasters/notesMaster1.xml><?xml version="1.0" encoding="utf-8"?>
-<p:notesMaster xmlns:a="http://schemas.openxmlformats.org/drawingml/2006/main" xmlns:p="http://schemas.openxmlformats.org/presentationml/2006/main" xmlns:r="http://schemas.openxmlformats.org/officeDocument/2006/relationships">
+<p:notesMaster xmlns:a="http://schemas.openxmlformats.org/drawingml/2006/main" xmlns:r="http://schemas.openxmlformats.org/officeDocument/2006/relationships" xmlns:p="http://schemas.openxmlformats.org/presentationml/2006/main">
   <p:cSld>
     <p:bg>
       <p:bgRef idx="1001">
@@ -143,241 +162,16 @@
           <a:chExt cx="0" cy="0"/>
         </a:xfrm>
       </p:grpSpPr>
-      <p:sp>
-        <p:nvSpPr>
-          <p:cNvPr id="2" name="Header Placeholder 1"/>
-          <p:cNvSpPr>
-            <a:spLocks noGrp="1"/>
-          </p:cNvSpPr>
-          <p:nvPr>
-            <p:ph type="hdr" sz="quarter"/>
-          </p:nvPr>
-        </p:nvSpPr>
-        <p:spPr>
-          <a:xfrm>
-            <a:off x="0" y="0"/>
-            <a:ext cx="2971800" cy="457200"/>
-          </a:xfrm>
-          <a:prstGeom prst="rect">
-            <a:avLst/>
-          </a:prstGeom>
-        </p:spPr>
-        <p:txBody>
-          <a:bodyPr vert="horz" lIns="91440" tIns="45720" rIns="91440" bIns="45720" rtlCol="0"/>
-          <a:lstStyle>
-            <a:lvl1pPr algn="l">
-              <a:defRPr sz="1200"/>
-            </a:lvl1pPr>
-          </a:lstStyle>
-          <a:p>
-            <a:endParaRPr lang="en-US"/>
-          </a:p>
-        </p:txBody>
-      </p:sp>
-      <p:sp>
-        <p:nvSpPr>
-          <p:cNvPr id="3" name="Date Placeholder 2"/>
-          <p:cNvSpPr>
-            <a:spLocks noGrp="1"/>
-          </p:cNvSpPr>
-          <p:nvPr>
-            <p:ph type="dt" idx="1"/>
-          </p:nvPr>
-        </p:nvSpPr>
-        <p:spPr>
-          <a:xfrm>
-            <a:off x="3884613" y="0"/>
-            <a:ext cx="2971800" cy="457200"/>
-          </a:xfrm>
-          <a:prstGeom prst="rect">
-            <a:avLst/>
-          </a:prstGeom>
-        </p:spPr>
-        <p:txBody>
-          <a:bodyPr vert="horz" lIns="91440" tIns="45720" rIns="91440" bIns="45720" rtlCol="0"/>
-          <a:lstStyle>
-            <a:lvl1pPr algn="r">
-              <a:defRPr sz="1200"/>
-            </a:lvl1pPr>
-          </a:lstStyle>
-          <a:p>
-            <a:fld id="{0F89C1C7-3DCD-1040-A9CF-14679D8B5DDD}" type="datetimeFigureOut">
-              <a:rPr lang="en-US" smtClean="0"/>
-              <a:t>10/17/16</a:t>
-            </a:fld>
-            <a:endParaRPr lang="en-US"/>
-          </a:p>
-        </p:txBody>
-      </p:sp>
-      <p:sp>
-        <p:nvSpPr>
-          <p:cNvPr id="4" name="Slide Image Placeholder 3"/>
-          <p:cNvSpPr>
-            <a:spLocks noGrp="1" noRot="1" noChangeAspect="1"/>
-          </p:cNvSpPr>
-          <p:nvPr>
-            <p:ph type="sldImg" idx="2"/>
-          </p:nvPr>
-        </p:nvSpPr>
-        <p:spPr>
-          <a:xfrm>
-            <a:off x="1143000" y="685800"/>
-            <a:ext cx="4572000" cy="3429000"/>
-          </a:xfrm>
-          <a:prstGeom prst="rect">
-            <a:avLst/>
-          </a:prstGeom>
-          <a:noFill/>
-          <a:ln w="12700">
-            <a:solidFill>
-              <a:prstClr val="black"/>
-            </a:solidFill>
-          </a:ln>
-        </p:spPr>
-        <p:txBody>
-          <a:bodyPr vert="horz" lIns="91440" tIns="45720" rIns="91440" bIns="45720" rtlCol="0" anchor="ctr"/>
-          <a:lstStyle/>
-          <a:p>
-            <a:endParaRPr lang="en-US"/>
-          </a:p>
-        </p:txBody>
-      </p:sp>
-      <p:sp>
-        <p:nvSpPr>
-          <p:cNvPr id="5" name="Notes Placeholder 4"/>
-          <p:cNvSpPr>
-            <a:spLocks noGrp="1"/>
-          </p:cNvSpPr>
-          <p:nvPr>
-            <p:ph type="body" sz="quarter" idx="3"/>
-          </p:nvPr>
-        </p:nvSpPr>
-        <p:spPr>
-          <a:xfrm>
-            <a:off x="685800" y="4343400"/>
-            <a:ext cx="5486400" cy="4114800"/>
-          </a:xfrm>
-          <a:prstGeom prst="rect">
-            <a:avLst/>
-          </a:prstGeom>
-        </p:spPr>
-        <p:txBody>
-          <a:bodyPr vert="horz" lIns="91440" tIns="45720" rIns="91440" bIns="45720" rtlCol="0"/>
-          <a:lstStyle/>
-          <a:p>
-            <a:pPr lvl="0"/>
-            <a:r>
-              <a:rPr lang="en-US" smtClean="0"/>
-              <a:t>Click to edit Master text styles</a:t>
-            </a:r>
-          </a:p>
-          <a:p>
-            <a:pPr lvl="1"/>
-            <a:r>
-              <a:rPr lang="en-US" smtClean="0"/>
-              <a:t>Second level</a:t>
-            </a:r>
-          </a:p>
-          <a:p>
-            <a:pPr lvl="2"/>
-            <a:r>
-              <a:rPr lang="en-US" smtClean="0"/>
-              <a:t>Third level</a:t>
-            </a:r>
-          </a:p>
-          <a:p>
-            <a:pPr lvl="3"/>
-            <a:r>
-              <a:rPr lang="en-US" smtClean="0"/>
-              <a:t>Fourth level</a:t>
-            </a:r>
-          </a:p>
-          <a:p>
-            <a:pPr lvl="4"/>
-            <a:r>
-              <a:rPr lang="en-US" smtClean="0"/>
-              <a:t>Fifth level</a:t>
-            </a:r>
-            <a:endParaRPr lang="en-US"/>
-          </a:p>
-        </p:txBody>
-      </p:sp>
-      <p:sp>
-        <p:nvSpPr>
-          <p:cNvPr id="6" name="Footer Placeholder 5"/>
-          <p:cNvSpPr>
-            <a:spLocks noGrp="1"/>
-          </p:cNvSpPr>
-          <p:nvPr>
-            <p:ph type="ftr" sz="quarter" idx="4"/>
-          </p:nvPr>
-        </p:nvSpPr>
-        <p:spPr>
-          <a:xfrm>
-            <a:off x="0" y="8685213"/>
-            <a:ext cx="2971800" cy="457200"/>
-          </a:xfrm>
-          <a:prstGeom prst="rect">
-            <a:avLst/>
-          </a:prstGeom>
-        </p:spPr>
-        <p:txBody>
-          <a:bodyPr vert="horz" lIns="91440" tIns="45720" rIns="91440" bIns="45720" rtlCol="0" anchor="b"/>
-          <a:lstStyle>
-            <a:lvl1pPr algn="l">
-              <a:defRPr sz="1200"/>
-            </a:lvl1pPr>
-          </a:lstStyle>
-          <a:p>
-            <a:endParaRPr lang="en-US"/>
-          </a:p>
-        </p:txBody>
-      </p:sp>
-      <p:sp>
-        <p:nvSpPr>
-          <p:cNvPr id="7" name="Slide Number Placeholder 6"/>
-          <p:cNvSpPr>
-            <a:spLocks noGrp="1"/>
-          </p:cNvSpPr>
-          <p:nvPr>
-            <p:ph type="sldNum" sz="quarter" idx="5"/>
-          </p:nvPr>
-        </p:nvSpPr>
-        <p:spPr>
-          <a:xfrm>
-            <a:off x="3884613" y="8685213"/>
-            <a:ext cx="2971800" cy="457200"/>
-          </a:xfrm>
-          <a:prstGeom prst="rect">
-            <a:avLst/>
-          </a:prstGeom>
-        </p:spPr>
-        <p:txBody>
-          <a:bodyPr vert="horz" lIns="91440" tIns="45720" rIns="91440" bIns="45720" rtlCol="0" anchor="b"/>
-          <a:lstStyle>
-            <a:lvl1pPr algn="r">
-              <a:defRPr sz="1200"/>
-            </a:lvl1pPr>
-          </a:lstStyle>
-          <a:p>
-            <a:fld id="{BB5E49A5-4136-284D-997B-48E1D791AD67}" type="slidenum">
-              <a:rPr lang="en-US" smtClean="0"/>
-              <a:t>‹#›</a:t>
-            </a:fld>
-            <a:endParaRPr lang="en-US"/>
-          </a:p>
-        </p:txBody>
-      </p:sp>
     </p:spTree>
     <p:extLst>
       <p:ext uri="{BB962C8B-B14F-4D97-AF65-F5344CB8AC3E}">
-        <p14:creationId xmlns:p14="http://schemas.microsoft.com/office/powerpoint/2010/main" val="2623252185"/>
+        <p14:creationId xmlns:p14="http://schemas.microsoft.com/office/powerpoint/2010/main" val="35193229"/>
       </p:ext>
     </p:extLst>
   </p:cSld>
   <p:clrMap bg1="lt1" tx1="dk1" bg2="lt2" tx2="dk2" accent1="accent1" accent2="accent2" accent3="accent3" accent4="accent4" accent5="accent5" accent6="accent6" hlink="hlink" folHlink="folHlink"/>
   <p:notesStyle>
-    <a:lvl1pPr marL="0" algn="l" defTabSz="457200" rtl="0" eaLnBrk="1" latinLnBrk="0" hangingPunct="1">
+    <a:lvl1pPr marL="0" algn="l" defTabSz="914400" rtl="0" eaLnBrk="1" latinLnBrk="0" hangingPunct="1">
       <a:defRPr sz="1200" kern="1200">
         <a:solidFill>
           <a:schemeClr val="tx1"/>
@@ -387,7 +181,7 @@
         <a:cs typeface="+mn-cs"/>
       </a:defRPr>
     </a:lvl1pPr>
-    <a:lvl2pPr marL="457200" algn="l" defTabSz="457200" rtl="0" eaLnBrk="1" latinLnBrk="0" hangingPunct="1">
+    <a:lvl2pPr marL="457200" algn="l" defTabSz="914400" rtl="0" eaLnBrk="1" latinLnBrk="0" hangingPunct="1">
       <a:defRPr sz="1200" kern="1200">
         <a:solidFill>
           <a:schemeClr val="tx1"/>
@@ -397,7 +191,7 @@
         <a:cs typeface="+mn-cs"/>
       </a:defRPr>
     </a:lvl2pPr>
-    <a:lvl3pPr marL="914400" algn="l" defTabSz="457200" rtl="0" eaLnBrk="1" latinLnBrk="0" hangingPunct="1">
+    <a:lvl3pPr marL="914400" algn="l" defTabSz="914400" rtl="0" eaLnBrk="1" latinLnBrk="0" hangingPunct="1">
       <a:defRPr sz="1200" kern="1200">
         <a:solidFill>
           <a:schemeClr val="tx1"/>
@@ -407,7 +201,7 @@
         <a:cs typeface="+mn-cs"/>
       </a:defRPr>
     </a:lvl3pPr>
-    <a:lvl4pPr marL="1371600" algn="l" defTabSz="457200" rtl="0" eaLnBrk="1" latinLnBrk="0" hangingPunct="1">
+    <a:lvl4pPr marL="1371600" algn="l" defTabSz="914400" rtl="0" eaLnBrk="1" latinLnBrk="0" hangingPunct="1">
       <a:defRPr sz="1200" kern="1200">
         <a:solidFill>
           <a:schemeClr val="tx1"/>
@@ -417,7 +211,7 @@
         <a:cs typeface="+mn-cs"/>
       </a:defRPr>
     </a:lvl4pPr>
-    <a:lvl5pPr marL="1828800" algn="l" defTabSz="457200" rtl="0" eaLnBrk="1" latinLnBrk="0" hangingPunct="1">
+    <a:lvl5pPr marL="1828800" algn="l" defTabSz="914400" rtl="0" eaLnBrk="1" latinLnBrk="0" hangingPunct="1">
       <a:defRPr sz="1200" kern="1200">
         <a:solidFill>
           <a:schemeClr val="tx1"/>
@@ -427,7 +221,7 @@
         <a:cs typeface="+mn-cs"/>
       </a:defRPr>
     </a:lvl5pPr>
-    <a:lvl6pPr marL="2286000" algn="l" defTabSz="457200" rtl="0" eaLnBrk="1" latinLnBrk="0" hangingPunct="1">
+    <a:lvl6pPr marL="2286000" algn="l" defTabSz="914400" rtl="0" eaLnBrk="1" latinLnBrk="0" hangingPunct="1">
       <a:defRPr sz="1200" kern="1200">
         <a:solidFill>
           <a:schemeClr val="tx1"/>
@@ -437,7 +231,7 @@
         <a:cs typeface="+mn-cs"/>
       </a:defRPr>
     </a:lvl6pPr>
-    <a:lvl7pPr marL="2743200" algn="l" defTabSz="457200" rtl="0" eaLnBrk="1" latinLnBrk="0" hangingPunct="1">
+    <a:lvl7pPr marL="2743200" algn="l" defTabSz="914400" rtl="0" eaLnBrk="1" latinLnBrk="0" hangingPunct="1">
       <a:defRPr sz="1200" kern="1200">
         <a:solidFill>
           <a:schemeClr val="tx1"/>
@@ -447,7 +241,7 @@
         <a:cs typeface="+mn-cs"/>
       </a:defRPr>
     </a:lvl7pPr>
-    <a:lvl8pPr marL="3200400" algn="l" defTabSz="457200" rtl="0" eaLnBrk="1" latinLnBrk="0" hangingPunct="1">
+    <a:lvl8pPr marL="3200400" algn="l" defTabSz="914400" rtl="0" eaLnBrk="1" latinLnBrk="0" hangingPunct="1">
       <a:defRPr sz="1200" kern="1200">
         <a:solidFill>
           <a:schemeClr val="tx1"/>
@@ -457,7 +251,7 @@
         <a:cs typeface="+mn-cs"/>
       </a:defRPr>
     </a:lvl8pPr>
-    <a:lvl9pPr marL="3657600" algn="l" defTabSz="457200" rtl="0" eaLnBrk="1" latinLnBrk="0" hangingPunct="1">
+    <a:lvl9pPr marL="3657600" algn="l" defTabSz="914400" rtl="0" eaLnBrk="1" latinLnBrk="0" hangingPunct="1">
       <a:defRPr sz="1200" kern="1200">
         <a:solidFill>
           <a:schemeClr val="tx1"/>
@@ -472,7 +266,7 @@
 </file>
 
 <file path=ppt/notesSlides/notesSlide1.xml><?xml version="1.0" encoding="utf-8"?>
-<p:notes xmlns:a="http://schemas.openxmlformats.org/drawingml/2006/main" xmlns:p="http://schemas.openxmlformats.org/presentationml/2006/main" xmlns:r="http://schemas.openxmlformats.org/officeDocument/2006/relationships">
+<p:notes xmlns:a="http://schemas.openxmlformats.org/drawingml/2006/main" xmlns:r="http://schemas.openxmlformats.org/officeDocument/2006/relationships" xmlns:p="http://schemas.openxmlformats.org/presentationml/2006/main">
   <p:cSld>
     <p:spTree>
       <p:nvGrpSpPr>
@@ -492,7 +286,7 @@
         <p:nvSpPr>
           <p:cNvPr id="2" name="Slide Image Placeholder 1"/>
           <p:cNvSpPr>
-            <a:spLocks noGrp="1"/>
+            <a:spLocks noGrp="1" noRot="1" noChangeAspect="1"/>
           </p:cNvSpPr>
           <p:nvPr>
             <p:ph type="sldImg" idx="2"/>
@@ -507,7 +301,7 @@
             <a:spLocks noGrp="1"/>
           </p:cNvSpPr>
           <p:nvPr>
-            <p:ph type="body" idx="3" sz="quarter"/>
+            <p:ph type="body" sz="quarter" idx="3"/>
           </p:nvPr>
         </p:nvSpPr>
         <p:spPr/>
@@ -528,7 +322,7 @@
             <a:spLocks noGrp="1"/>
           </p:cNvSpPr>
           <p:nvPr>
-            <p:ph type="sldNum" idx="5" sz="quarter"/>
+            <p:ph type="sldNum" sz="quarter" idx="5"/>
           </p:nvPr>
         </p:nvSpPr>
         <p:spPr/>
@@ -542,7 +336,7 @@
 </file>
 
 <file path=ppt/notesSlides/notesSlide10.xml><?xml version="1.0" encoding="utf-8"?>
-<p:notes xmlns:a="http://schemas.openxmlformats.org/drawingml/2006/main" xmlns:p="http://schemas.openxmlformats.org/presentationml/2006/main" xmlns:r="http://schemas.openxmlformats.org/officeDocument/2006/relationships">
+<p:notes xmlns:a="http://schemas.openxmlformats.org/drawingml/2006/main" xmlns:r="http://schemas.openxmlformats.org/officeDocument/2006/relationships" xmlns:p="http://schemas.openxmlformats.org/presentationml/2006/main">
   <p:cSld>
     <p:spTree>
       <p:nvGrpSpPr>
@@ -562,7 +356,7 @@
         <p:nvSpPr>
           <p:cNvPr id="2" name="Slide Image Placeholder 1"/>
           <p:cNvSpPr>
-            <a:spLocks noGrp="1"/>
+            <a:spLocks noGrp="1" noRot="1" noChangeAspect="1"/>
           </p:cNvSpPr>
           <p:nvPr>
             <p:ph type="sldImg" idx="2"/>
@@ -577,7 +371,7 @@
             <a:spLocks noGrp="1"/>
           </p:cNvSpPr>
           <p:nvPr>
-            <p:ph type="body" idx="3" sz="quarter"/>
+            <p:ph type="body" sz="quarter" idx="3"/>
           </p:nvPr>
         </p:nvSpPr>
         <p:spPr/>
@@ -598,7 +392,7 @@
             <a:spLocks noGrp="1"/>
           </p:cNvSpPr>
           <p:nvPr>
-            <p:ph type="sldNum" idx="5" sz="quarter"/>
+            <p:ph type="sldNum" sz="quarter" idx="5"/>
           </p:nvPr>
         </p:nvSpPr>
         <p:spPr/>
@@ -612,7 +406,7 @@
 </file>
 
 <file path=ppt/notesSlides/notesSlide11.xml><?xml version="1.0" encoding="utf-8"?>
-<p:notes xmlns:a="http://schemas.openxmlformats.org/drawingml/2006/main" xmlns:p="http://schemas.openxmlformats.org/presentationml/2006/main" xmlns:r="http://schemas.openxmlformats.org/officeDocument/2006/relationships">
+<p:notes xmlns:a="http://schemas.openxmlformats.org/drawingml/2006/main" xmlns:r="http://schemas.openxmlformats.org/officeDocument/2006/relationships" xmlns:p="http://schemas.openxmlformats.org/presentationml/2006/main">
   <p:cSld>
     <p:spTree>
       <p:nvGrpSpPr>
@@ -632,7 +426,7 @@
         <p:nvSpPr>
           <p:cNvPr id="2" name="Slide Image Placeholder 1"/>
           <p:cNvSpPr>
-            <a:spLocks noGrp="1"/>
+            <a:spLocks noGrp="1" noRot="1" noChangeAspect="1"/>
           </p:cNvSpPr>
           <p:nvPr>
             <p:ph type="sldImg" idx="2"/>
@@ -647,7 +441,7 @@
             <a:spLocks noGrp="1"/>
           </p:cNvSpPr>
           <p:nvPr>
-            <p:ph type="body" idx="3" sz="quarter"/>
+            <p:ph type="body" sz="quarter" idx="3"/>
           </p:nvPr>
         </p:nvSpPr>
         <p:spPr/>
@@ -668,7 +462,7 @@
             <a:spLocks noGrp="1"/>
           </p:cNvSpPr>
           <p:nvPr>
-            <p:ph type="sldNum" idx="5" sz="quarter"/>
+            <p:ph type="sldNum" sz="quarter" idx="5"/>
           </p:nvPr>
         </p:nvSpPr>
         <p:spPr/>
@@ -682,7 +476,7 @@
 </file>
 
 <file path=ppt/notesSlides/notesSlide12.xml><?xml version="1.0" encoding="utf-8"?>
-<p:notes xmlns:a="http://schemas.openxmlformats.org/drawingml/2006/main" xmlns:p="http://schemas.openxmlformats.org/presentationml/2006/main" xmlns:r="http://schemas.openxmlformats.org/officeDocument/2006/relationships">
+<p:notes xmlns:a="http://schemas.openxmlformats.org/drawingml/2006/main" xmlns:r="http://schemas.openxmlformats.org/officeDocument/2006/relationships" xmlns:p="http://schemas.openxmlformats.org/presentationml/2006/main">
   <p:cSld>
     <p:spTree>
       <p:nvGrpSpPr>
@@ -702,7 +496,7 @@
         <p:nvSpPr>
           <p:cNvPr id="2" name="Slide Image Placeholder 1"/>
           <p:cNvSpPr>
-            <a:spLocks noGrp="1"/>
+            <a:spLocks noGrp="1" noRot="1" noChangeAspect="1"/>
           </p:cNvSpPr>
           <p:nvPr>
             <p:ph type="sldImg" idx="2"/>
@@ -717,7 +511,7 @@
             <a:spLocks noGrp="1"/>
           </p:cNvSpPr>
           <p:nvPr>
-            <p:ph type="body" idx="3" sz="quarter"/>
+            <p:ph type="body" sz="quarter" idx="3"/>
           </p:nvPr>
         </p:nvSpPr>
         <p:spPr/>
@@ -738,7 +532,7 @@
             <a:spLocks noGrp="1"/>
           </p:cNvSpPr>
           <p:nvPr>
-            <p:ph type="sldNum" idx="5" sz="quarter"/>
+            <p:ph type="sldNum" sz="quarter" idx="5"/>
           </p:nvPr>
         </p:nvSpPr>
         <p:spPr/>
@@ -752,7 +546,7 @@
 </file>
 
 <file path=ppt/notesSlides/notesSlide13.xml><?xml version="1.0" encoding="utf-8"?>
-<p:notes xmlns:a="http://schemas.openxmlformats.org/drawingml/2006/main" xmlns:p="http://schemas.openxmlformats.org/presentationml/2006/main" xmlns:r="http://schemas.openxmlformats.org/officeDocument/2006/relationships">
+<p:notes xmlns:a="http://schemas.openxmlformats.org/drawingml/2006/main" xmlns:r="http://schemas.openxmlformats.org/officeDocument/2006/relationships" xmlns:p="http://schemas.openxmlformats.org/presentationml/2006/main">
   <p:cSld>
     <p:spTree>
       <p:nvGrpSpPr>
@@ -772,7 +566,7 @@
         <p:nvSpPr>
           <p:cNvPr id="2" name="Slide Image Placeholder 1"/>
           <p:cNvSpPr>
-            <a:spLocks noGrp="1"/>
+            <a:spLocks noGrp="1" noRot="1" noChangeAspect="1"/>
           </p:cNvSpPr>
           <p:nvPr>
             <p:ph type="sldImg" idx="2"/>
@@ -787,7 +581,7 @@
             <a:spLocks noGrp="1"/>
           </p:cNvSpPr>
           <p:nvPr>
-            <p:ph type="body" idx="3" sz="quarter"/>
+            <p:ph type="body" sz="quarter" idx="3"/>
           </p:nvPr>
         </p:nvSpPr>
         <p:spPr/>
@@ -808,7 +602,7 @@
             <a:spLocks noGrp="1"/>
           </p:cNvSpPr>
           <p:nvPr>
-            <p:ph type="sldNum" idx="5" sz="quarter"/>
+            <p:ph type="sldNum" sz="quarter" idx="5"/>
           </p:nvPr>
         </p:nvSpPr>
         <p:spPr/>
@@ -822,7 +616,7 @@
 </file>
 
 <file path=ppt/notesSlides/notesSlide14.xml><?xml version="1.0" encoding="utf-8"?>
-<p:notes xmlns:a="http://schemas.openxmlformats.org/drawingml/2006/main" xmlns:p="http://schemas.openxmlformats.org/presentationml/2006/main" xmlns:r="http://schemas.openxmlformats.org/officeDocument/2006/relationships">
+<p:notes xmlns:a="http://schemas.openxmlformats.org/drawingml/2006/main" xmlns:r="http://schemas.openxmlformats.org/officeDocument/2006/relationships" xmlns:p="http://schemas.openxmlformats.org/presentationml/2006/main">
   <p:cSld>
     <p:spTree>
       <p:nvGrpSpPr>
@@ -842,7 +636,7 @@
         <p:nvSpPr>
           <p:cNvPr id="2" name="Slide Image Placeholder 1"/>
           <p:cNvSpPr>
-            <a:spLocks noGrp="1"/>
+            <a:spLocks noGrp="1" noRot="1" noChangeAspect="1"/>
           </p:cNvSpPr>
           <p:nvPr>
             <p:ph type="sldImg" idx="2"/>
@@ -857,7 +651,7 @@
             <a:spLocks noGrp="1"/>
           </p:cNvSpPr>
           <p:nvPr>
-            <p:ph type="body" idx="3" sz="quarter"/>
+            <p:ph type="body" sz="quarter" idx="3"/>
           </p:nvPr>
         </p:nvSpPr>
         <p:spPr/>
@@ -878,7 +672,7 @@
             <a:spLocks noGrp="1"/>
           </p:cNvSpPr>
           <p:nvPr>
-            <p:ph type="sldNum" idx="5" sz="quarter"/>
+            <p:ph type="sldNum" sz="quarter" idx="5"/>
           </p:nvPr>
         </p:nvSpPr>
         <p:spPr/>
@@ -892,7 +686,7 @@
 </file>
 
 <file path=ppt/notesSlides/notesSlide15.xml><?xml version="1.0" encoding="utf-8"?>
-<p:notes xmlns:a="http://schemas.openxmlformats.org/drawingml/2006/main" xmlns:p="http://schemas.openxmlformats.org/presentationml/2006/main" xmlns:r="http://schemas.openxmlformats.org/officeDocument/2006/relationships">
+<p:notes xmlns:a="http://schemas.openxmlformats.org/drawingml/2006/main" xmlns:r="http://schemas.openxmlformats.org/officeDocument/2006/relationships" xmlns:p="http://schemas.openxmlformats.org/presentationml/2006/main">
   <p:cSld>
     <p:spTree>
       <p:nvGrpSpPr>
@@ -912,7 +706,7 @@
         <p:nvSpPr>
           <p:cNvPr id="2" name="Slide Image Placeholder 1"/>
           <p:cNvSpPr>
-            <a:spLocks noGrp="1"/>
+            <a:spLocks noGrp="1" noRot="1" noChangeAspect="1"/>
           </p:cNvSpPr>
           <p:nvPr>
             <p:ph type="sldImg" idx="2"/>
@@ -927,7 +721,7 @@
             <a:spLocks noGrp="1"/>
           </p:cNvSpPr>
           <p:nvPr>
-            <p:ph type="body" idx="3" sz="quarter"/>
+            <p:ph type="body" sz="quarter" idx="3"/>
           </p:nvPr>
         </p:nvSpPr>
         <p:spPr/>
@@ -948,7 +742,7 @@
             <a:spLocks noGrp="1"/>
           </p:cNvSpPr>
           <p:nvPr>
-            <p:ph type="sldNum" idx="5" sz="quarter"/>
+            <p:ph type="sldNum" sz="quarter" idx="5"/>
           </p:nvPr>
         </p:nvSpPr>
         <p:spPr/>
@@ -962,7 +756,7 @@
 </file>
 
 <file path=ppt/notesSlides/notesSlide2.xml><?xml version="1.0" encoding="utf-8"?>
-<p:notes xmlns:a="http://schemas.openxmlformats.org/drawingml/2006/main" xmlns:p="http://schemas.openxmlformats.org/presentationml/2006/main" xmlns:r="http://schemas.openxmlformats.org/officeDocument/2006/relationships">
+<p:notes xmlns:a="http://schemas.openxmlformats.org/drawingml/2006/main" xmlns:r="http://schemas.openxmlformats.org/officeDocument/2006/relationships" xmlns:p="http://schemas.openxmlformats.org/presentationml/2006/main">
   <p:cSld>
     <p:spTree>
       <p:nvGrpSpPr>
@@ -982,7 +776,7 @@
         <p:nvSpPr>
           <p:cNvPr id="2" name="Slide Image Placeholder 1"/>
           <p:cNvSpPr>
-            <a:spLocks noGrp="1"/>
+            <a:spLocks noGrp="1" noRot="1" noChangeAspect="1"/>
           </p:cNvSpPr>
           <p:nvPr>
             <p:ph type="sldImg" idx="2"/>
@@ -997,7 +791,7 @@
             <a:spLocks noGrp="1"/>
           </p:cNvSpPr>
           <p:nvPr>
-            <p:ph type="body" idx="3" sz="quarter"/>
+            <p:ph type="body" sz="quarter" idx="3"/>
           </p:nvPr>
         </p:nvSpPr>
         <p:spPr/>
@@ -1018,7 +812,7 @@
             <a:spLocks noGrp="1"/>
           </p:cNvSpPr>
           <p:nvPr>
-            <p:ph type="sldNum" idx="5" sz="quarter"/>
+            <p:ph type="sldNum" sz="quarter" idx="5"/>
           </p:nvPr>
         </p:nvSpPr>
         <p:spPr/>
@@ -1032,7 +826,7 @@
 </file>
 
 <file path=ppt/notesSlides/notesSlide3.xml><?xml version="1.0" encoding="utf-8"?>
-<p:notes xmlns:a="http://schemas.openxmlformats.org/drawingml/2006/main" xmlns:p="http://schemas.openxmlformats.org/presentationml/2006/main" xmlns:r="http://schemas.openxmlformats.org/officeDocument/2006/relationships">
+<p:notes xmlns:a="http://schemas.openxmlformats.org/drawingml/2006/main" xmlns:r="http://schemas.openxmlformats.org/officeDocument/2006/relationships" xmlns:p="http://schemas.openxmlformats.org/presentationml/2006/main">
   <p:cSld>
     <p:spTree>
       <p:nvGrpSpPr>
@@ -1052,7 +846,7 @@
         <p:nvSpPr>
           <p:cNvPr id="2" name="Slide Image Placeholder 1"/>
           <p:cNvSpPr>
-            <a:spLocks noGrp="1"/>
+            <a:spLocks noGrp="1" noRot="1" noChangeAspect="1"/>
           </p:cNvSpPr>
           <p:nvPr>
             <p:ph type="sldImg" idx="2"/>
@@ -1067,7 +861,7 @@
             <a:spLocks noGrp="1"/>
           </p:cNvSpPr>
           <p:nvPr>
-            <p:ph type="body" idx="3" sz="quarter"/>
+            <p:ph type="body" sz="quarter" idx="3"/>
           </p:nvPr>
         </p:nvSpPr>
         <p:spPr/>
@@ -1088,7 +882,7 @@
             <a:spLocks noGrp="1"/>
           </p:cNvSpPr>
           <p:nvPr>
-            <p:ph type="sldNum" idx="5" sz="quarter"/>
+            <p:ph type="sldNum" sz="quarter" idx="5"/>
           </p:nvPr>
         </p:nvSpPr>
         <p:spPr/>
@@ -1102,7 +896,7 @@
 </file>
 
 <file path=ppt/notesSlides/notesSlide4.xml><?xml version="1.0" encoding="utf-8"?>
-<p:notes xmlns:a="http://schemas.openxmlformats.org/drawingml/2006/main" xmlns:p="http://schemas.openxmlformats.org/presentationml/2006/main" xmlns:r="http://schemas.openxmlformats.org/officeDocument/2006/relationships">
+<p:notes xmlns:a="http://schemas.openxmlformats.org/drawingml/2006/main" xmlns:r="http://schemas.openxmlformats.org/officeDocument/2006/relationships" xmlns:p="http://schemas.openxmlformats.org/presentationml/2006/main">
   <p:cSld>
     <p:spTree>
       <p:nvGrpSpPr>
@@ -1122,7 +916,7 @@
         <p:nvSpPr>
           <p:cNvPr id="2" name="Slide Image Placeholder 1"/>
           <p:cNvSpPr>
-            <a:spLocks noGrp="1"/>
+            <a:spLocks noGrp="1" noRot="1" noChangeAspect="1"/>
           </p:cNvSpPr>
           <p:nvPr>
             <p:ph type="sldImg" idx="2"/>
@@ -1137,7 +931,7 @@
             <a:spLocks noGrp="1"/>
           </p:cNvSpPr>
           <p:nvPr>
-            <p:ph type="body" idx="3" sz="quarter"/>
+            <p:ph type="body" sz="quarter" idx="3"/>
           </p:nvPr>
         </p:nvSpPr>
         <p:spPr/>
@@ -1158,7 +952,7 @@
             <a:spLocks noGrp="1"/>
           </p:cNvSpPr>
           <p:nvPr>
-            <p:ph type="sldNum" idx="5" sz="quarter"/>
+            <p:ph type="sldNum" sz="quarter" idx="5"/>
           </p:nvPr>
         </p:nvSpPr>
         <p:spPr/>
@@ -1172,7 +966,7 @@
 </file>
 
 <file path=ppt/notesSlides/notesSlide5.xml><?xml version="1.0" encoding="utf-8"?>
-<p:notes xmlns:a="http://schemas.openxmlformats.org/drawingml/2006/main" xmlns:p="http://schemas.openxmlformats.org/presentationml/2006/main" xmlns:r="http://schemas.openxmlformats.org/officeDocument/2006/relationships">
+<p:notes xmlns:a="http://schemas.openxmlformats.org/drawingml/2006/main" xmlns:r="http://schemas.openxmlformats.org/officeDocument/2006/relationships" xmlns:p="http://schemas.openxmlformats.org/presentationml/2006/main">
   <p:cSld>
     <p:spTree>
       <p:nvGrpSpPr>
@@ -1192,7 +986,7 @@
         <p:nvSpPr>
           <p:cNvPr id="2" name="Slide Image Placeholder 1"/>
           <p:cNvSpPr>
-            <a:spLocks noGrp="1"/>
+            <a:spLocks noGrp="1" noRot="1" noChangeAspect="1"/>
           </p:cNvSpPr>
           <p:nvPr>
             <p:ph type="sldImg" idx="2"/>
@@ -1207,7 +1001,7 @@
             <a:spLocks noGrp="1"/>
           </p:cNvSpPr>
           <p:nvPr>
-            <p:ph type="body" idx="3" sz="quarter"/>
+            <p:ph type="body" sz="quarter" idx="3"/>
           </p:nvPr>
         </p:nvSpPr>
         <p:spPr/>
@@ -1228,7 +1022,7 @@
             <a:spLocks noGrp="1"/>
           </p:cNvSpPr>
           <p:nvPr>
-            <p:ph type="sldNum" idx="5" sz="quarter"/>
+            <p:ph type="sldNum" sz="quarter" idx="5"/>
           </p:nvPr>
         </p:nvSpPr>
         <p:spPr/>
@@ -1242,7 +1036,7 @@
 </file>
 
 <file path=ppt/notesSlides/notesSlide6.xml><?xml version="1.0" encoding="utf-8"?>
-<p:notes xmlns:a="http://schemas.openxmlformats.org/drawingml/2006/main" xmlns:p="http://schemas.openxmlformats.org/presentationml/2006/main" xmlns:r="http://schemas.openxmlformats.org/officeDocument/2006/relationships">
+<p:notes xmlns:a="http://schemas.openxmlformats.org/drawingml/2006/main" xmlns:r="http://schemas.openxmlformats.org/officeDocument/2006/relationships" xmlns:p="http://schemas.openxmlformats.org/presentationml/2006/main">
   <p:cSld>
     <p:spTree>
       <p:nvGrpSpPr>
@@ -1262,7 +1056,7 @@
         <p:nvSpPr>
           <p:cNvPr id="2" name="Slide Image Placeholder 1"/>
           <p:cNvSpPr>
-            <a:spLocks noGrp="1"/>
+            <a:spLocks noGrp="1" noRot="1" noChangeAspect="1"/>
           </p:cNvSpPr>
           <p:nvPr>
             <p:ph type="sldImg" idx="2"/>
@@ -1277,7 +1071,7 @@
             <a:spLocks noGrp="1"/>
           </p:cNvSpPr>
           <p:nvPr>
-            <p:ph type="body" idx="3" sz="quarter"/>
+            <p:ph type="body" sz="quarter" idx="3"/>
           </p:nvPr>
         </p:nvSpPr>
         <p:spPr/>
@@ -1298,7 +1092,7 @@
             <a:spLocks noGrp="1"/>
           </p:cNvSpPr>
           <p:nvPr>
-            <p:ph type="sldNum" idx="5" sz="quarter"/>
+            <p:ph type="sldNum" sz="quarter" idx="5"/>
           </p:nvPr>
         </p:nvSpPr>
         <p:spPr/>
@@ -1312,7 +1106,7 @@
 </file>
 
 <file path=ppt/notesSlides/notesSlide7.xml><?xml version="1.0" encoding="utf-8"?>
-<p:notes xmlns:a="http://schemas.openxmlformats.org/drawingml/2006/main" xmlns:p="http://schemas.openxmlformats.org/presentationml/2006/main" xmlns:r="http://schemas.openxmlformats.org/officeDocument/2006/relationships">
+<p:notes xmlns:a="http://schemas.openxmlformats.org/drawingml/2006/main" xmlns:r="http://schemas.openxmlformats.org/officeDocument/2006/relationships" xmlns:p="http://schemas.openxmlformats.org/presentationml/2006/main">
   <p:cSld>
     <p:spTree>
       <p:nvGrpSpPr>
@@ -1332,7 +1126,7 @@
         <p:nvSpPr>
           <p:cNvPr id="2" name="Slide Image Placeholder 1"/>
           <p:cNvSpPr>
-            <a:spLocks noGrp="1"/>
+            <a:spLocks noGrp="1" noRot="1" noChangeAspect="1"/>
           </p:cNvSpPr>
           <p:nvPr>
             <p:ph type="sldImg" idx="2"/>
@@ -1347,7 +1141,7 @@
             <a:spLocks noGrp="1"/>
           </p:cNvSpPr>
           <p:nvPr>
-            <p:ph type="body" idx="3" sz="quarter"/>
+            <p:ph type="body" sz="quarter" idx="3"/>
           </p:nvPr>
         </p:nvSpPr>
         <p:spPr/>
@@ -1368,7 +1162,7 @@
             <a:spLocks noGrp="1"/>
           </p:cNvSpPr>
           <p:nvPr>
-            <p:ph type="sldNum" idx="5" sz="quarter"/>
+            <p:ph type="sldNum" sz="quarter" idx="5"/>
           </p:nvPr>
         </p:nvSpPr>
         <p:spPr/>
@@ -1382,7 +1176,7 @@
 </file>
 
 <file path=ppt/notesSlides/notesSlide8.xml><?xml version="1.0" encoding="utf-8"?>
-<p:notes xmlns:a="http://schemas.openxmlformats.org/drawingml/2006/main" xmlns:p="http://schemas.openxmlformats.org/presentationml/2006/main" xmlns:r="http://schemas.openxmlformats.org/officeDocument/2006/relationships">
+<p:notes xmlns:a="http://schemas.openxmlformats.org/drawingml/2006/main" xmlns:r="http://schemas.openxmlformats.org/officeDocument/2006/relationships" xmlns:p="http://schemas.openxmlformats.org/presentationml/2006/main">
   <p:cSld>
     <p:spTree>
       <p:nvGrpSpPr>
@@ -1402,7 +1196,7 @@
         <p:nvSpPr>
           <p:cNvPr id="2" name="Slide Image Placeholder 1"/>
           <p:cNvSpPr>
-            <a:spLocks noGrp="1"/>
+            <a:spLocks noGrp="1" noRot="1" noChangeAspect="1"/>
           </p:cNvSpPr>
           <p:nvPr>
             <p:ph type="sldImg" idx="2"/>
@@ -1417,7 +1211,7 @@
             <a:spLocks noGrp="1"/>
           </p:cNvSpPr>
           <p:nvPr>
-            <p:ph type="body" idx="3" sz="quarter"/>
+            <p:ph type="body" sz="quarter" idx="3"/>
           </p:nvPr>
         </p:nvSpPr>
         <p:spPr/>
@@ -1438,7 +1232,7 @@
             <a:spLocks noGrp="1"/>
           </p:cNvSpPr>
           <p:nvPr>
-            <p:ph type="sldNum" idx="5" sz="quarter"/>
+            <p:ph type="sldNum" sz="quarter" idx="5"/>
           </p:nvPr>
         </p:nvSpPr>
         <p:spPr/>
@@ -1452,7 +1246,7 @@
 </file>
 
 <file path=ppt/notesSlides/notesSlide9.xml><?xml version="1.0" encoding="utf-8"?>
-<p:notes xmlns:a="http://schemas.openxmlformats.org/drawingml/2006/main" xmlns:p="http://schemas.openxmlformats.org/presentationml/2006/main" xmlns:r="http://schemas.openxmlformats.org/officeDocument/2006/relationships">
+<p:notes xmlns:a="http://schemas.openxmlformats.org/drawingml/2006/main" xmlns:r="http://schemas.openxmlformats.org/officeDocument/2006/relationships" xmlns:p="http://schemas.openxmlformats.org/presentationml/2006/main">
   <p:cSld>
     <p:spTree>
       <p:nvGrpSpPr>
@@ -1472,7 +1266,7 @@
         <p:nvSpPr>
           <p:cNvPr id="2" name="Slide Image Placeholder 1"/>
           <p:cNvSpPr>
-            <a:spLocks noGrp="1"/>
+            <a:spLocks noGrp="1" noRot="1" noChangeAspect="1"/>
           </p:cNvSpPr>
           <p:nvPr>
             <p:ph type="sldImg" idx="2"/>
@@ -1487,7 +1281,7 @@
             <a:spLocks noGrp="1"/>
           </p:cNvSpPr>
           <p:nvPr>
-            <p:ph type="body" idx="3" sz="quarter"/>
+            <p:ph type="body" sz="quarter" idx="3"/>
           </p:nvPr>
         </p:nvSpPr>
         <p:spPr/>
@@ -1508,7 +1302,7 @@
             <a:spLocks noGrp="1"/>
           </p:cNvSpPr>
           <p:nvPr>
-            <p:ph type="sldNum" idx="5" sz="quarter"/>
+            <p:ph type="sldNum" sz="quarter" idx="5"/>
           </p:nvPr>
         </p:nvSpPr>
         <p:spPr/>
@@ -1559,10 +1353,9 @@
           <a:lstStyle/>
           <a:p>
             <a:r>
-              <a:rPr lang="en-US" smtClean="0"/>
+              <a:rPr lang="en-US"/>
               <a:t>Click to edit Master title style</a:t>
             </a:r>
-            <a:endParaRPr lang="en-US"/>
           </a:p>
         </p:txBody>
       </p:sp>
@@ -1678,10 +1471,9 @@
           </a:lstStyle>
           <a:p>
             <a:r>
-              <a:rPr lang="en-US" smtClean="0"/>
+              <a:rPr lang="en-US"/>
               <a:t>Click to edit Master subtitle style</a:t>
             </a:r>
-            <a:endParaRPr lang="en-US"/>
           </a:p>
         </p:txBody>
       </p:sp>
@@ -1702,7 +1494,7 @@
           <a:p>
             <a:fld id="{5BCAD085-E8A6-8845-BD4E-CB4CCA059FC4}" type="datetimeFigureOut">
               <a:rPr lang="en-US" smtClean="0"/>
-              <a:t>1/27/13</a:t>
+              <a:t>7/19/2026</a:t>
             </a:fld>
             <a:endParaRPr lang="en-US"/>
           </a:p>
@@ -1796,10 +1588,9 @@
           <a:lstStyle/>
           <a:p>
             <a:r>
-              <a:rPr lang="en-US" smtClean="0"/>
+              <a:rPr lang="en-US"/>
               <a:t>Click to edit Master title style</a:t>
             </a:r>
-            <a:endParaRPr lang="en-US"/>
           </a:p>
         </p:txBody>
       </p:sp>
@@ -1820,38 +1611,37 @@
           <a:p>
             <a:pPr lvl="0"/>
             <a:r>
-              <a:rPr lang="en-US" smtClean="0"/>
+              <a:rPr lang="en-US"/>
               <a:t>Click to edit Master text styles</a:t>
             </a:r>
           </a:p>
           <a:p>
             <a:pPr lvl="1"/>
             <a:r>
-              <a:rPr lang="en-US" smtClean="0"/>
+              <a:rPr lang="en-US"/>
               <a:t>Second level</a:t>
             </a:r>
           </a:p>
           <a:p>
             <a:pPr lvl="2"/>
             <a:r>
-              <a:rPr lang="en-US" smtClean="0"/>
+              <a:rPr lang="en-US"/>
               <a:t>Third level</a:t>
             </a:r>
           </a:p>
           <a:p>
             <a:pPr lvl="3"/>
             <a:r>
-              <a:rPr lang="en-US" smtClean="0"/>
+              <a:rPr lang="en-US"/>
               <a:t>Fourth level</a:t>
             </a:r>
           </a:p>
           <a:p>
             <a:pPr lvl="4"/>
             <a:r>
-              <a:rPr lang="en-US" smtClean="0"/>
+              <a:rPr lang="en-US"/>
               <a:t>Fifth level</a:t>
             </a:r>
-            <a:endParaRPr lang="en-US"/>
           </a:p>
         </p:txBody>
       </p:sp>
@@ -1872,7 +1662,7 @@
           <a:p>
             <a:fld id="{5BCAD085-E8A6-8845-BD4E-CB4CCA059FC4}" type="datetimeFigureOut">
               <a:rPr lang="en-US" smtClean="0"/>
-              <a:t>1/27/13</a:t>
+              <a:t>7/19/2026</a:t>
             </a:fld>
             <a:endParaRPr lang="en-US"/>
           </a:p>
@@ -1971,10 +1761,9 @@
           <a:lstStyle/>
           <a:p>
             <a:r>
-              <a:rPr lang="en-US" smtClean="0"/>
+              <a:rPr lang="en-US"/>
               <a:t>Click to edit Master title style</a:t>
             </a:r>
-            <a:endParaRPr lang="en-US"/>
           </a:p>
         </p:txBody>
       </p:sp>
@@ -2000,38 +1789,37 @@
           <a:p>
             <a:pPr lvl="0"/>
             <a:r>
-              <a:rPr lang="en-US" smtClean="0"/>
+              <a:rPr lang="en-US"/>
               <a:t>Click to edit Master text styles</a:t>
             </a:r>
           </a:p>
           <a:p>
             <a:pPr lvl="1"/>
             <a:r>
-              <a:rPr lang="en-US" smtClean="0"/>
+              <a:rPr lang="en-US"/>
               <a:t>Second level</a:t>
             </a:r>
           </a:p>
           <a:p>
             <a:pPr lvl="2"/>
             <a:r>
-              <a:rPr lang="en-US" smtClean="0"/>
+              <a:rPr lang="en-US"/>
               <a:t>Third level</a:t>
             </a:r>
           </a:p>
           <a:p>
             <a:pPr lvl="3"/>
             <a:r>
-              <a:rPr lang="en-US" smtClean="0"/>
+              <a:rPr lang="en-US"/>
               <a:t>Fourth level</a:t>
             </a:r>
           </a:p>
           <a:p>
             <a:pPr lvl="4"/>
             <a:r>
-              <a:rPr lang="en-US" smtClean="0"/>
+              <a:rPr lang="en-US"/>
               <a:t>Fifth level</a:t>
             </a:r>
-            <a:endParaRPr lang="en-US"/>
           </a:p>
         </p:txBody>
       </p:sp>
@@ -2052,7 +1840,7 @@
           <a:p>
             <a:fld id="{5BCAD085-E8A6-8845-BD4E-CB4CCA059FC4}" type="datetimeFigureOut">
               <a:rPr lang="en-US" smtClean="0"/>
-              <a:t>1/27/13</a:t>
+              <a:t>7/19/2026</a:t>
             </a:fld>
             <a:endParaRPr lang="en-US"/>
           </a:p>
@@ -2146,10 +1934,9 @@
           <a:lstStyle/>
           <a:p>
             <a:r>
-              <a:rPr lang="en-US" smtClean="0"/>
+              <a:rPr lang="en-US"/>
               <a:t>Click to edit Master title style</a:t>
             </a:r>
-            <a:endParaRPr lang="en-US"/>
           </a:p>
         </p:txBody>
       </p:sp>
@@ -2170,38 +1957,37 @@
           <a:p>
             <a:pPr lvl="0"/>
             <a:r>
-              <a:rPr lang="en-US" smtClean="0"/>
+              <a:rPr lang="en-US"/>
               <a:t>Click to edit Master text styles</a:t>
             </a:r>
           </a:p>
           <a:p>
             <a:pPr lvl="1"/>
             <a:r>
-              <a:rPr lang="en-US" smtClean="0"/>
+              <a:rPr lang="en-US"/>
               <a:t>Second level</a:t>
             </a:r>
           </a:p>
           <a:p>
             <a:pPr lvl="2"/>
             <a:r>
-              <a:rPr lang="en-US" smtClean="0"/>
+              <a:rPr lang="en-US"/>
               <a:t>Third level</a:t>
             </a:r>
           </a:p>
           <a:p>
             <a:pPr lvl="3"/>
             <a:r>
-              <a:rPr lang="en-US" smtClean="0"/>
+              <a:rPr lang="en-US"/>
               <a:t>Fourth level</a:t>
             </a:r>
           </a:p>
           <a:p>
             <a:pPr lvl="4"/>
             <a:r>
-              <a:rPr lang="en-US" smtClean="0"/>
+              <a:rPr lang="en-US"/>
               <a:t>Fifth level</a:t>
             </a:r>
-            <a:endParaRPr lang="en-US"/>
           </a:p>
         </p:txBody>
       </p:sp>
@@ -2222,7 +2008,7 @@
           <a:p>
             <a:fld id="{5BCAD085-E8A6-8845-BD4E-CB4CCA059FC4}" type="datetimeFigureOut">
               <a:rPr lang="en-US" smtClean="0"/>
-              <a:t>1/27/13</a:t>
+              <a:t>7/19/2026</a:t>
             </a:fld>
             <a:endParaRPr lang="en-US"/>
           </a:p>
@@ -2325,10 +2111,9 @@
           </a:lstStyle>
           <a:p>
             <a:r>
-              <a:rPr lang="en-US" smtClean="0"/>
+              <a:rPr lang="en-US"/>
               <a:t>Click to edit Master title style</a:t>
             </a:r>
-            <a:endParaRPr lang="en-US"/>
           </a:p>
         </p:txBody>
       </p:sp>
@@ -2445,7 +2230,7 @@
           <a:p>
             <a:pPr lvl="0"/>
             <a:r>
-              <a:rPr lang="en-US" smtClean="0"/>
+              <a:rPr lang="en-US"/>
               <a:t>Click to edit Master text styles</a:t>
             </a:r>
           </a:p>
@@ -2468,7 +2253,7 @@
           <a:p>
             <a:fld id="{5BCAD085-E8A6-8845-BD4E-CB4CCA059FC4}" type="datetimeFigureOut">
               <a:rPr lang="en-US" smtClean="0"/>
-              <a:t>1/27/13</a:t>
+              <a:t>7/19/2026</a:t>
             </a:fld>
             <a:endParaRPr lang="en-US"/>
           </a:p>
@@ -2562,10 +2347,9 @@
           <a:lstStyle/>
           <a:p>
             <a:r>
-              <a:rPr lang="en-US" smtClean="0"/>
+              <a:rPr lang="en-US"/>
               <a:t>Click to edit Master title style</a:t>
             </a:r>
-            <a:endParaRPr lang="en-US"/>
           </a:p>
         </p:txBody>
       </p:sp>
@@ -2619,38 +2403,37 @@
           <a:p>
             <a:pPr lvl="0"/>
             <a:r>
-              <a:rPr lang="en-US" smtClean="0"/>
+              <a:rPr lang="en-US"/>
               <a:t>Click to edit Master text styles</a:t>
             </a:r>
           </a:p>
           <a:p>
             <a:pPr lvl="1"/>
             <a:r>
-              <a:rPr lang="en-US" smtClean="0"/>
+              <a:rPr lang="en-US"/>
               <a:t>Second level</a:t>
             </a:r>
           </a:p>
           <a:p>
             <a:pPr lvl="2"/>
             <a:r>
-              <a:rPr lang="en-US" smtClean="0"/>
+              <a:rPr lang="en-US"/>
               <a:t>Third level</a:t>
             </a:r>
           </a:p>
           <a:p>
             <a:pPr lvl="3"/>
             <a:r>
-              <a:rPr lang="en-US" smtClean="0"/>
+              <a:rPr lang="en-US"/>
               <a:t>Fourth level</a:t>
             </a:r>
           </a:p>
           <a:p>
             <a:pPr lvl="4"/>
             <a:r>
-              <a:rPr lang="en-US" smtClean="0"/>
+              <a:rPr lang="en-US"/>
               <a:t>Fifth level</a:t>
             </a:r>
-            <a:endParaRPr lang="en-US"/>
           </a:p>
         </p:txBody>
       </p:sp>
@@ -2704,38 +2487,37 @@
           <a:p>
             <a:pPr lvl="0"/>
             <a:r>
-              <a:rPr lang="en-US" smtClean="0"/>
+              <a:rPr lang="en-US"/>
               <a:t>Click to edit Master text styles</a:t>
             </a:r>
           </a:p>
           <a:p>
             <a:pPr lvl="1"/>
             <a:r>
-              <a:rPr lang="en-US" smtClean="0"/>
+              <a:rPr lang="en-US"/>
               <a:t>Second level</a:t>
             </a:r>
           </a:p>
           <a:p>
             <a:pPr lvl="2"/>
             <a:r>
-              <a:rPr lang="en-US" smtClean="0"/>
+              <a:rPr lang="en-US"/>
               <a:t>Third level</a:t>
             </a:r>
           </a:p>
           <a:p>
             <a:pPr lvl="3"/>
             <a:r>
-              <a:rPr lang="en-US" smtClean="0"/>
+              <a:rPr lang="en-US"/>
               <a:t>Fourth level</a:t>
             </a:r>
           </a:p>
           <a:p>
             <a:pPr lvl="4"/>
             <a:r>
-              <a:rPr lang="en-US" smtClean="0"/>
+              <a:rPr lang="en-US"/>
               <a:t>Fifth level</a:t>
             </a:r>
-            <a:endParaRPr lang="en-US"/>
           </a:p>
         </p:txBody>
       </p:sp>
@@ -2756,7 +2538,7 @@
           <a:p>
             <a:fld id="{5BCAD085-E8A6-8845-BD4E-CB4CCA059FC4}" type="datetimeFigureOut">
               <a:rPr lang="en-US" smtClean="0"/>
-              <a:t>1/27/13</a:t>
+              <a:t>7/19/2026</a:t>
             </a:fld>
             <a:endParaRPr lang="en-US"/>
           </a:p>
@@ -2854,10 +2636,9 @@
           </a:lstStyle>
           <a:p>
             <a:r>
-              <a:rPr lang="en-US" smtClean="0"/>
+              <a:rPr lang="en-US"/>
               <a:t>Click to edit Master title style</a:t>
             </a:r>
-            <a:endParaRPr lang="en-US"/>
           </a:p>
         </p:txBody>
       </p:sp>
@@ -2920,7 +2701,7 @@
           <a:p>
             <a:pPr lvl="0"/>
             <a:r>
-              <a:rPr lang="en-US" smtClean="0"/>
+              <a:rPr lang="en-US"/>
               <a:t>Click to edit Master text styles</a:t>
             </a:r>
           </a:p>
@@ -2976,38 +2757,37 @@
           <a:p>
             <a:pPr lvl="0"/>
             <a:r>
-              <a:rPr lang="en-US" smtClean="0"/>
+              <a:rPr lang="en-US"/>
               <a:t>Click to edit Master text styles</a:t>
             </a:r>
           </a:p>
           <a:p>
             <a:pPr lvl="1"/>
             <a:r>
-              <a:rPr lang="en-US" smtClean="0"/>
+              <a:rPr lang="en-US"/>
               <a:t>Second level</a:t>
             </a:r>
           </a:p>
           <a:p>
             <a:pPr lvl="2"/>
             <a:r>
-              <a:rPr lang="en-US" smtClean="0"/>
+              <a:rPr lang="en-US"/>
               <a:t>Third level</a:t>
             </a:r>
           </a:p>
           <a:p>
             <a:pPr lvl="3"/>
             <a:r>
-              <a:rPr lang="en-US" smtClean="0"/>
+              <a:rPr lang="en-US"/>
               <a:t>Fourth level</a:t>
             </a:r>
           </a:p>
           <a:p>
             <a:pPr lvl="4"/>
             <a:r>
-              <a:rPr lang="en-US" smtClean="0"/>
+              <a:rPr lang="en-US"/>
               <a:t>Fifth level</a:t>
             </a:r>
-            <a:endParaRPr lang="en-US"/>
           </a:p>
         </p:txBody>
       </p:sp>
@@ -3070,7 +2850,7 @@
           <a:p>
             <a:pPr lvl="0"/>
             <a:r>
-              <a:rPr lang="en-US" smtClean="0"/>
+              <a:rPr lang="en-US"/>
               <a:t>Click to edit Master text styles</a:t>
             </a:r>
           </a:p>
@@ -3126,38 +2906,37 @@
           <a:p>
             <a:pPr lvl="0"/>
             <a:r>
-              <a:rPr lang="en-US" smtClean="0"/>
+              <a:rPr lang="en-US"/>
               <a:t>Click to edit Master text styles</a:t>
             </a:r>
           </a:p>
           <a:p>
             <a:pPr lvl="1"/>
             <a:r>
-              <a:rPr lang="en-US" smtClean="0"/>
+              <a:rPr lang="en-US"/>
               <a:t>Second level</a:t>
             </a:r>
           </a:p>
           <a:p>
             <a:pPr lvl="2"/>
             <a:r>
-              <a:rPr lang="en-US" smtClean="0"/>
+              <a:rPr lang="en-US"/>
               <a:t>Third level</a:t>
             </a:r>
           </a:p>
           <a:p>
             <a:pPr lvl="3"/>
             <a:r>
-              <a:rPr lang="en-US" smtClean="0"/>
+              <a:rPr lang="en-US"/>
               <a:t>Fourth level</a:t>
             </a:r>
           </a:p>
           <a:p>
             <a:pPr lvl="4"/>
             <a:r>
-              <a:rPr lang="en-US" smtClean="0"/>
+              <a:rPr lang="en-US"/>
               <a:t>Fifth level</a:t>
             </a:r>
-            <a:endParaRPr lang="en-US"/>
           </a:p>
         </p:txBody>
       </p:sp>
@@ -3178,7 +2957,7 @@
           <a:p>
             <a:fld id="{5BCAD085-E8A6-8845-BD4E-CB4CCA059FC4}" type="datetimeFigureOut">
               <a:rPr lang="en-US" smtClean="0"/>
-              <a:t>1/27/13</a:t>
+              <a:t>7/19/2026</a:t>
             </a:fld>
             <a:endParaRPr lang="en-US"/>
           </a:p>
@@ -3272,10 +3051,9 @@
           <a:lstStyle/>
           <a:p>
             <a:r>
-              <a:rPr lang="en-US" smtClean="0"/>
+              <a:rPr lang="en-US"/>
               <a:t>Click to edit Master title style</a:t>
             </a:r>
-            <a:endParaRPr lang="en-US"/>
           </a:p>
         </p:txBody>
       </p:sp>
@@ -3296,7 +3074,7 @@
           <a:p>
             <a:fld id="{5BCAD085-E8A6-8845-BD4E-CB4CCA059FC4}" type="datetimeFigureOut">
               <a:rPr lang="en-US" smtClean="0"/>
-              <a:t>1/27/13</a:t>
+              <a:t>7/19/2026</a:t>
             </a:fld>
             <a:endParaRPr lang="en-US"/>
           </a:p>
@@ -3391,7 +3169,7 @@
           <a:p>
             <a:fld id="{5BCAD085-E8A6-8845-BD4E-CB4CCA059FC4}" type="datetimeFigureOut">
               <a:rPr lang="en-US" smtClean="0"/>
-              <a:t>1/27/13</a:t>
+              <a:t>7/19/2026</a:t>
             </a:fld>
             <a:endParaRPr lang="en-US"/>
           </a:p>
@@ -3494,10 +3272,9 @@
           </a:lstStyle>
           <a:p>
             <a:r>
-              <a:rPr lang="en-US" smtClean="0"/>
+              <a:rPr lang="en-US"/>
               <a:t>Click to edit Master title style</a:t>
             </a:r>
-            <a:endParaRPr lang="en-US"/>
           </a:p>
         </p:txBody>
       </p:sp>
@@ -3551,38 +3328,37 @@
           <a:p>
             <a:pPr lvl="0"/>
             <a:r>
-              <a:rPr lang="en-US" smtClean="0"/>
+              <a:rPr lang="en-US"/>
               <a:t>Click to edit Master text styles</a:t>
             </a:r>
           </a:p>
           <a:p>
             <a:pPr lvl="1"/>
             <a:r>
-              <a:rPr lang="en-US" smtClean="0"/>
+              <a:rPr lang="en-US"/>
               <a:t>Second level</a:t>
             </a:r>
           </a:p>
           <a:p>
             <a:pPr lvl="2"/>
             <a:r>
-              <a:rPr lang="en-US" smtClean="0"/>
+              <a:rPr lang="en-US"/>
               <a:t>Third level</a:t>
             </a:r>
           </a:p>
           <a:p>
             <a:pPr lvl="3"/>
             <a:r>
-              <a:rPr lang="en-US" smtClean="0"/>
+              <a:rPr lang="en-US"/>
               <a:t>Fourth level</a:t>
             </a:r>
           </a:p>
           <a:p>
             <a:pPr lvl="4"/>
             <a:r>
-              <a:rPr lang="en-US" smtClean="0"/>
+              <a:rPr lang="en-US"/>
               <a:t>Fifth level</a:t>
             </a:r>
-            <a:endParaRPr lang="en-US"/>
           </a:p>
         </p:txBody>
       </p:sp>
@@ -3645,7 +3421,7 @@
           <a:p>
             <a:pPr lvl="0"/>
             <a:r>
-              <a:rPr lang="en-US" smtClean="0"/>
+              <a:rPr lang="en-US"/>
               <a:t>Click to edit Master text styles</a:t>
             </a:r>
           </a:p>
@@ -3668,7 +3444,7 @@
           <a:p>
             <a:fld id="{5BCAD085-E8A6-8845-BD4E-CB4CCA059FC4}" type="datetimeFigureOut">
               <a:rPr lang="en-US" smtClean="0"/>
-              <a:t>1/27/13</a:t>
+              <a:t>7/19/2026</a:t>
             </a:fld>
             <a:endParaRPr lang="en-US"/>
           </a:p>
@@ -3771,10 +3547,9 @@
           </a:lstStyle>
           <a:p>
             <a:r>
-              <a:rPr lang="en-US" smtClean="0"/>
+              <a:rPr lang="en-US"/>
               <a:t>Click to edit Master title style</a:t>
             </a:r>
-            <a:endParaRPr lang="en-US"/>
           </a:p>
         </p:txBody>
       </p:sp>
@@ -3898,7 +3673,7 @@
           <a:p>
             <a:pPr lvl="0"/>
             <a:r>
-              <a:rPr lang="en-US" smtClean="0"/>
+              <a:rPr lang="en-US"/>
               <a:t>Click to edit Master text styles</a:t>
             </a:r>
           </a:p>
@@ -3921,7 +3696,7 @@
           <a:p>
             <a:fld id="{5BCAD085-E8A6-8845-BD4E-CB4CCA059FC4}" type="datetimeFigureOut">
               <a:rPr lang="en-US" smtClean="0"/>
-              <a:t>1/27/13</a:t>
+              <a:t>7/19/2026</a:t>
             </a:fld>
             <a:endParaRPr lang="en-US"/>
           </a:p>
@@ -4030,10 +3805,9 @@
           <a:lstStyle/>
           <a:p>
             <a:r>
-              <a:rPr lang="en-US" smtClean="0"/>
+              <a:rPr lang="en-US"/>
               <a:t>Click to edit Master title style</a:t>
             </a:r>
-            <a:endParaRPr lang="en-US"/>
           </a:p>
         </p:txBody>
       </p:sp>
@@ -4064,38 +3838,37 @@
           <a:p>
             <a:pPr lvl="0"/>
             <a:r>
-              <a:rPr lang="en-US" smtClean="0"/>
+              <a:rPr lang="en-US"/>
               <a:t>Click to edit Master text styles</a:t>
             </a:r>
           </a:p>
           <a:p>
             <a:pPr lvl="1"/>
             <a:r>
-              <a:rPr lang="en-US" smtClean="0"/>
+              <a:rPr lang="en-US"/>
               <a:t>Second level</a:t>
             </a:r>
           </a:p>
           <a:p>
             <a:pPr lvl="2"/>
             <a:r>
-              <a:rPr lang="en-US" smtClean="0"/>
+              <a:rPr lang="en-US"/>
               <a:t>Third level</a:t>
             </a:r>
           </a:p>
           <a:p>
             <a:pPr lvl="3"/>
             <a:r>
-              <a:rPr lang="en-US" smtClean="0"/>
+              <a:rPr lang="en-US"/>
               <a:t>Fourth level</a:t>
             </a:r>
           </a:p>
           <a:p>
             <a:pPr lvl="4"/>
             <a:r>
-              <a:rPr lang="en-US" smtClean="0"/>
+              <a:rPr lang="en-US"/>
               <a:t>Fifth level</a:t>
             </a:r>
-            <a:endParaRPr lang="en-US"/>
           </a:p>
         </p:txBody>
       </p:sp>
@@ -4134,7 +3907,7 @@
           <a:p>
             <a:fld id="{5BCAD085-E8A6-8845-BD4E-CB4CCA059FC4}" type="datetimeFigureOut">
               <a:rPr lang="en-US" smtClean="0"/>
-              <a:t>1/27/13</a:t>
+              <a:t>7/19/2026</a:t>
             </a:fld>
             <a:endParaRPr lang="en-US"/>
           </a:p>
@@ -4493,7 +4266,7 @@
 </file>
 
 <file path=ppt/slides/slide1.xml><?xml version="1.0" encoding="utf-8"?>
-<p:sld xmlns:a="http://schemas.openxmlformats.org/drawingml/2006/main" xmlns:p="http://schemas.openxmlformats.org/presentationml/2006/main" xmlns:r="http://schemas.openxmlformats.org/officeDocument/2006/relationships">
+<p:sld xmlns:a="http://schemas.openxmlformats.org/drawingml/2006/main" xmlns:r="http://schemas.openxmlformats.org/officeDocument/2006/relationships" xmlns:p="http://schemas.openxmlformats.org/presentationml/2006/main">
   <p:cSld>
     <p:bg>
       <p:bgPr>
@@ -4509,7 +4282,14 @@
         <p:cNvGrpSpPr/>
         <p:nvPr/>
       </p:nvGrpSpPr>
-      <p:grpSpPr/>
+      <p:grpSpPr>
+        <a:xfrm>
+          <a:off x="0" y="0"/>
+          <a:ext cx="0" cy="0"/>
+          <a:chOff x="0" y="0"/>
+          <a:chExt cx="0" cy="0"/>
+        </a:xfrm>
+      </p:grpSpPr>
       <p:sp>
         <p:nvSpPr>
           <p:cNvPr id="2" name="Rectangle 1"/>
@@ -4551,6 +4331,7 @@
           <a:lstStyle/>
           <a:p>
             <a:pPr algn="ctr"/>
+            <a:endParaRPr/>
           </a:p>
         </p:txBody>
       </p:sp>
@@ -4673,7 +4454,7 @@
 </file>
 
 <file path=ppt/slides/slide10.xml><?xml version="1.0" encoding="utf-8"?>
-<p:sld xmlns:a="http://schemas.openxmlformats.org/drawingml/2006/main" xmlns:p="http://schemas.openxmlformats.org/presentationml/2006/main" xmlns:r="http://schemas.openxmlformats.org/officeDocument/2006/relationships">
+<p:sld xmlns:a="http://schemas.openxmlformats.org/drawingml/2006/main" xmlns:r="http://schemas.openxmlformats.org/officeDocument/2006/relationships" xmlns:p="http://schemas.openxmlformats.org/presentationml/2006/main">
   <p:cSld>
     <p:bg>
       <p:bgPr>
@@ -4689,7 +4470,14 @@
         <p:cNvGrpSpPr/>
         <p:nvPr/>
       </p:nvGrpSpPr>
-      <p:grpSpPr/>
+      <p:grpSpPr>
+        <a:xfrm>
+          <a:off x="0" y="0"/>
+          <a:ext cx="0" cy="0"/>
+          <a:chOff x="0" y="0"/>
+          <a:chExt cx="0" cy="0"/>
+        </a:xfrm>
+      </p:grpSpPr>
       <p:sp>
         <p:nvSpPr>
           <p:cNvPr id="2" name="TextBox 1"/>
@@ -4786,6 +4574,7 @@
           <a:lstStyle/>
           <a:p>
             <a:pPr algn="ctr"/>
+            <a:endParaRPr/>
           </a:p>
         </p:txBody>
       </p:sp>
@@ -4830,6 +4619,7 @@
           <a:lstStyle/>
           <a:p>
             <a:pPr algn="ctr"/>
+            <a:endParaRPr/>
           </a:p>
         </p:txBody>
       </p:sp>
@@ -4929,6 +4719,7 @@
           <a:lstStyle/>
           <a:p>
             <a:pPr algn="ctr"/>
+            <a:endParaRPr/>
           </a:p>
         </p:txBody>
       </p:sp>
@@ -4973,6 +4764,7 @@
           <a:lstStyle/>
           <a:p>
             <a:pPr algn="ctr"/>
+            <a:endParaRPr/>
           </a:p>
         </p:txBody>
       </p:sp>
@@ -5072,6 +4864,7 @@
           <a:lstStyle/>
           <a:p>
             <a:pPr algn="ctr"/>
+            <a:endParaRPr/>
           </a:p>
         </p:txBody>
       </p:sp>
@@ -5116,6 +4909,7 @@
           <a:lstStyle/>
           <a:p>
             <a:pPr algn="ctr"/>
+            <a:endParaRPr/>
           </a:p>
         </p:txBody>
       </p:sp>
@@ -5222,7 +5016,7 @@
 </file>
 
 <file path=ppt/slides/slide11.xml><?xml version="1.0" encoding="utf-8"?>
-<p:sld xmlns:a="http://schemas.openxmlformats.org/drawingml/2006/main" xmlns:p="http://schemas.openxmlformats.org/presentationml/2006/main" xmlns:r="http://schemas.openxmlformats.org/officeDocument/2006/relationships">
+<p:sld xmlns:a="http://schemas.openxmlformats.org/drawingml/2006/main" xmlns:r="http://schemas.openxmlformats.org/officeDocument/2006/relationships" xmlns:p="http://schemas.openxmlformats.org/presentationml/2006/main">
   <p:cSld>
     <p:bg>
       <p:bgPr>
@@ -5238,7 +5032,14 @@
         <p:cNvGrpSpPr/>
         <p:nvPr/>
       </p:nvGrpSpPr>
-      <p:grpSpPr/>
+      <p:grpSpPr>
+        <a:xfrm>
+          <a:off x="0" y="0"/>
+          <a:ext cx="0" cy="0"/>
+          <a:chOff x="0" y="0"/>
+          <a:chExt cx="0" cy="0"/>
+        </a:xfrm>
+      </p:grpSpPr>
       <p:sp>
         <p:nvSpPr>
           <p:cNvPr id="2" name="TextBox 1"/>
@@ -5302,7 +5103,7 @@
         </p:nvSpPr>
         <p:spPr>
           <a:xfrm>
-            <a:off x="685800" y="2286000"/>
+            <a:off x="685800" y="1396766"/>
             <a:ext cx="10789920" cy="1078992"/>
           </a:xfrm>
           <a:prstGeom prst="rect">
@@ -5335,6 +5136,7 @@
           <a:lstStyle/>
           <a:p>
             <a:pPr algn="ctr"/>
+            <a:endParaRPr/>
           </a:p>
         </p:txBody>
       </p:sp>
@@ -5346,7 +5148,7 @@
         </p:nvSpPr>
         <p:spPr>
           <a:xfrm>
-            <a:off x="685800" y="2286000"/>
+            <a:off x="685800" y="1396766"/>
             <a:ext cx="50292" cy="1078992"/>
           </a:xfrm>
           <a:prstGeom prst="rect">
@@ -5379,6 +5181,7 @@
           <a:lstStyle/>
           <a:p>
             <a:pPr algn="ctr"/>
+            <a:endParaRPr/>
           </a:p>
         </p:txBody>
       </p:sp>
@@ -5390,7 +5193,7 @@
         </p:nvSpPr>
         <p:spPr>
           <a:xfrm>
-            <a:off x="914400" y="2432304"/>
+            <a:off x="914400" y="1543070"/>
             <a:ext cx="10378440" cy="804671"/>
           </a:xfrm>
           <a:prstGeom prst="rect">
@@ -5445,7 +5248,7 @@
         </p:nvSpPr>
         <p:spPr>
           <a:xfrm>
-            <a:off x="685800" y="3520440"/>
+            <a:off x="685800" y="2631206"/>
             <a:ext cx="10789920" cy="1078992"/>
           </a:xfrm>
           <a:prstGeom prst="rect">
@@ -5478,6 +5281,7 @@
           <a:lstStyle/>
           <a:p>
             <a:pPr algn="ctr"/>
+            <a:endParaRPr/>
           </a:p>
         </p:txBody>
       </p:sp>
@@ -5489,7 +5293,7 @@
         </p:nvSpPr>
         <p:spPr>
           <a:xfrm>
-            <a:off x="685800" y="3520440"/>
+            <a:off x="685800" y="2631206"/>
             <a:ext cx="50292" cy="1078992"/>
           </a:xfrm>
           <a:prstGeom prst="rect">
@@ -5522,6 +5326,7 @@
           <a:lstStyle/>
           <a:p>
             <a:pPr algn="ctr"/>
+            <a:endParaRPr/>
           </a:p>
         </p:txBody>
       </p:sp>
@@ -5533,7 +5338,7 @@
         </p:nvSpPr>
         <p:spPr>
           <a:xfrm>
-            <a:off x="914400" y="3666744"/>
+            <a:off x="914400" y="2777510"/>
             <a:ext cx="10378440" cy="804671"/>
           </a:xfrm>
           <a:prstGeom prst="rect">
@@ -5588,7 +5393,7 @@
         </p:nvSpPr>
         <p:spPr>
           <a:xfrm>
-            <a:off x="685800" y="4754880"/>
+            <a:off x="685800" y="3865646"/>
             <a:ext cx="10789920" cy="1078992"/>
           </a:xfrm>
           <a:prstGeom prst="rect">
@@ -5621,6 +5426,7 @@
           <a:lstStyle/>
           <a:p>
             <a:pPr algn="ctr"/>
+            <a:endParaRPr/>
           </a:p>
         </p:txBody>
       </p:sp>
@@ -5632,7 +5438,7 @@
         </p:nvSpPr>
         <p:spPr>
           <a:xfrm>
-            <a:off x="685800" y="4754880"/>
+            <a:off x="685800" y="3865646"/>
             <a:ext cx="50292" cy="1078992"/>
           </a:xfrm>
           <a:prstGeom prst="rect">
@@ -5665,6 +5471,7 @@
           <a:lstStyle/>
           <a:p>
             <a:pPr algn="ctr"/>
+            <a:endParaRPr/>
           </a:p>
         </p:txBody>
       </p:sp>
@@ -5676,7 +5483,7 @@
         </p:nvSpPr>
         <p:spPr>
           <a:xfrm>
-            <a:off x="914400" y="4901184"/>
+            <a:off x="914400" y="4011950"/>
             <a:ext cx="10378440" cy="804671"/>
           </a:xfrm>
           <a:prstGeom prst="rect">
@@ -5731,7 +5538,7 @@
         </p:nvSpPr>
         <p:spPr>
           <a:xfrm>
-            <a:off x="685800" y="6053328"/>
+            <a:off x="685800" y="5164094"/>
             <a:ext cx="10789920" cy="530352"/>
           </a:xfrm>
           <a:prstGeom prst="rect">
@@ -5764,156 +5571,13 @@
       </p:sp>
       <p:sp>
         <p:nvSpPr>
-          <p:cNvPr id="13" name="Rectangle 12"/>
-          <p:cNvSpPr/>
-          <p:nvPr/>
-        </p:nvSpPr>
-        <p:spPr>
-          <a:xfrm>
-            <a:off x="685800" y="6601968"/>
-            <a:ext cx="10789920" cy="384048"/>
-          </a:xfrm>
-          <a:prstGeom prst="rect">
-            <a:avLst/>
-          </a:prstGeom>
-          <a:solidFill>
-            <a:srgbClr val="FDF1E7"/>
-          </a:solidFill>
-          <a:ln>
-            <a:noFill/>
-          </a:ln>
-          <a:effectLst/>
-        </p:spPr>
-        <p:style>
-          <a:lnRef idx="1">
-            <a:schemeClr val="accent1"/>
-          </a:lnRef>
-          <a:fillRef idx="3">
-            <a:schemeClr val="accent1"/>
-          </a:fillRef>
-          <a:effectRef idx="2">
-            <a:schemeClr val="accent1"/>
-          </a:effectRef>
-          <a:fontRef idx="minor">
-            <a:schemeClr val="lt1"/>
-          </a:fontRef>
-        </p:style>
-        <p:txBody>
-          <a:bodyPr rtlCol="0" anchor="ctr"/>
-          <a:lstStyle/>
-          <a:p>
-            <a:pPr algn="ctr"/>
-          </a:p>
-        </p:txBody>
-      </p:sp>
-      <p:sp>
-        <p:nvSpPr>
-          <p:cNvPr id="14" name="Rectangle 13"/>
-          <p:cNvSpPr/>
-          <p:nvPr/>
-        </p:nvSpPr>
-        <p:spPr>
-          <a:xfrm>
-            <a:off x="685800" y="6601968"/>
-            <a:ext cx="50292" cy="384048"/>
-          </a:xfrm>
-          <a:prstGeom prst="rect">
-            <a:avLst/>
-          </a:prstGeom>
-          <a:solidFill>
-            <a:srgbClr val="C25A1E"/>
-          </a:solidFill>
-          <a:ln>
-            <a:noFill/>
-          </a:ln>
-          <a:effectLst/>
-        </p:spPr>
-        <p:style>
-          <a:lnRef idx="1">
-            <a:schemeClr val="accent1"/>
-          </a:lnRef>
-          <a:fillRef idx="3">
-            <a:schemeClr val="accent1"/>
-          </a:fillRef>
-          <a:effectRef idx="2">
-            <a:schemeClr val="accent1"/>
-          </a:effectRef>
-          <a:fontRef idx="minor">
-            <a:schemeClr val="lt1"/>
-          </a:fontRef>
-        </p:style>
-        <p:txBody>
-          <a:bodyPr rtlCol="0" anchor="ctr"/>
-          <a:lstStyle/>
-          <a:p>
-            <a:pPr algn="ctr"/>
-          </a:p>
-        </p:txBody>
-      </p:sp>
-      <p:sp>
-        <p:nvSpPr>
-          <p:cNvPr id="15" name="TextBox 14"/>
-          <p:cNvSpPr txBox="1"/>
-          <p:nvPr/>
-        </p:nvSpPr>
-        <p:spPr>
-          <a:xfrm>
-            <a:off x="914400" y="6729983"/>
-            <a:ext cx="10378440" cy="128015"/>
-          </a:xfrm>
-          <a:prstGeom prst="rect">
-            <a:avLst/>
-          </a:prstGeom>
-          <a:noFill/>
-        </p:spPr>
-        <p:txBody>
-          <a:bodyPr wrap="square">
-            <a:spAutoFit/>
-          </a:bodyPr>
-          <a:lstStyle/>
-          <a:p>
-            <a:pPr algn="l">
-              <a:spcAft>
-                <a:spcPts val="400"/>
-              </a:spcAft>
-            </a:pPr>
-            <a:r>
-              <a:rPr sz="1000" b="1">
-                <a:solidFill>
-                  <a:srgbClr val="C25A1E"/>
-                </a:solidFill>
-                <a:latin typeface="Segoe UI"/>
-              </a:rPr>
-              <a:t>⚠ CẦN SỐ LIỆU THẬT</a:t>
-            </a:r>
-          </a:p>
-          <a:p>
-            <a:pPr algn="l">
-              <a:spcAft>
-                <a:spcPts val="400"/>
-              </a:spcAft>
-            </a:pPr>
-            <a:r>
-              <a:rPr sz="1200" b="0">
-                <a:solidFill>
-                  <a:srgbClr val="1B2A3D"/>
-                </a:solidFill>
-                <a:latin typeface="Segoe UI"/>
-              </a:rPr>
-              <a:t>Còn thiếu: đơn giá thuê bao và điểm hoà vốn.</a:t>
-            </a:r>
-          </a:p>
-        </p:txBody>
-      </p:sp>
-      <p:sp>
-        <p:nvSpPr>
           <p:cNvPr id="16" name="TextBox 15"/>
           <p:cNvSpPr txBox="1"/>
           <p:nvPr/>
         </p:nvSpPr>
         <p:spPr>
           <a:xfrm>
-            <a:off x="685800" y="5486400"/>
+            <a:off x="685800" y="4597166"/>
             <a:ext cx="10789920" cy="548640"/>
           </a:xfrm>
           <a:prstGeom prst="rect">
@@ -5953,7 +5617,7 @@
 </file>
 
 <file path=ppt/slides/slide12.xml><?xml version="1.0" encoding="utf-8"?>
-<p:sld xmlns:a="http://schemas.openxmlformats.org/drawingml/2006/main" xmlns:p="http://schemas.openxmlformats.org/presentationml/2006/main" xmlns:r="http://schemas.openxmlformats.org/officeDocument/2006/relationships">
+<p:sld xmlns:a="http://schemas.openxmlformats.org/drawingml/2006/main" xmlns:r="http://schemas.openxmlformats.org/officeDocument/2006/relationships" xmlns:p="http://schemas.openxmlformats.org/presentationml/2006/main">
   <p:cSld>
     <p:bg>
       <p:bgPr>
@@ -5969,7 +5633,14 @@
         <p:cNvGrpSpPr/>
         <p:nvPr/>
       </p:nvGrpSpPr>
-      <p:grpSpPr/>
+      <p:grpSpPr>
+        <a:xfrm>
+          <a:off x="0" y="0"/>
+          <a:ext cx="0" cy="0"/>
+          <a:chOff x="0" y="0"/>
+          <a:chExt cx="0" cy="0"/>
+        </a:xfrm>
+      </p:grpSpPr>
       <p:sp>
         <p:nvSpPr>
           <p:cNvPr id="2" name="TextBox 1"/>
@@ -6066,6 +5737,7 @@
           <a:lstStyle/>
           <a:p>
             <a:pPr algn="ctr"/>
+            <a:endParaRPr/>
           </a:p>
         </p:txBody>
       </p:sp>
@@ -6110,6 +5782,7 @@
           <a:lstStyle/>
           <a:p>
             <a:pPr algn="ctr"/>
+            <a:endParaRPr/>
           </a:p>
         </p:txBody>
       </p:sp>
@@ -6209,6 +5882,7 @@
           <a:lstStyle/>
           <a:p>
             <a:pPr algn="ctr"/>
+            <a:endParaRPr/>
           </a:p>
         </p:txBody>
       </p:sp>
@@ -6253,6 +5927,7 @@
           <a:lstStyle/>
           <a:p>
             <a:pPr algn="ctr"/>
+            <a:endParaRPr/>
           </a:p>
         </p:txBody>
       </p:sp>
@@ -6352,6 +6027,7 @@
           <a:lstStyle/>
           <a:p>
             <a:pPr algn="ctr"/>
+            <a:endParaRPr/>
           </a:p>
         </p:txBody>
       </p:sp>
@@ -6396,6 +6072,7 @@
           <a:lstStyle/>
           <a:p>
             <a:pPr algn="ctr"/>
+            <a:endParaRPr/>
           </a:p>
         </p:txBody>
       </p:sp>
@@ -6463,7 +6140,7 @@
 </file>
 
 <file path=ppt/slides/slide13.xml><?xml version="1.0" encoding="utf-8"?>
-<p:sld xmlns:a="http://schemas.openxmlformats.org/drawingml/2006/main" xmlns:p="http://schemas.openxmlformats.org/presentationml/2006/main" xmlns:r="http://schemas.openxmlformats.org/officeDocument/2006/relationships">
+<p:sld xmlns:a="http://schemas.openxmlformats.org/drawingml/2006/main" xmlns:r="http://schemas.openxmlformats.org/officeDocument/2006/relationships" xmlns:p="http://schemas.openxmlformats.org/presentationml/2006/main">
   <p:cSld>
     <p:bg>
       <p:bgPr>
@@ -6479,7 +6156,14 @@
         <p:cNvGrpSpPr/>
         <p:nvPr/>
       </p:nvGrpSpPr>
-      <p:grpSpPr/>
+      <p:grpSpPr>
+        <a:xfrm>
+          <a:off x="0" y="0"/>
+          <a:ext cx="0" cy="0"/>
+          <a:chOff x="0" y="0"/>
+          <a:chExt cx="0" cy="0"/>
+        </a:xfrm>
+      </p:grpSpPr>
       <p:sp>
         <p:nvSpPr>
           <p:cNvPr id="2" name="TextBox 1"/>
@@ -6576,6 +6260,7 @@
           <a:lstStyle/>
           <a:p>
             <a:pPr algn="ctr"/>
+            <a:endParaRPr/>
           </a:p>
         </p:txBody>
       </p:sp>
@@ -6620,6 +6305,7 @@
           <a:lstStyle/>
           <a:p>
             <a:pPr algn="ctr"/>
+            <a:endParaRPr/>
           </a:p>
         </p:txBody>
       </p:sp>
@@ -6721,6 +6407,7 @@
           <a:lstStyle/>
           <a:p>
             <a:pPr algn="ctr"/>
+            <a:endParaRPr/>
           </a:p>
         </p:txBody>
       </p:sp>
@@ -6765,6 +6452,7 @@
           <a:lstStyle/>
           <a:p>
             <a:pPr algn="ctr"/>
+            <a:endParaRPr/>
           </a:p>
         </p:txBody>
       </p:sp>
@@ -6866,6 +6554,7 @@
           <a:lstStyle/>
           <a:p>
             <a:pPr algn="ctr"/>
+            <a:endParaRPr/>
           </a:p>
         </p:txBody>
       </p:sp>
@@ -6910,6 +6599,7 @@
           <a:lstStyle/>
           <a:p>
             <a:pPr algn="ctr"/>
+            <a:endParaRPr/>
           </a:p>
         </p:txBody>
       </p:sp>
@@ -7011,6 +6701,7 @@
           <a:lstStyle/>
           <a:p>
             <a:pPr algn="ctr"/>
+            <a:endParaRPr/>
           </a:p>
         </p:txBody>
       </p:sp>
@@ -7055,6 +6746,7 @@
           <a:lstStyle/>
           <a:p>
             <a:pPr algn="ctr"/>
+            <a:endParaRPr/>
           </a:p>
         </p:txBody>
       </p:sp>
@@ -7161,7 +6853,7 @@
 </file>
 
 <file path=ppt/slides/slide14.xml><?xml version="1.0" encoding="utf-8"?>
-<p:sld xmlns:a="http://schemas.openxmlformats.org/drawingml/2006/main" xmlns:p="http://schemas.openxmlformats.org/presentationml/2006/main" xmlns:r="http://schemas.openxmlformats.org/officeDocument/2006/relationships">
+<p:sld xmlns:a="http://schemas.openxmlformats.org/drawingml/2006/main" xmlns:r="http://schemas.openxmlformats.org/officeDocument/2006/relationships" xmlns:p="http://schemas.openxmlformats.org/presentationml/2006/main">
   <p:cSld>
     <p:bg>
       <p:bgPr>
@@ -7177,7 +6869,14 @@
         <p:cNvGrpSpPr/>
         <p:nvPr/>
       </p:nvGrpSpPr>
-      <p:grpSpPr/>
+      <p:grpSpPr>
+        <a:xfrm>
+          <a:off x="0" y="0"/>
+          <a:ext cx="0" cy="0"/>
+          <a:chOff x="0" y="0"/>
+          <a:chExt cx="0" cy="0"/>
+        </a:xfrm>
+      </p:grpSpPr>
       <p:sp>
         <p:nvSpPr>
           <p:cNvPr id="2" name="TextBox 1"/>
@@ -7274,6 +6973,7 @@
           <a:lstStyle/>
           <a:p>
             <a:pPr algn="ctr"/>
+            <a:endParaRPr/>
           </a:p>
         </p:txBody>
       </p:sp>
@@ -7318,6 +7018,7 @@
           <a:lstStyle/>
           <a:p>
             <a:pPr algn="ctr"/>
+            <a:endParaRPr/>
           </a:p>
         </p:txBody>
       </p:sp>
@@ -7417,6 +7118,7 @@
           <a:lstStyle/>
           <a:p>
             <a:pPr algn="ctr"/>
+            <a:endParaRPr/>
           </a:p>
         </p:txBody>
       </p:sp>
@@ -7461,6 +7163,7 @@
           <a:lstStyle/>
           <a:p>
             <a:pPr algn="ctr"/>
+            <a:endParaRPr/>
           </a:p>
         </p:txBody>
       </p:sp>
@@ -7560,6 +7263,7 @@
           <a:lstStyle/>
           <a:p>
             <a:pPr algn="ctr"/>
+            <a:endParaRPr/>
           </a:p>
         </p:txBody>
       </p:sp>
@@ -7604,6 +7308,7 @@
           <a:lstStyle/>
           <a:p>
             <a:pPr algn="ctr"/>
+            <a:endParaRPr/>
           </a:p>
         </p:txBody>
       </p:sp>
@@ -7658,149 +7363,6 @@
                 <a:latin typeface="Segoe UI"/>
               </a:rPr>
               <a:t>Đủ để duy trì hạ tầng và đồng bộ danh mục thủ tục trong thời gian thí điểm.</a:t>
-            </a:r>
-          </a:p>
-        </p:txBody>
-      </p:sp>
-      <p:sp>
-        <p:nvSpPr>
-          <p:cNvPr id="12" name="Rectangle 11"/>
-          <p:cNvSpPr/>
-          <p:nvPr/>
-        </p:nvSpPr>
-        <p:spPr>
-          <a:xfrm>
-            <a:off x="822960" y="4572000"/>
-            <a:ext cx="10515600" cy="868680"/>
-          </a:xfrm>
-          <a:prstGeom prst="rect">
-            <a:avLst/>
-          </a:prstGeom>
-          <a:solidFill>
-            <a:srgbClr val="FDF1E7"/>
-          </a:solidFill>
-          <a:ln>
-            <a:noFill/>
-          </a:ln>
-          <a:effectLst/>
-        </p:spPr>
-        <p:style>
-          <a:lnRef idx="1">
-            <a:schemeClr val="accent1"/>
-          </a:lnRef>
-          <a:fillRef idx="3">
-            <a:schemeClr val="accent1"/>
-          </a:fillRef>
-          <a:effectRef idx="2">
-            <a:schemeClr val="accent1"/>
-          </a:effectRef>
-          <a:fontRef idx="minor">
-            <a:schemeClr val="lt1"/>
-          </a:fontRef>
-        </p:style>
-        <p:txBody>
-          <a:bodyPr rtlCol="0" anchor="ctr"/>
-          <a:lstStyle/>
-          <a:p>
-            <a:pPr algn="ctr"/>
-          </a:p>
-        </p:txBody>
-      </p:sp>
-      <p:sp>
-        <p:nvSpPr>
-          <p:cNvPr id="13" name="Rectangle 12"/>
-          <p:cNvSpPr/>
-          <p:nvPr/>
-        </p:nvSpPr>
-        <p:spPr>
-          <a:xfrm>
-            <a:off x="822960" y="4572000"/>
-            <a:ext cx="50292" cy="868680"/>
-          </a:xfrm>
-          <a:prstGeom prst="rect">
-            <a:avLst/>
-          </a:prstGeom>
-          <a:solidFill>
-            <a:srgbClr val="C25A1E"/>
-          </a:solidFill>
-          <a:ln>
-            <a:noFill/>
-          </a:ln>
-          <a:effectLst/>
-        </p:spPr>
-        <p:style>
-          <a:lnRef idx="1">
-            <a:schemeClr val="accent1"/>
-          </a:lnRef>
-          <a:fillRef idx="3">
-            <a:schemeClr val="accent1"/>
-          </a:fillRef>
-          <a:effectRef idx="2">
-            <a:schemeClr val="accent1"/>
-          </a:effectRef>
-          <a:fontRef idx="minor">
-            <a:schemeClr val="lt1"/>
-          </a:fontRef>
-        </p:style>
-        <p:txBody>
-          <a:bodyPr rtlCol="0" anchor="ctr"/>
-          <a:lstStyle/>
-          <a:p>
-            <a:pPr algn="ctr"/>
-          </a:p>
-        </p:txBody>
-      </p:sp>
-      <p:sp>
-        <p:nvSpPr>
-          <p:cNvPr id="14" name="TextBox 13"/>
-          <p:cNvSpPr txBox="1"/>
-          <p:nvPr/>
-        </p:nvSpPr>
-        <p:spPr>
-          <a:xfrm>
-            <a:off x="1051560" y="4700016"/>
-            <a:ext cx="10104120" cy="612647"/>
-          </a:xfrm>
-          <a:prstGeom prst="rect">
-            <a:avLst/>
-          </a:prstGeom>
-          <a:noFill/>
-        </p:spPr>
-        <p:txBody>
-          <a:bodyPr wrap="square">
-            <a:spAutoFit/>
-          </a:bodyPr>
-          <a:lstStyle/>
-          <a:p>
-            <a:pPr algn="l">
-              <a:spcAft>
-                <a:spcPts val="400"/>
-              </a:spcAft>
-            </a:pPr>
-            <a:r>
-              <a:rPr sz="1000" b="1">
-                <a:solidFill>
-                  <a:srgbClr val="C25A1E"/>
-                </a:solidFill>
-                <a:latin typeface="Segoe UI"/>
-              </a:rPr>
-              <a:t>⚠ CẦN SỐ LIỆU THẬT</a:t>
-            </a:r>
-          </a:p>
-          <a:p>
-            <a:pPr algn="l">
-              <a:spcAft>
-                <a:spcPts val="400"/>
-              </a:spcAft>
-            </a:pPr>
-            <a:r>
-              <a:rPr sz="1200" b="0">
-                <a:solidFill>
-                  <a:srgbClr val="1B2A3D"/>
-                </a:solidFill>
-                <a:latin typeface="Segoe UI"/>
-              </a:rPr>
-              <a:t>Điền theo công thức trong tài liệu: “Chúng tôi cần [nguồn lực] để đạt [mục tiêu] trong [thời gian].” Phải là một câu cụ thể, có con số.</a:t>
             </a:r>
           </a:p>
         </p:txBody>
@@ -7853,7 +7415,7 @@
 </file>
 
 <file path=ppt/slides/slide15.xml><?xml version="1.0" encoding="utf-8"?>
-<p:sld xmlns:a="http://schemas.openxmlformats.org/drawingml/2006/main" xmlns:p="http://schemas.openxmlformats.org/presentationml/2006/main" xmlns:r="http://schemas.openxmlformats.org/officeDocument/2006/relationships">
+<p:sld xmlns:a="http://schemas.openxmlformats.org/drawingml/2006/main" xmlns:r="http://schemas.openxmlformats.org/officeDocument/2006/relationships" xmlns:p="http://schemas.openxmlformats.org/presentationml/2006/main">
   <p:cSld>
     <p:bg>
       <p:bgPr>
@@ -7869,7 +7431,14 @@
         <p:cNvGrpSpPr/>
         <p:nvPr/>
       </p:nvGrpSpPr>
-      <p:grpSpPr/>
+      <p:grpSpPr>
+        <a:xfrm>
+          <a:off x="0" y="0"/>
+          <a:ext cx="0" cy="0"/>
+          <a:chOff x="0" y="0"/>
+          <a:chExt cx="0" cy="0"/>
+        </a:xfrm>
+      </p:grpSpPr>
       <p:sp>
         <p:nvSpPr>
           <p:cNvPr id="2" name="TextBox 1"/>
@@ -7966,6 +7535,7 @@
           <a:lstStyle/>
           <a:p>
             <a:pPr algn="ctr"/>
+            <a:endParaRPr/>
           </a:p>
         </p:txBody>
       </p:sp>
@@ -8033,7 +7603,7 @@
 </file>
 
 <file path=ppt/slides/slide2.xml><?xml version="1.0" encoding="utf-8"?>
-<p:sld xmlns:a="http://schemas.openxmlformats.org/drawingml/2006/main" xmlns:p="http://schemas.openxmlformats.org/presentationml/2006/main" xmlns:r="http://schemas.openxmlformats.org/officeDocument/2006/relationships">
+<p:sld xmlns:a="http://schemas.openxmlformats.org/drawingml/2006/main" xmlns:r="http://schemas.openxmlformats.org/officeDocument/2006/relationships" xmlns:p="http://schemas.openxmlformats.org/presentationml/2006/main">
   <p:cSld>
     <p:bg>
       <p:bgPr>
@@ -8049,7 +7619,14 @@
         <p:cNvGrpSpPr/>
         <p:nvPr/>
       </p:nvGrpSpPr>
-      <p:grpSpPr/>
+      <p:grpSpPr>
+        <a:xfrm>
+          <a:off x="0" y="0"/>
+          <a:ext cx="0" cy="0"/>
+          <a:chOff x="0" y="0"/>
+          <a:chExt cx="0" cy="0"/>
+        </a:xfrm>
+      </p:grpSpPr>
       <p:sp>
         <p:nvSpPr>
           <p:cNvPr id="2" name="TextBox 1"/>
@@ -8147,6 +7724,7 @@
           <a:lstStyle/>
           <a:p>
             <a:pPr algn="ctr"/>
+            <a:endParaRPr/>
           </a:p>
         </p:txBody>
       </p:sp>
@@ -8191,6 +7769,7 @@
           <a:lstStyle/>
           <a:p>
             <a:pPr algn="ctr"/>
+            <a:endParaRPr/>
           </a:p>
         </p:txBody>
       </p:sp>
@@ -8290,6 +7869,7 @@
           <a:lstStyle/>
           <a:p>
             <a:pPr algn="ctr"/>
+            <a:endParaRPr/>
           </a:p>
         </p:txBody>
       </p:sp>
@@ -8334,6 +7914,7 @@
           <a:lstStyle/>
           <a:p>
             <a:pPr algn="ctr"/>
+            <a:endParaRPr/>
           </a:p>
         </p:txBody>
       </p:sp>
@@ -8433,6 +8014,7 @@
           <a:lstStyle/>
           <a:p>
             <a:pPr algn="ctr"/>
+            <a:endParaRPr/>
           </a:p>
         </p:txBody>
       </p:sp>
@@ -8477,6 +8059,7 @@
           <a:lstStyle/>
           <a:p>
             <a:pPr algn="ctr"/>
+            <a:endParaRPr/>
           </a:p>
         </p:txBody>
       </p:sp>
@@ -8576,6 +8159,7 @@
           <a:lstStyle/>
           <a:p>
             <a:pPr algn="ctr"/>
+            <a:endParaRPr/>
           </a:p>
         </p:txBody>
       </p:sp>
@@ -8620,6 +8204,7 @@
           <a:lstStyle/>
           <a:p>
             <a:pPr algn="ctr"/>
+            <a:endParaRPr/>
           </a:p>
         </p:txBody>
       </p:sp>
@@ -8726,7 +8311,7 @@
 </file>
 
 <file path=ppt/slides/slide3.xml><?xml version="1.0" encoding="utf-8"?>
-<p:sld xmlns:a="http://schemas.openxmlformats.org/drawingml/2006/main" xmlns:p="http://schemas.openxmlformats.org/presentationml/2006/main" xmlns:r="http://schemas.openxmlformats.org/officeDocument/2006/relationships">
+<p:sld xmlns:a="http://schemas.openxmlformats.org/drawingml/2006/main" xmlns:r="http://schemas.openxmlformats.org/officeDocument/2006/relationships" xmlns:p="http://schemas.openxmlformats.org/presentationml/2006/main">
   <p:cSld>
     <p:bg>
       <p:bgPr>
@@ -8742,7 +8327,14 @@
         <p:cNvGrpSpPr/>
         <p:nvPr/>
       </p:nvGrpSpPr>
-      <p:grpSpPr/>
+      <p:grpSpPr>
+        <a:xfrm>
+          <a:off x="0" y="0"/>
+          <a:ext cx="0" cy="0"/>
+          <a:chOff x="0" y="0"/>
+          <a:chExt cx="0" cy="0"/>
+        </a:xfrm>
+      </p:grpSpPr>
       <p:sp>
         <p:nvSpPr>
           <p:cNvPr id="2" name="TextBox 1"/>
@@ -8806,7 +8398,7 @@
         </p:nvSpPr>
         <p:spPr>
           <a:xfrm>
-            <a:off x="685800" y="2286000"/>
+            <a:off x="685800" y="1363210"/>
             <a:ext cx="10789920" cy="1170432"/>
           </a:xfrm>
           <a:prstGeom prst="rect">
@@ -8839,6 +8431,7 @@
           <a:lstStyle/>
           <a:p>
             <a:pPr algn="ctr"/>
+            <a:endParaRPr/>
           </a:p>
         </p:txBody>
       </p:sp>
@@ -8850,7 +8443,7 @@
         </p:nvSpPr>
         <p:spPr>
           <a:xfrm>
-            <a:off x="685800" y="2286000"/>
+            <a:off x="685800" y="1363210"/>
             <a:ext cx="50292" cy="1170432"/>
           </a:xfrm>
           <a:prstGeom prst="rect">
@@ -8883,6 +8476,7 @@
           <a:lstStyle/>
           <a:p>
             <a:pPr algn="ctr"/>
+            <a:endParaRPr/>
           </a:p>
         </p:txBody>
       </p:sp>
@@ -8894,7 +8488,7 @@
         </p:nvSpPr>
         <p:spPr>
           <a:xfrm>
-            <a:off x="914400" y="2432304"/>
+            <a:off x="914400" y="1509514"/>
             <a:ext cx="10378440" cy="896112"/>
           </a:xfrm>
           <a:prstGeom prst="rect">
@@ -8949,7 +8543,7 @@
         </p:nvSpPr>
         <p:spPr>
           <a:xfrm>
-            <a:off x="685800" y="3611880"/>
+            <a:off x="685800" y="2689090"/>
             <a:ext cx="10789920" cy="1170432"/>
           </a:xfrm>
           <a:prstGeom prst="rect">
@@ -8982,6 +8576,7 @@
           <a:lstStyle/>
           <a:p>
             <a:pPr algn="ctr"/>
+            <a:endParaRPr/>
           </a:p>
         </p:txBody>
       </p:sp>
@@ -8993,7 +8588,7 @@
         </p:nvSpPr>
         <p:spPr>
           <a:xfrm>
-            <a:off x="685800" y="3611880"/>
+            <a:off x="685800" y="2689090"/>
             <a:ext cx="50292" cy="1170432"/>
           </a:xfrm>
           <a:prstGeom prst="rect">
@@ -9026,6 +8621,7 @@
           <a:lstStyle/>
           <a:p>
             <a:pPr algn="ctr"/>
+            <a:endParaRPr/>
           </a:p>
         </p:txBody>
       </p:sp>
@@ -9037,7 +8633,7 @@
         </p:nvSpPr>
         <p:spPr>
           <a:xfrm>
-            <a:off x="914400" y="3758184"/>
+            <a:off x="914400" y="2835394"/>
             <a:ext cx="10378440" cy="896112"/>
           </a:xfrm>
           <a:prstGeom prst="rect">
@@ -9092,7 +8688,7 @@
         </p:nvSpPr>
         <p:spPr>
           <a:xfrm>
-            <a:off x="685800" y="4937760"/>
+            <a:off x="685800" y="4014970"/>
             <a:ext cx="10789920" cy="1170432"/>
           </a:xfrm>
           <a:prstGeom prst="rect">
@@ -9125,6 +8721,7 @@
           <a:lstStyle/>
           <a:p>
             <a:pPr algn="ctr"/>
+            <a:endParaRPr/>
           </a:p>
         </p:txBody>
       </p:sp>
@@ -9136,7 +8733,7 @@
         </p:nvSpPr>
         <p:spPr>
           <a:xfrm>
-            <a:off x="685800" y="4937760"/>
+            <a:off x="685800" y="4014970"/>
             <a:ext cx="50292" cy="1170432"/>
           </a:xfrm>
           <a:prstGeom prst="rect">
@@ -9169,6 +8766,7 @@
           <a:lstStyle/>
           <a:p>
             <a:pPr algn="ctr"/>
+            <a:endParaRPr/>
           </a:p>
         </p:txBody>
       </p:sp>
@@ -9180,7 +8778,7 @@
         </p:nvSpPr>
         <p:spPr>
           <a:xfrm>
-            <a:off x="914400" y="5084064"/>
+            <a:off x="914400" y="4161274"/>
             <a:ext cx="10378440" cy="896112"/>
           </a:xfrm>
           <a:prstGeom prst="rect">
@@ -9268,6 +8866,7 @@
           <a:lstStyle/>
           <a:p>
             <a:pPr algn="ctr"/>
+            <a:endParaRPr/>
           </a:p>
         </p:txBody>
       </p:sp>
@@ -9312,6 +8911,7 @@
           <a:lstStyle/>
           <a:p>
             <a:pPr algn="ctr"/>
+            <a:endParaRPr/>
           </a:p>
         </p:txBody>
       </p:sp>
@@ -9379,7 +8979,7 @@
 </file>
 
 <file path=ppt/slides/slide4.xml><?xml version="1.0" encoding="utf-8"?>
-<p:sld xmlns:a="http://schemas.openxmlformats.org/drawingml/2006/main" xmlns:p="http://schemas.openxmlformats.org/presentationml/2006/main" xmlns:r="http://schemas.openxmlformats.org/officeDocument/2006/relationships">
+<p:sld xmlns:a="http://schemas.openxmlformats.org/drawingml/2006/main" xmlns:r="http://schemas.openxmlformats.org/officeDocument/2006/relationships" xmlns:p="http://schemas.openxmlformats.org/presentationml/2006/main">
   <p:cSld>
     <p:bg>
       <p:bgPr>
@@ -9395,7 +8995,14 @@
         <p:cNvGrpSpPr/>
         <p:nvPr/>
       </p:nvGrpSpPr>
-      <p:grpSpPr/>
+      <p:grpSpPr>
+        <a:xfrm>
+          <a:off x="0" y="0"/>
+          <a:ext cx="0" cy="0"/>
+          <a:chOff x="0" y="0"/>
+          <a:chExt cx="0" cy="0"/>
+        </a:xfrm>
+      </p:grpSpPr>
       <p:sp>
         <p:nvSpPr>
           <p:cNvPr id="2" name="TextBox 1"/>
@@ -9532,6 +9139,7 @@
           <a:lstStyle/>
           <a:p>
             <a:pPr algn="ctr"/>
+            <a:endParaRPr/>
           </a:p>
         </p:txBody>
       </p:sp>
@@ -9576,6 +9184,7 @@
           <a:lstStyle/>
           <a:p>
             <a:pPr algn="ctr"/>
+            <a:endParaRPr/>
           </a:p>
         </p:txBody>
       </p:sp>
@@ -9675,6 +9284,7 @@
           <a:lstStyle/>
           <a:p>
             <a:pPr algn="ctr"/>
+            <a:endParaRPr/>
           </a:p>
         </p:txBody>
       </p:sp>
@@ -9719,6 +9329,7 @@
           <a:lstStyle/>
           <a:p>
             <a:pPr algn="ctr"/>
+            <a:endParaRPr/>
           </a:p>
         </p:txBody>
       </p:sp>
@@ -9818,6 +9429,7 @@
           <a:lstStyle/>
           <a:p>
             <a:pPr algn="ctr"/>
+            <a:endParaRPr/>
           </a:p>
         </p:txBody>
       </p:sp>
@@ -9862,6 +9474,7 @@
           <a:lstStyle/>
           <a:p>
             <a:pPr algn="ctr"/>
+            <a:endParaRPr/>
           </a:p>
         </p:txBody>
       </p:sp>
@@ -9968,7 +9581,7 @@
 </file>
 
 <file path=ppt/slides/slide5.xml><?xml version="1.0" encoding="utf-8"?>
-<p:sld xmlns:a="http://schemas.openxmlformats.org/drawingml/2006/main" xmlns:p="http://schemas.openxmlformats.org/presentationml/2006/main" xmlns:r="http://schemas.openxmlformats.org/officeDocument/2006/relationships">
+<p:sld xmlns:a="http://schemas.openxmlformats.org/drawingml/2006/main" xmlns:r="http://schemas.openxmlformats.org/officeDocument/2006/relationships" xmlns:p="http://schemas.openxmlformats.org/presentationml/2006/main">
   <p:cSld>
     <p:bg>
       <p:bgPr>
@@ -9984,7 +9597,14 @@
         <p:cNvGrpSpPr/>
         <p:nvPr/>
       </p:nvGrpSpPr>
-      <p:grpSpPr/>
+      <p:grpSpPr>
+        <a:xfrm>
+          <a:off x="0" y="0"/>
+          <a:ext cx="0" cy="0"/>
+          <a:chOff x="0" y="0"/>
+          <a:chExt cx="0" cy="0"/>
+        </a:xfrm>
+      </p:grpSpPr>
       <p:sp>
         <p:nvSpPr>
           <p:cNvPr id="2" name="TextBox 1"/>
@@ -10097,6 +9717,7 @@
           <a:lstStyle/>
           <a:p>
             <a:pPr algn="ctr"/>
+            <a:endParaRPr/>
           </a:p>
         </p:txBody>
       </p:sp>
@@ -10141,6 +9762,7 @@
           <a:lstStyle/>
           <a:p>
             <a:pPr algn="ctr"/>
+            <a:endParaRPr/>
           </a:p>
         </p:txBody>
       </p:sp>
@@ -10240,6 +9862,7 @@
           <a:lstStyle/>
           <a:p>
             <a:pPr algn="ctr"/>
+            <a:endParaRPr/>
           </a:p>
         </p:txBody>
       </p:sp>
@@ -10284,6 +9907,7 @@
           <a:lstStyle/>
           <a:p>
             <a:pPr algn="ctr"/>
+            <a:endParaRPr/>
           </a:p>
         </p:txBody>
       </p:sp>
@@ -10383,6 +10007,7 @@
           <a:lstStyle/>
           <a:p>
             <a:pPr algn="ctr"/>
+            <a:endParaRPr/>
           </a:p>
         </p:txBody>
       </p:sp>
@@ -10427,6 +10052,7 @@
           <a:lstStyle/>
           <a:p>
             <a:pPr algn="ctr"/>
+            <a:endParaRPr/>
           </a:p>
         </p:txBody>
       </p:sp>
@@ -10526,6 +10152,7 @@
           <a:lstStyle/>
           <a:p>
             <a:pPr algn="ctr"/>
+            <a:endParaRPr/>
           </a:p>
         </p:txBody>
       </p:sp>
@@ -10570,6 +10197,7 @@
           <a:lstStyle/>
           <a:p>
             <a:pPr algn="ctr"/>
+            <a:endParaRPr/>
           </a:p>
         </p:txBody>
       </p:sp>
@@ -10676,7 +10304,7 @@
 </file>
 
 <file path=ppt/slides/slide6.xml><?xml version="1.0" encoding="utf-8"?>
-<p:sld xmlns:a="http://schemas.openxmlformats.org/drawingml/2006/main" xmlns:p="http://schemas.openxmlformats.org/presentationml/2006/main" xmlns:r="http://schemas.openxmlformats.org/officeDocument/2006/relationships">
+<p:sld xmlns:a="http://schemas.openxmlformats.org/drawingml/2006/main" xmlns:r="http://schemas.openxmlformats.org/officeDocument/2006/relationships" xmlns:p="http://schemas.openxmlformats.org/presentationml/2006/main">
   <p:cSld>
     <p:bg>
       <p:bgPr>
@@ -10692,7 +10320,14 @@
         <p:cNvGrpSpPr/>
         <p:nvPr/>
       </p:nvGrpSpPr>
-      <p:grpSpPr/>
+      <p:grpSpPr>
+        <a:xfrm>
+          <a:off x="0" y="0"/>
+          <a:ext cx="0" cy="0"/>
+          <a:chOff x="0" y="0"/>
+          <a:chExt cx="0" cy="0"/>
+        </a:xfrm>
+      </p:grpSpPr>
       <p:sp>
         <p:nvSpPr>
           <p:cNvPr id="2" name="TextBox 1"/>
@@ -10756,7 +10391,7 @@
         </p:nvSpPr>
         <p:spPr>
           <a:xfrm>
-            <a:off x="685800" y="2286000"/>
+            <a:off x="685800" y="1723937"/>
             <a:ext cx="10789920" cy="1143000"/>
           </a:xfrm>
           <a:prstGeom prst="rect">
@@ -10789,6 +10424,7 @@
           <a:lstStyle/>
           <a:p>
             <a:pPr algn="ctr"/>
+            <a:endParaRPr/>
           </a:p>
         </p:txBody>
       </p:sp>
@@ -10800,7 +10436,7 @@
         </p:nvSpPr>
         <p:spPr>
           <a:xfrm>
-            <a:off x="685800" y="2286000"/>
+            <a:off x="685800" y="1732326"/>
             <a:ext cx="50292" cy="1143000"/>
           </a:xfrm>
           <a:prstGeom prst="rect">
@@ -10833,6 +10469,7 @@
           <a:lstStyle/>
           <a:p>
             <a:pPr algn="ctr"/>
+            <a:endParaRPr/>
           </a:p>
         </p:txBody>
       </p:sp>
@@ -10844,7 +10481,7 @@
         </p:nvSpPr>
         <p:spPr>
           <a:xfrm>
-            <a:off x="914400" y="2432304"/>
+            <a:off x="914400" y="1870241"/>
             <a:ext cx="10378440" cy="868680"/>
           </a:xfrm>
           <a:prstGeom prst="rect">
@@ -10899,7 +10536,7 @@
         </p:nvSpPr>
         <p:spPr>
           <a:xfrm>
-            <a:off x="685800" y="3584448"/>
+            <a:off x="685800" y="3005607"/>
             <a:ext cx="10789920" cy="1143000"/>
           </a:xfrm>
           <a:prstGeom prst="rect">
@@ -10932,6 +10569,7 @@
           <a:lstStyle/>
           <a:p>
             <a:pPr algn="ctr"/>
+            <a:endParaRPr/>
           </a:p>
         </p:txBody>
       </p:sp>
@@ -10943,7 +10581,7 @@
         </p:nvSpPr>
         <p:spPr>
           <a:xfrm>
-            <a:off x="685800" y="3584448"/>
+            <a:off x="685800" y="2988829"/>
             <a:ext cx="50292" cy="1143000"/>
           </a:xfrm>
           <a:prstGeom prst="rect">
@@ -10976,6 +10614,7 @@
           <a:lstStyle/>
           <a:p>
             <a:pPr algn="ctr"/>
+            <a:endParaRPr/>
           </a:p>
         </p:txBody>
       </p:sp>
@@ -10987,7 +10626,7 @@
         </p:nvSpPr>
         <p:spPr>
           <a:xfrm>
-            <a:off x="914400" y="3730752"/>
+            <a:off x="914400" y="3168689"/>
             <a:ext cx="10378440" cy="868680"/>
           </a:xfrm>
           <a:prstGeom prst="rect">
@@ -11042,7 +10681,7 @@
         </p:nvSpPr>
         <p:spPr>
           <a:xfrm>
-            <a:off x="685800" y="4882896"/>
+            <a:off x="685800" y="4320833"/>
             <a:ext cx="10789920" cy="1143000"/>
           </a:xfrm>
           <a:prstGeom prst="rect">
@@ -11075,6 +10714,7 @@
           <a:lstStyle/>
           <a:p>
             <a:pPr algn="ctr"/>
+            <a:endParaRPr/>
           </a:p>
         </p:txBody>
       </p:sp>
@@ -11086,7 +10726,7 @@
         </p:nvSpPr>
         <p:spPr>
           <a:xfrm>
-            <a:off x="685800" y="4882896"/>
+            <a:off x="685800" y="4304055"/>
             <a:ext cx="50292" cy="1143000"/>
           </a:xfrm>
           <a:prstGeom prst="rect">
@@ -11119,6 +10759,7 @@
           <a:lstStyle/>
           <a:p>
             <a:pPr algn="ctr"/>
+            <a:endParaRPr/>
           </a:p>
         </p:txBody>
       </p:sp>
@@ -11130,7 +10771,7 @@
         </p:nvSpPr>
         <p:spPr>
           <a:xfrm>
-            <a:off x="914400" y="5029200"/>
+            <a:off x="914400" y="4467137"/>
             <a:ext cx="10378440" cy="868680"/>
           </a:xfrm>
           <a:prstGeom prst="rect">
@@ -11218,6 +10859,7 @@
           <a:lstStyle/>
           <a:p>
             <a:pPr algn="ctr"/>
+            <a:endParaRPr/>
           </a:p>
         </p:txBody>
       </p:sp>
@@ -11269,7 +10911,7 @@
 </file>
 
 <file path=ppt/slides/slide7.xml><?xml version="1.0" encoding="utf-8"?>
-<p:sld xmlns:a="http://schemas.openxmlformats.org/drawingml/2006/main" xmlns:p="http://schemas.openxmlformats.org/presentationml/2006/main" xmlns:r="http://schemas.openxmlformats.org/officeDocument/2006/relationships">
+<p:sld xmlns:a="http://schemas.openxmlformats.org/drawingml/2006/main" xmlns:r="http://schemas.openxmlformats.org/officeDocument/2006/relationships" xmlns:p="http://schemas.openxmlformats.org/presentationml/2006/main">
   <p:cSld>
     <p:bg>
       <p:bgPr>
@@ -11285,7 +10927,14 @@
         <p:cNvGrpSpPr/>
         <p:nvPr/>
       </p:nvGrpSpPr>
-      <p:grpSpPr/>
+      <p:grpSpPr>
+        <a:xfrm>
+          <a:off x="0" y="0"/>
+          <a:ext cx="0" cy="0"/>
+          <a:chOff x="0" y="0"/>
+          <a:chExt cx="0" cy="0"/>
+        </a:xfrm>
+      </p:grpSpPr>
       <p:sp>
         <p:nvSpPr>
           <p:cNvPr id="2" name="TextBox 1"/>
@@ -11382,6 +11031,7 @@
           <a:lstStyle/>
           <a:p>
             <a:pPr algn="ctr"/>
+            <a:endParaRPr/>
           </a:p>
         </p:txBody>
       </p:sp>
@@ -11426,6 +11076,7 @@
           <a:lstStyle/>
           <a:p>
             <a:pPr algn="ctr"/>
+            <a:endParaRPr/>
           </a:p>
         </p:txBody>
       </p:sp>
@@ -11525,6 +11176,7 @@
           <a:lstStyle/>
           <a:p>
             <a:pPr algn="ctr"/>
+            <a:endParaRPr/>
           </a:p>
         </p:txBody>
       </p:sp>
@@ -11569,6 +11221,7 @@
           <a:lstStyle/>
           <a:p>
             <a:pPr algn="ctr"/>
+            <a:endParaRPr/>
           </a:p>
         </p:txBody>
       </p:sp>
@@ -11668,6 +11321,7 @@
           <a:lstStyle/>
           <a:p>
             <a:pPr algn="ctr"/>
+            <a:endParaRPr/>
           </a:p>
         </p:txBody>
       </p:sp>
@@ -11712,6 +11366,7 @@
           <a:lstStyle/>
           <a:p>
             <a:pPr algn="ctr"/>
+            <a:endParaRPr/>
           </a:p>
         </p:txBody>
       </p:sp>
@@ -11811,6 +11466,7 @@
           <a:lstStyle/>
           <a:p>
             <a:pPr algn="ctr"/>
+            <a:endParaRPr/>
           </a:p>
         </p:txBody>
       </p:sp>
@@ -11849,149 +11505,6 @@
                 <a:latin typeface="Segoe UI"/>
               </a:rPr>
               <a:t>Chốt nhầm thủ tục: 0/60 trên bộ đánh giá giữ riêng. Khi không chắc, hệ thống hỏi lại chứ không đoán — vì chốt nhầm thủ tục làm sai toàn bộ checklist phía sau.</a:t>
-            </a:r>
-          </a:p>
-        </p:txBody>
-      </p:sp>
-      <p:sp>
-        <p:nvSpPr>
-          <p:cNvPr id="14" name="Rectangle 13"/>
-          <p:cNvSpPr/>
-          <p:nvPr/>
-        </p:nvSpPr>
-        <p:spPr>
-          <a:xfrm>
-            <a:off x="685800" y="5760720"/>
-            <a:ext cx="10789920" cy="685800"/>
-          </a:xfrm>
-          <a:prstGeom prst="rect">
-            <a:avLst/>
-          </a:prstGeom>
-          <a:solidFill>
-            <a:srgbClr val="FDF1E7"/>
-          </a:solidFill>
-          <a:ln>
-            <a:noFill/>
-          </a:ln>
-          <a:effectLst/>
-        </p:spPr>
-        <p:style>
-          <a:lnRef idx="1">
-            <a:schemeClr val="accent1"/>
-          </a:lnRef>
-          <a:fillRef idx="3">
-            <a:schemeClr val="accent1"/>
-          </a:fillRef>
-          <a:effectRef idx="2">
-            <a:schemeClr val="accent1"/>
-          </a:effectRef>
-          <a:fontRef idx="minor">
-            <a:schemeClr val="lt1"/>
-          </a:fontRef>
-        </p:style>
-        <p:txBody>
-          <a:bodyPr rtlCol="0" anchor="ctr"/>
-          <a:lstStyle/>
-          <a:p>
-            <a:pPr algn="ctr"/>
-          </a:p>
-        </p:txBody>
-      </p:sp>
-      <p:sp>
-        <p:nvSpPr>
-          <p:cNvPr id="15" name="Rectangle 14"/>
-          <p:cNvSpPr/>
-          <p:nvPr/>
-        </p:nvSpPr>
-        <p:spPr>
-          <a:xfrm>
-            <a:off x="685800" y="5760720"/>
-            <a:ext cx="50292" cy="685800"/>
-          </a:xfrm>
-          <a:prstGeom prst="rect">
-            <a:avLst/>
-          </a:prstGeom>
-          <a:solidFill>
-            <a:srgbClr val="C25A1E"/>
-          </a:solidFill>
-          <a:ln>
-            <a:noFill/>
-          </a:ln>
-          <a:effectLst/>
-        </p:spPr>
-        <p:style>
-          <a:lnRef idx="1">
-            <a:schemeClr val="accent1"/>
-          </a:lnRef>
-          <a:fillRef idx="3">
-            <a:schemeClr val="accent1"/>
-          </a:fillRef>
-          <a:effectRef idx="2">
-            <a:schemeClr val="accent1"/>
-          </a:effectRef>
-          <a:fontRef idx="minor">
-            <a:schemeClr val="lt1"/>
-          </a:fontRef>
-        </p:style>
-        <p:txBody>
-          <a:bodyPr rtlCol="0" anchor="ctr"/>
-          <a:lstStyle/>
-          <a:p>
-            <a:pPr algn="ctr"/>
-          </a:p>
-        </p:txBody>
-      </p:sp>
-      <p:sp>
-        <p:nvSpPr>
-          <p:cNvPr id="16" name="TextBox 15"/>
-          <p:cNvSpPr txBox="1"/>
-          <p:nvPr/>
-        </p:nvSpPr>
-        <p:spPr>
-          <a:xfrm>
-            <a:off x="914400" y="5888736"/>
-            <a:ext cx="10378440" cy="429768"/>
-          </a:xfrm>
-          <a:prstGeom prst="rect">
-            <a:avLst/>
-          </a:prstGeom>
-          <a:noFill/>
-        </p:spPr>
-        <p:txBody>
-          <a:bodyPr wrap="square">
-            <a:spAutoFit/>
-          </a:bodyPr>
-          <a:lstStyle/>
-          <a:p>
-            <a:pPr algn="l">
-              <a:spcAft>
-                <a:spcPts val="400"/>
-              </a:spcAft>
-            </a:pPr>
-            <a:r>
-              <a:rPr sz="1000" b="1">
-                <a:solidFill>
-                  <a:srgbClr val="C25A1E"/>
-                </a:solidFill>
-                <a:latin typeface="Segoe UI"/>
-              </a:rPr>
-              <a:t>⚠ CẦN SỐ LIỆU THẬT</a:t>
-            </a:r>
-          </a:p>
-          <a:p>
-            <a:pPr algn="l">
-              <a:spcAft>
-                <a:spcPts val="400"/>
-              </a:spcAft>
-            </a:pPr>
-            <a:r>
-              <a:rPr sz="1200" b="0">
-                <a:solidFill>
-                  <a:srgbClr val="1B2A3D"/>
-                </a:solidFill>
-                <a:latin typeface="Segoe UI"/>
-              </a:rPr>
-              <a:t>Traction thật: số người dùng thử, số hồ sơ chạy qua hệ thống, phản hồi của cán bộ.</a:t>
             </a:r>
           </a:p>
         </p:txBody>
@@ -12005,7 +11518,7 @@
 </file>
 
 <file path=ppt/slides/slide8.xml><?xml version="1.0" encoding="utf-8"?>
-<p:sld xmlns:a="http://schemas.openxmlformats.org/drawingml/2006/main" xmlns:p="http://schemas.openxmlformats.org/presentationml/2006/main" xmlns:r="http://schemas.openxmlformats.org/officeDocument/2006/relationships">
+<p:sld xmlns:a="http://schemas.openxmlformats.org/drawingml/2006/main" xmlns:r="http://schemas.openxmlformats.org/officeDocument/2006/relationships" xmlns:p="http://schemas.openxmlformats.org/presentationml/2006/main">
   <p:cSld>
     <p:bg>
       <p:bgPr>
@@ -12021,7 +11534,14 @@
         <p:cNvGrpSpPr/>
         <p:nvPr/>
       </p:nvGrpSpPr>
-      <p:grpSpPr/>
+      <p:grpSpPr>
+        <a:xfrm>
+          <a:off x="0" y="0"/>
+          <a:ext cx="0" cy="0"/>
+          <a:chOff x="0" y="0"/>
+          <a:chExt cx="0" cy="0"/>
+        </a:xfrm>
+      </p:grpSpPr>
       <p:sp>
         <p:nvSpPr>
           <p:cNvPr id="2" name="TextBox 1"/>
@@ -12085,7 +11605,7 @@
         </p:nvSpPr>
         <p:spPr>
           <a:xfrm>
-            <a:off x="685800" y="2286000"/>
+            <a:off x="685800" y="1572935"/>
             <a:ext cx="10789920" cy="1143000"/>
           </a:xfrm>
           <a:prstGeom prst="rect">
@@ -12118,6 +11638,7 @@
           <a:lstStyle/>
           <a:p>
             <a:pPr algn="ctr"/>
+            <a:endParaRPr/>
           </a:p>
         </p:txBody>
       </p:sp>
@@ -12129,7 +11650,7 @@
         </p:nvSpPr>
         <p:spPr>
           <a:xfrm>
-            <a:off x="685800" y="2286000"/>
+            <a:off x="685800" y="1572935"/>
             <a:ext cx="50292" cy="1143000"/>
           </a:xfrm>
           <a:prstGeom prst="rect">
@@ -12162,6 +11683,7 @@
           <a:lstStyle/>
           <a:p>
             <a:pPr algn="ctr"/>
+            <a:endParaRPr/>
           </a:p>
         </p:txBody>
       </p:sp>
@@ -12173,7 +11695,7 @@
         </p:nvSpPr>
         <p:spPr>
           <a:xfrm>
-            <a:off x="914400" y="2432304"/>
+            <a:off x="914400" y="1719239"/>
             <a:ext cx="10378440" cy="868680"/>
           </a:xfrm>
           <a:prstGeom prst="rect">
@@ -12228,7 +11750,7 @@
         </p:nvSpPr>
         <p:spPr>
           <a:xfrm>
-            <a:off x="685800" y="3584448"/>
+            <a:off x="685800" y="2871383"/>
             <a:ext cx="10789920" cy="1143000"/>
           </a:xfrm>
           <a:prstGeom prst="rect">
@@ -12261,6 +11783,7 @@
           <a:lstStyle/>
           <a:p>
             <a:pPr algn="ctr"/>
+            <a:endParaRPr/>
           </a:p>
         </p:txBody>
       </p:sp>
@@ -12272,7 +11795,7 @@
         </p:nvSpPr>
         <p:spPr>
           <a:xfrm>
-            <a:off x="685800" y="3584448"/>
+            <a:off x="685800" y="2871383"/>
             <a:ext cx="50292" cy="1143000"/>
           </a:xfrm>
           <a:prstGeom prst="rect">
@@ -12305,6 +11828,7 @@
           <a:lstStyle/>
           <a:p>
             <a:pPr algn="ctr"/>
+            <a:endParaRPr/>
           </a:p>
         </p:txBody>
       </p:sp>
@@ -12316,7 +11840,7 @@
         </p:nvSpPr>
         <p:spPr>
           <a:xfrm>
-            <a:off x="914400" y="3730752"/>
+            <a:off x="914400" y="3017687"/>
             <a:ext cx="10378440" cy="868680"/>
           </a:xfrm>
           <a:prstGeom prst="rect">
@@ -12371,7 +11895,7 @@
         </p:nvSpPr>
         <p:spPr>
           <a:xfrm>
-            <a:off x="685800" y="4882896"/>
+            <a:off x="685800" y="4169831"/>
             <a:ext cx="10789920" cy="1143000"/>
           </a:xfrm>
           <a:prstGeom prst="rect">
@@ -12404,6 +11928,7 @@
           <a:lstStyle/>
           <a:p>
             <a:pPr algn="ctr"/>
+            <a:endParaRPr/>
           </a:p>
         </p:txBody>
       </p:sp>
@@ -12415,7 +11940,7 @@
         </p:nvSpPr>
         <p:spPr>
           <a:xfrm>
-            <a:off x="685800" y="4882896"/>
+            <a:off x="685800" y="4169831"/>
             <a:ext cx="50292" cy="1143000"/>
           </a:xfrm>
           <a:prstGeom prst="rect">
@@ -12448,6 +11973,7 @@
           <a:lstStyle/>
           <a:p>
             <a:pPr algn="ctr"/>
+            <a:endParaRPr/>
           </a:p>
         </p:txBody>
       </p:sp>
@@ -12459,7 +11985,7 @@
         </p:nvSpPr>
         <p:spPr>
           <a:xfrm>
-            <a:off x="914400" y="5029200"/>
+            <a:off x="914400" y="4316135"/>
             <a:ext cx="10378440" cy="868680"/>
           </a:xfrm>
           <a:prstGeom prst="rect">
@@ -12479,14 +12005,182 @@
               </a:spcAft>
             </a:pPr>
             <a:r>
-              <a:rPr sz="1500" b="1">
+              <a:rPr sz="1500" b="1" dirty="0" err="1">
                 <a:solidFill>
                   <a:srgbClr val="0D3158"/>
                 </a:solidFill>
                 <a:latin typeface="Segoe UI"/>
               </a:rPr>
-              <a:t>Bộ đánh giá giữ riêng đã bắt được lỗi thật</a:t>
-            </a:r>
+              <a:t>Bộ</a:t>
+            </a:r>
+            <a:r>
+              <a:rPr sz="1500" b="1" dirty="0">
+                <a:solidFill>
+                  <a:srgbClr val="0D3158"/>
+                </a:solidFill>
+                <a:latin typeface="Segoe UI"/>
+              </a:rPr>
+              <a:t> </a:t>
+            </a:r>
+            <a:r>
+              <a:rPr sz="1500" b="1" dirty="0" err="1">
+                <a:solidFill>
+                  <a:srgbClr val="0D3158"/>
+                </a:solidFill>
+                <a:latin typeface="Segoe UI"/>
+              </a:rPr>
+              <a:t>đánh</a:t>
+            </a:r>
+            <a:r>
+              <a:rPr sz="1500" b="1" dirty="0">
+                <a:solidFill>
+                  <a:srgbClr val="0D3158"/>
+                </a:solidFill>
+                <a:latin typeface="Segoe UI"/>
+              </a:rPr>
+              <a:t> </a:t>
+            </a:r>
+            <a:r>
+              <a:rPr sz="1500" b="1" dirty="0" err="1">
+                <a:solidFill>
+                  <a:srgbClr val="0D3158"/>
+                </a:solidFill>
+                <a:latin typeface="Segoe UI"/>
+              </a:rPr>
+              <a:t>giá</a:t>
+            </a:r>
+            <a:r>
+              <a:rPr sz="1500" b="1" dirty="0">
+                <a:solidFill>
+                  <a:srgbClr val="0D3158"/>
+                </a:solidFill>
+                <a:latin typeface="Segoe UI"/>
+              </a:rPr>
+              <a:t> </a:t>
+            </a:r>
+            <a:r>
+              <a:rPr sz="1500" b="1" dirty="0" err="1">
+                <a:solidFill>
+                  <a:srgbClr val="0D3158"/>
+                </a:solidFill>
+                <a:latin typeface="Segoe UI"/>
+              </a:rPr>
+              <a:t>giữ</a:t>
+            </a:r>
+            <a:r>
+              <a:rPr sz="1500" b="1" dirty="0">
+                <a:solidFill>
+                  <a:srgbClr val="0D3158"/>
+                </a:solidFill>
+                <a:latin typeface="Segoe UI"/>
+              </a:rPr>
+              <a:t> </a:t>
+            </a:r>
+            <a:r>
+              <a:rPr sz="1500" b="1" dirty="0" err="1">
+                <a:solidFill>
+                  <a:srgbClr val="0D3158"/>
+                </a:solidFill>
+                <a:latin typeface="Segoe UI"/>
+              </a:rPr>
+              <a:t>riêng</a:t>
+            </a:r>
+            <a:r>
+              <a:rPr sz="1500" b="1" dirty="0">
+                <a:solidFill>
+                  <a:srgbClr val="0D3158"/>
+                </a:solidFill>
+                <a:latin typeface="Segoe UI"/>
+              </a:rPr>
+              <a:t> </a:t>
+            </a:r>
+            <a:r>
+              <a:rPr sz="1500" b="1" dirty="0" err="1">
+                <a:solidFill>
+                  <a:srgbClr val="0D3158"/>
+                </a:solidFill>
+                <a:latin typeface="Segoe UI"/>
+              </a:rPr>
+              <a:t>đã</a:t>
+            </a:r>
+            <a:r>
+              <a:rPr sz="1500" b="1" dirty="0">
+                <a:solidFill>
+                  <a:srgbClr val="0D3158"/>
+                </a:solidFill>
+                <a:latin typeface="Segoe UI"/>
+              </a:rPr>
+              <a:t> </a:t>
+            </a:r>
+            <a:r>
+              <a:rPr sz="1500" b="1" dirty="0" err="1">
+                <a:solidFill>
+                  <a:srgbClr val="0D3158"/>
+                </a:solidFill>
+                <a:latin typeface="Segoe UI"/>
+              </a:rPr>
+              <a:t>bắt</a:t>
+            </a:r>
+            <a:r>
+              <a:rPr sz="1500" b="1" dirty="0">
+                <a:solidFill>
+                  <a:srgbClr val="0D3158"/>
+                </a:solidFill>
+                <a:latin typeface="Segoe UI"/>
+              </a:rPr>
+              <a:t> </a:t>
+            </a:r>
+            <a:r>
+              <a:rPr sz="1500" b="1" dirty="0" err="1">
+                <a:solidFill>
+                  <a:srgbClr val="0D3158"/>
+                </a:solidFill>
+                <a:latin typeface="Segoe UI"/>
+              </a:rPr>
+              <a:t>được</a:t>
+            </a:r>
+            <a:r>
+              <a:rPr sz="1500" b="1" dirty="0">
+                <a:solidFill>
+                  <a:srgbClr val="0D3158"/>
+                </a:solidFill>
+                <a:latin typeface="Segoe UI"/>
+              </a:rPr>
+              <a:t> </a:t>
+            </a:r>
+            <a:r>
+              <a:rPr sz="1500" b="1" dirty="0" err="1">
+                <a:solidFill>
+                  <a:srgbClr val="0D3158"/>
+                </a:solidFill>
+                <a:latin typeface="Segoe UI"/>
+              </a:rPr>
+              <a:t>lỗi</a:t>
+            </a:r>
+            <a:r>
+              <a:rPr sz="1500" b="1" dirty="0">
+                <a:solidFill>
+                  <a:srgbClr val="0D3158"/>
+                </a:solidFill>
+                <a:latin typeface="Segoe UI"/>
+              </a:rPr>
+              <a:t> </a:t>
+            </a:r>
+            <a:r>
+              <a:rPr sz="1500" b="1" dirty="0" err="1">
+                <a:solidFill>
+                  <a:srgbClr val="0D3158"/>
+                </a:solidFill>
+                <a:latin typeface="Segoe UI"/>
+              </a:rPr>
+              <a:t>thật</a:t>
+            </a:r>
+            <a:endParaRPr sz="1500" b="1" dirty="0">
+              <a:solidFill>
+                <a:srgbClr val="0D3158"/>
+              </a:solidFill>
+              <a:latin typeface="Segoe UI"/>
+            </a:endParaRPr>
           </a:p>
           <a:p>
             <a:pPr algn="l">
@@ -12495,13 +12189,625 @@
               </a:spcAft>
             </a:pPr>
             <a:r>
-              <a:rPr sz="1150" b="0">
+              <a:rPr sz="1150" b="0" dirty="0">
                 <a:solidFill>
                   <a:srgbClr val="5B7085"/>
                 </a:solidFill>
                 <a:latin typeface="Segoe UI"/>
               </a:rPr>
-              <a:t>Ba lỗi khiến hệ thống chốt nhầm thủ tục, trong đó hai lỗi đặc thù tiếng Việt: bỏ dấu làm “chứng minh” trùng “chung mình”, và “cưới” trùng “cuối”. Đã sửa, có kiểm thử khoá lại.</a:t>
+              <a:t>Ba </a:t>
+            </a:r>
+            <a:r>
+              <a:rPr sz="1150" b="0" dirty="0" err="1">
+                <a:solidFill>
+                  <a:srgbClr val="5B7085"/>
+                </a:solidFill>
+                <a:latin typeface="Segoe UI"/>
+              </a:rPr>
+              <a:t>lỗi</a:t>
+            </a:r>
+            <a:r>
+              <a:rPr sz="1150" b="0" dirty="0">
+                <a:solidFill>
+                  <a:srgbClr val="5B7085"/>
+                </a:solidFill>
+                <a:latin typeface="Segoe UI"/>
+              </a:rPr>
+              <a:t> </a:t>
+            </a:r>
+            <a:r>
+              <a:rPr sz="1150" b="0" dirty="0" err="1">
+                <a:solidFill>
+                  <a:srgbClr val="5B7085"/>
+                </a:solidFill>
+                <a:latin typeface="Segoe UI"/>
+              </a:rPr>
+              <a:t>khiến</a:t>
+            </a:r>
+            <a:r>
+              <a:rPr sz="1150" b="0" dirty="0">
+                <a:solidFill>
+                  <a:srgbClr val="5B7085"/>
+                </a:solidFill>
+                <a:latin typeface="Segoe UI"/>
+              </a:rPr>
+              <a:t> </a:t>
+            </a:r>
+            <a:r>
+              <a:rPr sz="1150" b="0" dirty="0" err="1">
+                <a:solidFill>
+                  <a:srgbClr val="5B7085"/>
+                </a:solidFill>
+                <a:latin typeface="Segoe UI"/>
+              </a:rPr>
+              <a:t>hệ</a:t>
+            </a:r>
+            <a:r>
+              <a:rPr sz="1150" b="0" dirty="0">
+                <a:solidFill>
+                  <a:srgbClr val="5B7085"/>
+                </a:solidFill>
+                <a:latin typeface="Segoe UI"/>
+              </a:rPr>
+              <a:t> </a:t>
+            </a:r>
+            <a:r>
+              <a:rPr sz="1150" b="0" dirty="0" err="1">
+                <a:solidFill>
+                  <a:srgbClr val="5B7085"/>
+                </a:solidFill>
+                <a:latin typeface="Segoe UI"/>
+              </a:rPr>
+              <a:t>thống</a:t>
+            </a:r>
+            <a:r>
+              <a:rPr sz="1150" b="0" dirty="0">
+                <a:solidFill>
+                  <a:srgbClr val="5B7085"/>
+                </a:solidFill>
+                <a:latin typeface="Segoe UI"/>
+              </a:rPr>
+              <a:t> </a:t>
+            </a:r>
+            <a:r>
+              <a:rPr sz="1150" b="0" dirty="0" err="1">
+                <a:solidFill>
+                  <a:srgbClr val="5B7085"/>
+                </a:solidFill>
+                <a:latin typeface="Segoe UI"/>
+              </a:rPr>
+              <a:t>chốt</a:t>
+            </a:r>
+            <a:r>
+              <a:rPr sz="1150" b="0" dirty="0">
+                <a:solidFill>
+                  <a:srgbClr val="5B7085"/>
+                </a:solidFill>
+                <a:latin typeface="Segoe UI"/>
+              </a:rPr>
+              <a:t> </a:t>
+            </a:r>
+            <a:r>
+              <a:rPr sz="1150" b="0" dirty="0" err="1">
+                <a:solidFill>
+                  <a:srgbClr val="5B7085"/>
+                </a:solidFill>
+                <a:latin typeface="Segoe UI"/>
+              </a:rPr>
+              <a:t>nhầm</a:t>
+            </a:r>
+            <a:r>
+              <a:rPr sz="1150" b="0" dirty="0">
+                <a:solidFill>
+                  <a:srgbClr val="5B7085"/>
+                </a:solidFill>
+                <a:latin typeface="Segoe UI"/>
+              </a:rPr>
+              <a:t> </a:t>
+            </a:r>
+            <a:r>
+              <a:rPr sz="1150" b="0" dirty="0" err="1">
+                <a:solidFill>
+                  <a:srgbClr val="5B7085"/>
+                </a:solidFill>
+                <a:latin typeface="Segoe UI"/>
+              </a:rPr>
+              <a:t>thủ</a:t>
+            </a:r>
+            <a:r>
+              <a:rPr sz="1150" b="0" dirty="0">
+                <a:solidFill>
+                  <a:srgbClr val="5B7085"/>
+                </a:solidFill>
+                <a:latin typeface="Segoe UI"/>
+              </a:rPr>
+              <a:t> </a:t>
+            </a:r>
+            <a:r>
+              <a:rPr sz="1150" b="0" dirty="0" err="1">
+                <a:solidFill>
+                  <a:srgbClr val="5B7085"/>
+                </a:solidFill>
+                <a:latin typeface="Segoe UI"/>
+              </a:rPr>
+              <a:t>tục</a:t>
+            </a:r>
+            <a:r>
+              <a:rPr sz="1150" b="0" dirty="0">
+                <a:solidFill>
+                  <a:srgbClr val="5B7085"/>
+                </a:solidFill>
+                <a:latin typeface="Segoe UI"/>
+              </a:rPr>
+              <a:t>, </a:t>
+            </a:r>
+            <a:r>
+              <a:rPr sz="1150" b="0" dirty="0" err="1">
+                <a:solidFill>
+                  <a:srgbClr val="5B7085"/>
+                </a:solidFill>
+                <a:latin typeface="Segoe UI"/>
+              </a:rPr>
+              <a:t>trong</a:t>
+            </a:r>
+            <a:r>
+              <a:rPr sz="1150" b="0" dirty="0">
+                <a:solidFill>
+                  <a:srgbClr val="5B7085"/>
+                </a:solidFill>
+                <a:latin typeface="Segoe UI"/>
+              </a:rPr>
+              <a:t> </a:t>
+            </a:r>
+            <a:r>
+              <a:rPr sz="1150" b="0" dirty="0" err="1">
+                <a:solidFill>
+                  <a:srgbClr val="5B7085"/>
+                </a:solidFill>
+                <a:latin typeface="Segoe UI"/>
+              </a:rPr>
+              <a:t>đó</a:t>
+            </a:r>
+            <a:r>
+              <a:rPr sz="1150" b="0" dirty="0">
+                <a:solidFill>
+                  <a:srgbClr val="5B7085"/>
+                </a:solidFill>
+                <a:latin typeface="Segoe UI"/>
+              </a:rPr>
+              <a:t> </a:t>
+            </a:r>
+            <a:r>
+              <a:rPr sz="1150" b="0" dirty="0" err="1">
+                <a:solidFill>
+                  <a:srgbClr val="5B7085"/>
+                </a:solidFill>
+                <a:latin typeface="Segoe UI"/>
+              </a:rPr>
+              <a:t>hai</a:t>
+            </a:r>
+            <a:r>
+              <a:rPr sz="1150" b="0" dirty="0">
+                <a:solidFill>
+                  <a:srgbClr val="5B7085"/>
+                </a:solidFill>
+                <a:latin typeface="Segoe UI"/>
+              </a:rPr>
+              <a:t> </a:t>
+            </a:r>
+            <a:r>
+              <a:rPr sz="1150" b="0" dirty="0" err="1">
+                <a:solidFill>
+                  <a:srgbClr val="5B7085"/>
+                </a:solidFill>
+                <a:latin typeface="Segoe UI"/>
+              </a:rPr>
+              <a:t>lỗi</a:t>
+            </a:r>
+            <a:r>
+              <a:rPr sz="1150" b="0" dirty="0">
+                <a:solidFill>
+                  <a:srgbClr val="5B7085"/>
+                </a:solidFill>
+                <a:latin typeface="Segoe UI"/>
+              </a:rPr>
+              <a:t> </a:t>
+            </a:r>
+            <a:r>
+              <a:rPr sz="1150" b="0" dirty="0" err="1">
+                <a:solidFill>
+                  <a:srgbClr val="5B7085"/>
+                </a:solidFill>
+                <a:latin typeface="Segoe UI"/>
+              </a:rPr>
+              <a:t>đặc</a:t>
+            </a:r>
+            <a:r>
+              <a:rPr sz="1150" b="0" dirty="0">
+                <a:solidFill>
+                  <a:srgbClr val="5B7085"/>
+                </a:solidFill>
+                <a:latin typeface="Segoe UI"/>
+              </a:rPr>
+              <a:t> </a:t>
+            </a:r>
+            <a:r>
+              <a:rPr sz="1150" b="0" dirty="0" err="1">
+                <a:solidFill>
+                  <a:srgbClr val="5B7085"/>
+                </a:solidFill>
+                <a:latin typeface="Segoe UI"/>
+              </a:rPr>
+              <a:t>thù</a:t>
+            </a:r>
+            <a:r>
+              <a:rPr sz="1150" b="0" dirty="0">
+                <a:solidFill>
+                  <a:srgbClr val="5B7085"/>
+                </a:solidFill>
+                <a:latin typeface="Segoe UI"/>
+              </a:rPr>
+              <a:t> </a:t>
+            </a:r>
+            <a:r>
+              <a:rPr sz="1150" b="0" dirty="0" err="1">
+                <a:solidFill>
+                  <a:srgbClr val="5B7085"/>
+                </a:solidFill>
+                <a:latin typeface="Segoe UI"/>
+              </a:rPr>
+              <a:t>tiếng</a:t>
+            </a:r>
+            <a:r>
+              <a:rPr sz="1150" b="0" dirty="0">
+                <a:solidFill>
+                  <a:srgbClr val="5B7085"/>
+                </a:solidFill>
+                <a:latin typeface="Segoe UI"/>
+              </a:rPr>
+              <a:t> Việt: </a:t>
+            </a:r>
+            <a:r>
+              <a:rPr sz="1150" b="0" dirty="0" err="1">
+                <a:solidFill>
+                  <a:srgbClr val="5B7085"/>
+                </a:solidFill>
+                <a:latin typeface="Segoe UI"/>
+              </a:rPr>
+              <a:t>bỏ</a:t>
+            </a:r>
+            <a:r>
+              <a:rPr sz="1150" b="0" dirty="0">
+                <a:solidFill>
+                  <a:srgbClr val="5B7085"/>
+                </a:solidFill>
+                <a:latin typeface="Segoe UI"/>
+              </a:rPr>
+              <a:t> </a:t>
+            </a:r>
+            <a:r>
+              <a:rPr sz="1150" b="0" dirty="0" err="1">
+                <a:solidFill>
+                  <a:srgbClr val="5B7085"/>
+                </a:solidFill>
+                <a:latin typeface="Segoe UI"/>
+              </a:rPr>
+              <a:t>dấu</a:t>
+            </a:r>
+            <a:r>
+              <a:rPr sz="1150" b="0" dirty="0">
+                <a:solidFill>
+                  <a:srgbClr val="5B7085"/>
+                </a:solidFill>
+                <a:latin typeface="Segoe UI"/>
+              </a:rPr>
+              <a:t> </a:t>
+            </a:r>
+            <a:r>
+              <a:rPr sz="1150" b="0" dirty="0" err="1">
+                <a:solidFill>
+                  <a:srgbClr val="5B7085"/>
+                </a:solidFill>
+                <a:latin typeface="Segoe UI"/>
+              </a:rPr>
+              <a:t>làm</a:t>
+            </a:r>
+            <a:r>
+              <a:rPr sz="1150" b="0" dirty="0">
+                <a:solidFill>
+                  <a:srgbClr val="5B7085"/>
+                </a:solidFill>
+                <a:latin typeface="Segoe UI"/>
+              </a:rPr>
+              <a:t> “</a:t>
+            </a:r>
+            <a:r>
+              <a:rPr sz="1150" b="0" dirty="0" err="1">
+                <a:solidFill>
+                  <a:srgbClr val="5B7085"/>
+                </a:solidFill>
+                <a:latin typeface="Segoe UI"/>
+              </a:rPr>
+              <a:t>chứng</a:t>
+            </a:r>
+            <a:r>
+              <a:rPr sz="1150" b="0" dirty="0">
+                <a:solidFill>
+                  <a:srgbClr val="5B7085"/>
+                </a:solidFill>
+                <a:latin typeface="Segoe UI"/>
+              </a:rPr>
+              <a:t> </a:t>
+            </a:r>
+            <a:r>
+              <a:rPr sz="1150" b="0" dirty="0" err="1">
+                <a:solidFill>
+                  <a:srgbClr val="5B7085"/>
+                </a:solidFill>
+                <a:latin typeface="Segoe UI"/>
+              </a:rPr>
+              <a:t>minh</a:t>
+            </a:r>
+            <a:r>
+              <a:rPr sz="1150" b="0" dirty="0">
+                <a:solidFill>
+                  <a:srgbClr val="5B7085"/>
+                </a:solidFill>
+                <a:latin typeface="Segoe UI"/>
+              </a:rPr>
+              <a:t>” </a:t>
+            </a:r>
+            <a:r>
+              <a:rPr sz="1150" b="0" dirty="0" err="1">
+                <a:solidFill>
+                  <a:srgbClr val="5B7085"/>
+                </a:solidFill>
+                <a:latin typeface="Segoe UI"/>
+              </a:rPr>
+              <a:t>trùng</a:t>
+            </a:r>
+            <a:r>
+              <a:rPr sz="1150" b="0" dirty="0">
+                <a:solidFill>
+                  <a:srgbClr val="5B7085"/>
+                </a:solidFill>
+                <a:latin typeface="Segoe UI"/>
+              </a:rPr>
+              <a:t> “</a:t>
+            </a:r>
+            <a:r>
+              <a:rPr sz="1150" b="0" dirty="0" err="1">
+                <a:solidFill>
+                  <a:srgbClr val="5B7085"/>
+                </a:solidFill>
+                <a:latin typeface="Segoe UI"/>
+              </a:rPr>
+              <a:t>chung</a:t>
+            </a:r>
+            <a:r>
+              <a:rPr sz="1150" b="0" dirty="0">
+                <a:solidFill>
+                  <a:srgbClr val="5B7085"/>
+                </a:solidFill>
+                <a:latin typeface="Segoe UI"/>
+              </a:rPr>
+              <a:t> </a:t>
+            </a:r>
+            <a:r>
+              <a:rPr sz="1150" b="0" dirty="0" err="1">
+                <a:solidFill>
+                  <a:srgbClr val="5B7085"/>
+                </a:solidFill>
+                <a:latin typeface="Segoe UI"/>
+              </a:rPr>
+              <a:t>mình</a:t>
+            </a:r>
+            <a:r>
+              <a:rPr sz="1150" b="0" dirty="0">
+                <a:solidFill>
+                  <a:srgbClr val="5B7085"/>
+                </a:solidFill>
+                <a:latin typeface="Segoe UI"/>
+              </a:rPr>
+              <a:t>”, </a:t>
+            </a:r>
+            <a:r>
+              <a:rPr sz="1150" b="0" dirty="0" err="1">
+                <a:solidFill>
+                  <a:srgbClr val="5B7085"/>
+                </a:solidFill>
+                <a:latin typeface="Segoe UI"/>
+              </a:rPr>
+              <a:t>và</a:t>
+            </a:r>
+            <a:r>
+              <a:rPr sz="1150" b="0" dirty="0">
+                <a:solidFill>
+                  <a:srgbClr val="5B7085"/>
+                </a:solidFill>
+                <a:latin typeface="Segoe UI"/>
+              </a:rPr>
+              <a:t> “</a:t>
+            </a:r>
+            <a:r>
+              <a:rPr sz="1150" b="0" dirty="0" err="1">
+                <a:solidFill>
+                  <a:srgbClr val="5B7085"/>
+                </a:solidFill>
+                <a:latin typeface="Segoe UI"/>
+              </a:rPr>
+              <a:t>cưới</a:t>
+            </a:r>
+            <a:r>
+              <a:rPr sz="1150" b="0" dirty="0">
+                <a:solidFill>
+                  <a:srgbClr val="5B7085"/>
+                </a:solidFill>
+                <a:latin typeface="Segoe UI"/>
+              </a:rPr>
+              <a:t>” </a:t>
+            </a:r>
+            <a:r>
+              <a:rPr sz="1150" b="0" dirty="0" err="1">
+                <a:solidFill>
+                  <a:srgbClr val="5B7085"/>
+                </a:solidFill>
+                <a:latin typeface="Segoe UI"/>
+              </a:rPr>
+              <a:t>trùng</a:t>
+            </a:r>
+            <a:r>
+              <a:rPr sz="1150" b="0" dirty="0">
+                <a:solidFill>
+                  <a:srgbClr val="5B7085"/>
+                </a:solidFill>
+                <a:latin typeface="Segoe UI"/>
+              </a:rPr>
+              <a:t> “</a:t>
+            </a:r>
+            <a:r>
+              <a:rPr sz="1150" b="0" dirty="0" err="1">
+                <a:solidFill>
+                  <a:srgbClr val="5B7085"/>
+                </a:solidFill>
+                <a:latin typeface="Segoe UI"/>
+              </a:rPr>
+              <a:t>cuối</a:t>
+            </a:r>
+            <a:r>
+              <a:rPr sz="1150" b="0" dirty="0">
+                <a:solidFill>
+                  <a:srgbClr val="5B7085"/>
+                </a:solidFill>
+                <a:latin typeface="Segoe UI"/>
+              </a:rPr>
+              <a:t>”. </a:t>
+            </a:r>
+            <a:r>
+              <a:rPr sz="1150" b="0" dirty="0" err="1">
+                <a:solidFill>
+                  <a:srgbClr val="5B7085"/>
+                </a:solidFill>
+                <a:latin typeface="Segoe UI"/>
+              </a:rPr>
+              <a:t>Đã</a:t>
+            </a:r>
+            <a:r>
+              <a:rPr sz="1150" b="0" dirty="0">
+                <a:solidFill>
+                  <a:srgbClr val="5B7085"/>
+                </a:solidFill>
+                <a:latin typeface="Segoe UI"/>
+              </a:rPr>
+              <a:t> </a:t>
+            </a:r>
+            <a:r>
+              <a:rPr sz="1150" b="0" dirty="0" err="1">
+                <a:solidFill>
+                  <a:srgbClr val="5B7085"/>
+                </a:solidFill>
+                <a:latin typeface="Segoe UI"/>
+              </a:rPr>
+              <a:t>sửa</a:t>
+            </a:r>
+            <a:r>
+              <a:rPr sz="1150" b="0" dirty="0">
+                <a:solidFill>
+                  <a:srgbClr val="5B7085"/>
+                </a:solidFill>
+                <a:latin typeface="Segoe UI"/>
+              </a:rPr>
+              <a:t>, </a:t>
+            </a:r>
+            <a:r>
+              <a:rPr sz="1150" b="0" dirty="0" err="1">
+                <a:solidFill>
+                  <a:srgbClr val="5B7085"/>
+                </a:solidFill>
+                <a:latin typeface="Segoe UI"/>
+              </a:rPr>
+              <a:t>có</a:t>
+            </a:r>
+            <a:r>
+              <a:rPr sz="1150" b="0" dirty="0">
+                <a:solidFill>
+                  <a:srgbClr val="5B7085"/>
+                </a:solidFill>
+                <a:latin typeface="Segoe UI"/>
+              </a:rPr>
+              <a:t> </a:t>
+            </a:r>
+            <a:r>
+              <a:rPr sz="1150" b="0" dirty="0" err="1">
+                <a:solidFill>
+                  <a:srgbClr val="5B7085"/>
+                </a:solidFill>
+                <a:latin typeface="Segoe UI"/>
+              </a:rPr>
+              <a:t>kiểm</a:t>
+            </a:r>
+            <a:r>
+              <a:rPr sz="1150" b="0" dirty="0">
+                <a:solidFill>
+                  <a:srgbClr val="5B7085"/>
+                </a:solidFill>
+                <a:latin typeface="Segoe UI"/>
+              </a:rPr>
+              <a:t> </a:t>
+            </a:r>
+            <a:r>
+              <a:rPr sz="1150" b="0" dirty="0" err="1">
+                <a:solidFill>
+                  <a:srgbClr val="5B7085"/>
+                </a:solidFill>
+                <a:latin typeface="Segoe UI"/>
+              </a:rPr>
+              <a:t>thử</a:t>
+            </a:r>
+            <a:r>
+              <a:rPr sz="1150" b="0" dirty="0">
+                <a:solidFill>
+                  <a:srgbClr val="5B7085"/>
+                </a:solidFill>
+                <a:latin typeface="Segoe UI"/>
+              </a:rPr>
+              <a:t> </a:t>
+            </a:r>
+            <a:r>
+              <a:rPr sz="1150" b="0" dirty="0" err="1">
+                <a:solidFill>
+                  <a:srgbClr val="5B7085"/>
+                </a:solidFill>
+                <a:latin typeface="Segoe UI"/>
+              </a:rPr>
+              <a:t>khoá</a:t>
+            </a:r>
+            <a:r>
+              <a:rPr sz="1150" b="0" dirty="0">
+                <a:solidFill>
+                  <a:srgbClr val="5B7085"/>
+                </a:solidFill>
+                <a:latin typeface="Segoe UI"/>
+              </a:rPr>
+              <a:t> </a:t>
+            </a:r>
+            <a:r>
+              <a:rPr sz="1150" b="0" dirty="0" err="1">
+                <a:solidFill>
+                  <a:srgbClr val="5B7085"/>
+                </a:solidFill>
+                <a:latin typeface="Segoe UI"/>
+              </a:rPr>
+              <a:t>lại</a:t>
+            </a:r>
+            <a:r>
+              <a:rPr sz="1150" b="0" dirty="0">
+                <a:solidFill>
+                  <a:srgbClr val="5B7085"/>
+                </a:solidFill>
+                <a:latin typeface="Segoe UI"/>
+              </a:rPr>
+              <a:t>.</a:t>
             </a:r>
           </a:p>
         </p:txBody>
@@ -12547,6 +12853,7 @@
           <a:lstStyle/>
           <a:p>
             <a:pPr algn="ctr"/>
+            <a:endParaRPr/>
           </a:p>
         </p:txBody>
       </p:sp>
@@ -12598,7 +12905,7 @@
 </file>
 
 <file path=ppt/slides/slide9.xml><?xml version="1.0" encoding="utf-8"?>
-<p:sld xmlns:a="http://schemas.openxmlformats.org/drawingml/2006/main" xmlns:p="http://schemas.openxmlformats.org/presentationml/2006/main" xmlns:r="http://schemas.openxmlformats.org/officeDocument/2006/relationships">
+<p:sld xmlns:a="http://schemas.openxmlformats.org/drawingml/2006/main" xmlns:r="http://schemas.openxmlformats.org/officeDocument/2006/relationships" xmlns:p="http://schemas.openxmlformats.org/presentationml/2006/main">
   <p:cSld>
     <p:bg>
       <p:bgPr>
@@ -12614,7 +12921,14 @@
         <p:cNvGrpSpPr/>
         <p:nvPr/>
       </p:nvGrpSpPr>
-      <p:grpSpPr/>
+      <p:grpSpPr>
+        <a:xfrm>
+          <a:off x="0" y="0"/>
+          <a:ext cx="0" cy="0"/>
+          <a:chOff x="0" y="0"/>
+          <a:chExt cx="0" cy="0"/>
+        </a:xfrm>
+      </p:grpSpPr>
       <p:sp>
         <p:nvSpPr>
           <p:cNvPr id="2" name="TextBox 1"/>
@@ -12678,7 +12992,7 @@
         </p:nvSpPr>
         <p:spPr>
           <a:xfrm>
-            <a:off x="685800" y="2286000"/>
+            <a:off x="685800" y="1505823"/>
             <a:ext cx="10789920" cy="1207008"/>
           </a:xfrm>
           <a:prstGeom prst="rect">
@@ -12711,6 +13025,7 @@
           <a:lstStyle/>
           <a:p>
             <a:pPr algn="ctr"/>
+            <a:endParaRPr/>
           </a:p>
         </p:txBody>
       </p:sp>
@@ -12722,7 +13037,7 @@
         </p:nvSpPr>
         <p:spPr>
           <a:xfrm>
-            <a:off x="685800" y="2286000"/>
+            <a:off x="685800" y="1505823"/>
             <a:ext cx="50292" cy="1207008"/>
           </a:xfrm>
           <a:prstGeom prst="rect">
@@ -12755,6 +13070,7 @@
           <a:lstStyle/>
           <a:p>
             <a:pPr algn="ctr"/>
+            <a:endParaRPr/>
           </a:p>
         </p:txBody>
       </p:sp>
@@ -12766,7 +13082,7 @@
         </p:nvSpPr>
         <p:spPr>
           <a:xfrm>
-            <a:off x="914400" y="2432304"/>
+            <a:off x="914400" y="1652127"/>
             <a:ext cx="10378440" cy="932688"/>
           </a:xfrm>
           <a:prstGeom prst="rect">
@@ -12821,7 +13137,7 @@
         </p:nvSpPr>
         <p:spPr>
           <a:xfrm>
-            <a:off x="685800" y="3657600"/>
+            <a:off x="685800" y="2877423"/>
             <a:ext cx="10789920" cy="1207008"/>
           </a:xfrm>
           <a:prstGeom prst="rect">
@@ -12854,6 +13170,7 @@
           <a:lstStyle/>
           <a:p>
             <a:pPr algn="ctr"/>
+            <a:endParaRPr/>
           </a:p>
         </p:txBody>
       </p:sp>
@@ -12865,7 +13182,7 @@
         </p:nvSpPr>
         <p:spPr>
           <a:xfrm>
-            <a:off x="685800" y="3657600"/>
+            <a:off x="685800" y="2877423"/>
             <a:ext cx="50292" cy="1207008"/>
           </a:xfrm>
           <a:prstGeom prst="rect">
@@ -12898,6 +13215,7 @@
           <a:lstStyle/>
           <a:p>
             <a:pPr algn="ctr"/>
+            <a:endParaRPr/>
           </a:p>
         </p:txBody>
       </p:sp>
@@ -12909,7 +13227,7 @@
         </p:nvSpPr>
         <p:spPr>
           <a:xfrm>
-            <a:off x="914400" y="3803904"/>
+            <a:off x="914400" y="3023727"/>
             <a:ext cx="10378440" cy="932688"/>
           </a:xfrm>
           <a:prstGeom prst="rect">
@@ -12964,7 +13282,7 @@
         </p:nvSpPr>
         <p:spPr>
           <a:xfrm>
-            <a:off x="685800" y="5029200"/>
+            <a:off x="685800" y="4249023"/>
             <a:ext cx="10789920" cy="1207008"/>
           </a:xfrm>
           <a:prstGeom prst="rect">
@@ -12997,6 +13315,7 @@
           <a:lstStyle/>
           <a:p>
             <a:pPr algn="ctr"/>
+            <a:endParaRPr/>
           </a:p>
         </p:txBody>
       </p:sp>
@@ -13008,7 +13327,7 @@
         </p:nvSpPr>
         <p:spPr>
           <a:xfrm>
-            <a:off x="685800" y="5029200"/>
+            <a:off x="685800" y="4249023"/>
             <a:ext cx="50292" cy="1207008"/>
           </a:xfrm>
           <a:prstGeom prst="rect">
@@ -13041,6 +13360,7 @@
           <a:lstStyle/>
           <a:p>
             <a:pPr algn="ctr"/>
+            <a:endParaRPr/>
           </a:p>
         </p:txBody>
       </p:sp>
@@ -13052,7 +13372,7 @@
         </p:nvSpPr>
         <p:spPr>
           <a:xfrm>
-            <a:off x="914400" y="5175504"/>
+            <a:off x="914400" y="4395327"/>
             <a:ext cx="10378440" cy="932688"/>
           </a:xfrm>
           <a:prstGeom prst="rect">
@@ -13477,44 +13797,44 @@
         <a:sysClr val="window" lastClr="FFFFFF"/>
       </a:lt1>
       <a:dk2>
-        <a:srgbClr val="1F497D"/>
+        <a:srgbClr val="0E2841"/>
       </a:dk2>
       <a:lt2>
-        <a:srgbClr val="EEECE1"/>
+        <a:srgbClr val="E8E8E8"/>
       </a:lt2>
       <a:accent1>
-        <a:srgbClr val="4F81BD"/>
+        <a:srgbClr val="156082"/>
       </a:accent1>
       <a:accent2>
-        <a:srgbClr val="C0504D"/>
+        <a:srgbClr val="E97132"/>
       </a:accent2>
       <a:accent3>
-        <a:srgbClr val="9BBB59"/>
+        <a:srgbClr val="196B24"/>
       </a:accent3>
       <a:accent4>
-        <a:srgbClr val="8064A2"/>
+        <a:srgbClr val="0F9ED5"/>
       </a:accent4>
       <a:accent5>
-        <a:srgbClr val="4BACC6"/>
+        <a:srgbClr val="A02B93"/>
       </a:accent5>
       <a:accent6>
-        <a:srgbClr val="F79646"/>
+        <a:srgbClr val="4EA72E"/>
       </a:accent6>
       <a:hlink>
-        <a:srgbClr val="0000FF"/>
+        <a:srgbClr val="467886"/>
       </a:hlink>
       <a:folHlink>
-        <a:srgbClr val="800080"/>
+        <a:srgbClr val="96607D"/>
       </a:folHlink>
     </a:clrScheme>
     <a:fontScheme name="Office">
       <a:majorFont>
-        <a:latin typeface="Calibri"/>
+        <a:latin typeface="Aptos Display" panose="02110004020202020204"/>
         <a:ea typeface=""/>
         <a:cs typeface=""/>
-        <a:font script="Jpan" typeface="ＭＳ Ｐゴシック"/>
+        <a:font script="Jpan" typeface="游ゴシック Light"/>
         <a:font script="Hang" typeface="맑은 고딕"/>
-        <a:font script="Hans" typeface="宋体"/>
+        <a:font script="Hans" typeface="等线 Light"/>
         <a:font script="Hant" typeface="新細明體"/>
         <a:font script="Arab" typeface="Times New Roman"/>
         <a:font script="Hebr" typeface="Times New Roman"/>
@@ -13542,14 +13862,31 @@
         <a:font script="Viet" typeface="Times New Roman"/>
         <a:font script="Uigh" typeface="Microsoft Uighur"/>
         <a:font script="Geor" typeface="Sylfaen"/>
+        <a:font script="Armn" typeface="Arial"/>
+        <a:font script="Bugi" typeface="Leelawadee UI"/>
+        <a:font script="Bopo" typeface="Microsoft JhengHei"/>
+        <a:font script="Java" typeface="Javanese Text"/>
+        <a:font script="Lisu" typeface="Segoe UI"/>
+        <a:font script="Mymr" typeface="Myanmar Text"/>
+        <a:font script="Nkoo" typeface="Ebrima"/>
+        <a:font script="Olck" typeface="Nirmala UI"/>
+        <a:font script="Osma" typeface="Ebrima"/>
+        <a:font script="Phag" typeface="Phagspa"/>
+        <a:font script="Syrn" typeface="Estrangelo Edessa"/>
+        <a:font script="Syrj" typeface="Estrangelo Edessa"/>
+        <a:font script="Syre" typeface="Estrangelo Edessa"/>
+        <a:font script="Sora" typeface="Nirmala UI"/>
+        <a:font script="Tale" typeface="Microsoft Tai Le"/>
+        <a:font script="Talu" typeface="Microsoft New Tai Lue"/>
+        <a:font script="Tfng" typeface="Ebrima"/>
       </a:majorFont>
       <a:minorFont>
-        <a:latin typeface="Calibri"/>
+        <a:latin typeface="Aptos" panose="02110004020202020204"/>
         <a:ea typeface=""/>
         <a:cs typeface=""/>
-        <a:font script="Jpan" typeface="ＭＳ Ｐゴシック"/>
+        <a:font script="Jpan" typeface="游ゴシック"/>
         <a:font script="Hang" typeface="맑은 고딕"/>
-        <a:font script="Hans" typeface="宋体"/>
+        <a:font script="Hans" typeface="等线"/>
         <a:font script="Hant" typeface="新細明體"/>
         <a:font script="Arab" typeface="Arial"/>
         <a:font script="Hebr" typeface="Arial"/>
@@ -13577,6 +13914,23 @@
         <a:font script="Viet" typeface="Arial"/>
         <a:font script="Uigh" typeface="Microsoft Uighur"/>
         <a:font script="Geor" typeface="Sylfaen"/>
+        <a:font script="Armn" typeface="Arial"/>
+        <a:font script="Bugi" typeface="Leelawadee UI"/>
+        <a:font script="Bopo" typeface="Microsoft JhengHei"/>
+        <a:font script="Java" typeface="Javanese Text"/>
+        <a:font script="Lisu" typeface="Segoe UI"/>
+        <a:font script="Mymr" typeface="Myanmar Text"/>
+        <a:font script="Nkoo" typeface="Ebrima"/>
+        <a:font script="Olck" typeface="Nirmala UI"/>
+        <a:font script="Osma" typeface="Ebrima"/>
+        <a:font script="Phag" typeface="Phagspa"/>
+        <a:font script="Syrn" typeface="Estrangelo Edessa"/>
+        <a:font script="Syrj" typeface="Estrangelo Edessa"/>
+        <a:font script="Syre" typeface="Estrangelo Edessa"/>
+        <a:font script="Sora" typeface="Nirmala UI"/>
+        <a:font script="Tale" typeface="Microsoft Tai Le"/>
+        <a:font script="Talu" typeface="Microsoft New Tai Lue"/>
+        <a:font script="Tfng" typeface="Ebrima"/>
       </a:minorFont>
     </a:fontScheme>
     <a:fmtScheme name="Office">
@@ -13588,180 +13942,136 @@
           <a:gsLst>
             <a:gs pos="0">
               <a:schemeClr val="phClr">
-                <a:tint val="50000"/>
-                <a:satMod val="300000"/>
+                <a:lumMod val="110000"/>
+                <a:satMod val="105000"/>
+                <a:tint val="67000"/>
               </a:schemeClr>
             </a:gs>
-            <a:gs pos="35000">
+            <a:gs pos="50000">
               <a:schemeClr val="phClr">
-                <a:tint val="37000"/>
-                <a:satMod val="300000"/>
+                <a:lumMod val="105000"/>
+                <a:satMod val="103000"/>
+                <a:tint val="73000"/>
               </a:schemeClr>
             </a:gs>
             <a:gs pos="100000">
               <a:schemeClr val="phClr">
-                <a:tint val="15000"/>
-                <a:satMod val="350000"/>
+                <a:lumMod val="105000"/>
+                <a:satMod val="109000"/>
+                <a:tint val="81000"/>
               </a:schemeClr>
             </a:gs>
           </a:gsLst>
-          <a:lin ang="16200000" scaled="1"/>
+          <a:lin ang="5400000" scaled="0"/>
         </a:gradFill>
         <a:gradFill rotWithShape="1">
           <a:gsLst>
             <a:gs pos="0">
               <a:schemeClr val="phClr">
-                <a:tint val="100000"/>
+                <a:satMod val="103000"/>
+                <a:lumMod val="102000"/>
+                <a:tint val="94000"/>
+              </a:schemeClr>
+            </a:gs>
+            <a:gs pos="50000">
+              <a:schemeClr val="phClr">
+                <a:satMod val="110000"/>
+                <a:lumMod val="100000"/>
                 <a:shade val="100000"/>
-                <a:satMod val="130000"/>
               </a:schemeClr>
             </a:gs>
             <a:gs pos="100000">
               <a:schemeClr val="phClr">
-                <a:tint val="50000"/>
-                <a:shade val="100000"/>
-                <a:satMod val="350000"/>
+                <a:lumMod val="99000"/>
+                <a:satMod val="120000"/>
+                <a:shade val="78000"/>
               </a:schemeClr>
             </a:gs>
           </a:gsLst>
-          <a:lin ang="16200000" scaled="0"/>
+          <a:lin ang="5400000" scaled="0"/>
         </a:gradFill>
       </a:fillStyleLst>
       <a:lnStyleLst>
-        <a:ln w="9525" cap="flat" cmpd="sng" algn="ctr">
+        <a:ln w="12700" cap="flat" cmpd="sng" algn="ctr">
           <a:solidFill>
-            <a:schemeClr val="phClr">
-              <a:shade val="95000"/>
-              <a:satMod val="105000"/>
-            </a:schemeClr>
+            <a:schemeClr val="phClr"/>
           </a:solidFill>
           <a:prstDash val="solid"/>
+          <a:miter lim="800000"/>
+        </a:ln>
+        <a:ln w="19050" cap="flat" cmpd="sng" algn="ctr">
+          <a:solidFill>
+            <a:schemeClr val="phClr"/>
+          </a:solidFill>
+          <a:prstDash val="solid"/>
+          <a:miter lim="800000"/>
         </a:ln>
         <a:ln w="25400" cap="flat" cmpd="sng" algn="ctr">
           <a:solidFill>
             <a:schemeClr val="phClr"/>
           </a:solidFill>
           <a:prstDash val="solid"/>
-        </a:ln>
-        <a:ln w="38100" cap="flat" cmpd="sng" algn="ctr">
-          <a:solidFill>
-            <a:schemeClr val="phClr"/>
-          </a:solidFill>
-          <a:prstDash val="solid"/>
+          <a:miter lim="800000"/>
         </a:ln>
       </a:lnStyleLst>
       <a:effectStyleLst>
         <a:effectStyle>
+          <a:effectLst/>
+        </a:effectStyle>
+        <a:effectStyle>
+          <a:effectLst/>
+        </a:effectStyle>
+        <a:effectStyle>
           <a:effectLst>
-            <a:outerShdw blurRad="40000" dist="20000" dir="5400000" rotWithShape="0">
+            <a:outerShdw blurRad="57150" dist="19050" dir="5400000" algn="ctr" rotWithShape="0">
               <a:srgbClr val="000000">
-                <a:alpha val="38000"/>
+                <a:alpha val="63000"/>
               </a:srgbClr>
             </a:outerShdw>
           </a:effectLst>
-        </a:effectStyle>
-        <a:effectStyle>
-          <a:effectLst>
-            <a:outerShdw blurRad="40000" dist="23000" dir="5400000" rotWithShape="0">
-              <a:srgbClr val="000000">
-                <a:alpha val="35000"/>
-              </a:srgbClr>
-            </a:outerShdw>
-          </a:effectLst>
-        </a:effectStyle>
-        <a:effectStyle>
-          <a:effectLst>
-            <a:outerShdw blurRad="40000" dist="23000" dir="5400000" rotWithShape="0">
-              <a:srgbClr val="000000">
-                <a:alpha val="35000"/>
-              </a:srgbClr>
-            </a:outerShdw>
-          </a:effectLst>
-          <a:scene3d>
-            <a:camera prst="orthographicFront">
-              <a:rot lat="0" lon="0" rev="0"/>
-            </a:camera>
-            <a:lightRig rig="threePt" dir="t">
-              <a:rot lat="0" lon="0" rev="1200000"/>
-            </a:lightRig>
-          </a:scene3d>
-          <a:sp3d>
-            <a:bevelT w="63500" h="25400"/>
-          </a:sp3d>
         </a:effectStyle>
       </a:effectStyleLst>
       <a:bgFillStyleLst>
         <a:solidFill>
           <a:schemeClr val="phClr"/>
         </a:solidFill>
+        <a:solidFill>
+          <a:schemeClr val="phClr">
+            <a:tint val="95000"/>
+            <a:satMod val="170000"/>
+          </a:schemeClr>
+        </a:solidFill>
         <a:gradFill rotWithShape="1">
           <a:gsLst>
             <a:gs pos="0">
               <a:schemeClr val="phClr">
-                <a:tint val="40000"/>
-                <a:satMod val="350000"/>
+                <a:tint val="93000"/>
+                <a:satMod val="150000"/>
+                <a:shade val="98000"/>
+                <a:lumMod val="102000"/>
               </a:schemeClr>
             </a:gs>
-            <a:gs pos="40000">
+            <a:gs pos="50000">
               <a:schemeClr val="phClr">
-                <a:tint val="45000"/>
-                <a:shade val="99000"/>
-                <a:satMod val="350000"/>
+                <a:tint val="98000"/>
+                <a:satMod val="130000"/>
+                <a:shade val="90000"/>
+                <a:lumMod val="103000"/>
               </a:schemeClr>
             </a:gs>
             <a:gs pos="100000">
               <a:schemeClr val="phClr">
-                <a:shade val="20000"/>
-                <a:satMod val="255000"/>
+                <a:shade val="63000"/>
+                <a:satMod val="120000"/>
               </a:schemeClr>
             </a:gs>
           </a:gsLst>
-          <a:path path="circle">
-            <a:fillToRect l="50000" t="-80000" r="50000" b="180000"/>
-          </a:path>
-        </a:gradFill>
-        <a:gradFill rotWithShape="1">
-          <a:gsLst>
-            <a:gs pos="0">
-              <a:schemeClr val="phClr">
-                <a:tint val="80000"/>
-                <a:satMod val="300000"/>
-              </a:schemeClr>
-            </a:gs>
-            <a:gs pos="100000">
-              <a:schemeClr val="phClr">
-                <a:shade val="30000"/>
-                <a:satMod val="200000"/>
-              </a:schemeClr>
-            </a:gs>
-          </a:gsLst>
-          <a:path path="circle">
-            <a:fillToRect l="50000" t="50000" r="50000" b="50000"/>
-          </a:path>
+          <a:lin ang="5400000" scaled="0"/>
         </a:gradFill>
       </a:bgFillStyleLst>
     </a:fmtScheme>
   </a:themeElements>
   <a:objectDefaults>
-    <a:spDef>
-      <a:spPr/>
-      <a:bodyPr/>
-      <a:lstStyle/>
-      <a:style>
-        <a:lnRef idx="1">
-          <a:schemeClr val="accent1"/>
-        </a:lnRef>
-        <a:fillRef idx="3">
-          <a:schemeClr val="accent1"/>
-        </a:fillRef>
-        <a:effectRef idx="2">
-          <a:schemeClr val="accent1"/>
-        </a:effectRef>
-        <a:fontRef idx="minor">
-          <a:schemeClr val="lt1"/>
-        </a:fontRef>
-      </a:style>
-    </a:spDef>
     <a:lnDef>
       <a:spPr/>
       <a:bodyPr/>
@@ -13783,5 +14093,10 @@
     </a:lnDef>
   </a:objectDefaults>
   <a:extraClrSchemeLst/>
+  <a:extLst>
+    <a:ext uri="{05A4C25C-085E-4340-85A3-A5531E510DB2}">
+      <thm15:themeFamily xmlns:thm15="http://schemas.microsoft.com/office/thememl/2012/main" name="Office Theme" id="{2E142A2C-CD16-42D6-873A-C26D2A0506FA}" vid="{1BDDFF52-6CD6-40A5-AB3C-68EB2F1E4D0A}"/>
+    </a:ext>
+  </a:extLst>
 </a:theme>
 </file>